--- a/reports/NeuroADHD_Presentation.pptx
+++ b/reports/NeuroADHD_Presentation.pptx
@@ -2192,7 +2192,7 @@
     <p:bg>
       <p:bgPr>
         <a:solidFill>
-          <a:srgbClr val="07090E"/>
+          <a:srgbClr val="090A0F"/>
         </a:solidFill>
       </p:bgPr>
     </p:bg>
@@ -2218,20 +2218,20 @@
         </p:nvSpPr>
         <p:spPr>
           <a:xfrm>
-            <a:off x="731520" y="1280160"/>
-            <a:ext cx="4389120" cy="347472"/>
+            <a:off x="731520" y="1097280"/>
+            <a:ext cx="4206240" cy="329184"/>
           </a:xfrm>
           <a:prstGeom prst="roundRect">
             <a:avLst>
-              <a:gd name="adj" fmla="val 52632"/>
+              <a:gd name="adj" fmla="val 50000"/>
             </a:avLst>
           </a:prstGeom>
           <a:solidFill>
-            <a:srgbClr val="131E2B"/>
+            <a:srgbClr val="131E2E"/>
           </a:solidFill>
           <a:ln w="12700">
             <a:solidFill>
-              <a:srgbClr val="2DD4BF"/>
+              <a:srgbClr val="06B6D4"/>
             </a:solidFill>
             <a:prstDash val="solid"/>
           </a:ln>
@@ -2245,8 +2245,8 @@
         </p:nvSpPr>
         <p:spPr>
           <a:xfrm>
-            <a:off x="731520" y="1307592"/>
-            <a:ext cx="4389120" cy="274320"/>
+            <a:off x="731520" y="1124712"/>
+            <a:ext cx="4206240" cy="274320"/>
           </a:xfrm>
           <a:prstGeom prst="rect">
             <a:avLst/>
@@ -2264,13 +2264,13 @@
             <a:r>
               <a:rPr lang="en-US" sz="1000" b="1" dirty="0">
                 <a:solidFill>
-                  <a:srgbClr val="2DD4BF"/>
-                </a:solidFill>
-                <a:latin typeface="Segoe UI" pitchFamily="34" charset="0"/>
-                <a:ea typeface="Segoe UI" pitchFamily="34" charset="-122"/>
-                <a:cs typeface="Segoe UI" pitchFamily="34" charset="-120"/>
-              </a:rPr>
-              <a:t>ADHD-200 CONSORTIUM BENCHMARK</a:t>
+                  <a:srgbClr val="22D3EE"/>
+                </a:solidFill>
+                <a:latin typeface="Segoe UI" pitchFamily="34" charset="0"/>
+                <a:ea typeface="Segoe UI" pitchFamily="34" charset="-122"/>
+                <a:cs typeface="Segoe UI" pitchFamily="34" charset="-120"/>
+              </a:rPr>
+              <a:t>● ADHD-200 CONSORTIUM BENCHMARK</a:t>
             </a:r>
             <a:endParaRPr lang="en-US" sz="1000" dirty="0"/>
           </a:p>
@@ -2284,34 +2284,34 @@
         </p:nvSpPr>
         <p:spPr>
           <a:xfrm>
-            <a:off x="731520" y="1828800"/>
-            <a:ext cx="10515600" cy="914400"/>
-          </a:xfrm>
-          <a:prstGeom prst="rect">
-            <a:avLst/>
-          </a:prstGeom>
-          <a:noFill/>
-          <a:ln/>
-        </p:spPr>
-        <p:txBody>
-          <a:bodyPr wrap="square" rtlCol="0" anchor="ctr"/>
-          <a:lstStyle/>
-          <a:p>
-            <a:pPr indent="0" marL="0">
-              <a:buNone/>
-            </a:pPr>
-            <a:r>
-              <a:rPr lang="en-US" sz="4200" i="1" dirty="0">
+            <a:off x="731520" y="1645920"/>
+            <a:ext cx="10515600" cy="1005840"/>
+          </a:xfrm>
+          <a:prstGeom prst="rect">
+            <a:avLst/>
+          </a:prstGeom>
+          <a:noFill/>
+          <a:ln/>
+        </p:spPr>
+        <p:txBody>
+          <a:bodyPr wrap="square" rtlCol="0" anchor="ctr"/>
+          <a:lstStyle/>
+          <a:p>
+            <a:pPr indent="0" marL="0">
+              <a:buNone/>
+            </a:pPr>
+            <a:r>
+              <a:rPr lang="en-US" sz="5200" b="1" dirty="0">
                 <a:solidFill>
                   <a:srgbClr val="FFFFFF"/>
                 </a:solidFill>
-                <a:latin typeface="Georgia" pitchFamily="34" charset="0"/>
-                <a:ea typeface="Georgia" pitchFamily="34" charset="-122"/>
-                <a:cs typeface="Georgia" pitchFamily="34" charset="-120"/>
-              </a:rPr>
-              <a:t>NeuroADHD, explored.</a:t>
-            </a:r>
-            <a:endParaRPr lang="en-US" sz="4200" dirty="0"/>
+                <a:latin typeface="Segoe UI" pitchFamily="34" charset="0"/>
+                <a:ea typeface="Segoe UI" pitchFamily="34" charset="-122"/>
+                <a:cs typeface="Segoe UI" pitchFamily="34" charset="-120"/>
+              </a:rPr>
+              <a:t>NeuroADHD</a:t>
+            </a:r>
+            <a:endParaRPr lang="en-US" sz="5200" dirty="0"/>
           </a:p>
         </p:txBody>
       </p:sp>
@@ -2323,8 +2323,47 @@
         </p:nvSpPr>
         <p:spPr>
           <a:xfrm>
-            <a:off x="731520" y="2880360"/>
-            <a:ext cx="10241280" cy="594360"/>
+            <a:off x="731520" y="2697480"/>
+            <a:ext cx="10241280" cy="502920"/>
+          </a:xfrm>
+          <a:prstGeom prst="rect">
+            <a:avLst/>
+          </a:prstGeom>
+          <a:noFill/>
+          <a:ln/>
+        </p:spPr>
+        <p:txBody>
+          <a:bodyPr wrap="square" rtlCol="0" anchor="ctr"/>
+          <a:lstStyle/>
+          <a:p>
+            <a:pPr indent="0" marL="0">
+              <a:buNone/>
+            </a:pPr>
+            <a:r>
+              <a:rPr lang="en-US" sz="1700" b="1" dirty="0">
+                <a:solidFill>
+                  <a:srgbClr val="38BDF8"/>
+                </a:solidFill>
+                <a:latin typeface="Segoe UI" pitchFamily="34" charset="0"/>
+                <a:ea typeface="Segoe UI" pitchFamily="34" charset="-122"/>
+                <a:cs typeface="Segoe UI" pitchFamily="34" charset="-120"/>
+              </a:rPr>
+              <a:t>Predictive Modeling &amp; Connectomic Analysis of Attention Deficit Hyperactivity Disorder</a:t>
+            </a:r>
+            <a:endParaRPr lang="en-US" sz="1700" dirty="0"/>
+          </a:p>
+        </p:txBody>
+      </p:sp>
+      <p:sp>
+        <p:nvSpPr>
+          <p:cNvPr id="6" name="Text 4"/>
+          <p:cNvSpPr/>
+          <p:nvPr/>
+        </p:nvSpPr>
+        <p:spPr>
+          <a:xfrm>
+            <a:off x="731520" y="3337560"/>
+            <a:ext cx="10241280" cy="685800"/>
           </a:xfrm>
           <a:prstGeom prst="rect">
             <a:avLst/>
@@ -2338,45 +2377,67 @@
           <a:p>
             <a:pPr indent="0" marL="0">
               <a:lnSpc>
-                <a:spcPct val="120000"/>
+                <a:spcPct val="125000"/>
               </a:lnSpc>
               <a:buNone/>
             </a:pPr>
             <a:r>
-              <a:rPr lang="en-US" sz="1600" dirty="0">
-                <a:solidFill>
-                  <a:srgbClr val="CBD5E1"/>
-                </a:solidFill>
-                <a:latin typeface="Segoe UI" pitchFamily="34" charset="0"/>
-                <a:ea typeface="Segoe UI" pitchFamily="34" charset="-122"/>
-                <a:cs typeface="Segoe UI" pitchFamily="34" charset="-120"/>
-              </a:rPr>
-              <a:t>Predictive Modeling &amp; Connectomic Analysis of Attention Deficit Hyperactivity Disorder across Multi-Center Clinical Cohorts</a:t>
-            </a:r>
-            <a:endParaRPr lang="en-US" sz="1600" dirty="0"/>
-          </a:p>
-        </p:txBody>
-      </p:sp>
-      <p:sp>
-        <p:nvSpPr>
-          <p:cNvPr id="6" name="Shape 4"/>
-          <p:cNvSpPr/>
-          <p:nvPr/>
-        </p:nvSpPr>
-        <p:spPr>
-          <a:xfrm>
-            <a:off x="731520" y="3749040"/>
-            <a:ext cx="54864" cy="731520"/>
-          </a:xfrm>
-          <a:prstGeom prst="rect">
-            <a:avLst/>
+              <a:rPr lang="en-US" sz="1300" dirty="0">
+                <a:solidFill>
+                  <a:srgbClr val="E2E8F0"/>
+                </a:solidFill>
+                <a:latin typeface="Segoe UI" pitchFamily="34" charset="0"/>
+                <a:ea typeface="Segoe UI" pitchFamily="34" charset="-122"/>
+                <a:cs typeface="Segoe UI" pitchFamily="34" charset="-120"/>
+              </a:rPr>
+              <a:t>An End-to-End Computational Investigation across 935 Children from 9 International Clinics:</a:t>
+            </a:r>
+            <a:endParaRPr lang="en-US" sz="1300" dirty="0"/>
+          </a:p>
+          <a:p>
+            <a:pPr indent="0" marL="0">
+              <a:lnSpc>
+                <a:spcPct val="125000"/>
+              </a:lnSpc>
+              <a:buNone/>
+            </a:pPr>
+            <a:r>
+              <a:rPr lang="en-US" sz="1300" dirty="0">
+                <a:solidFill>
+                  <a:srgbClr val="E2E8F0"/>
+                </a:solidFill>
+                <a:latin typeface="Segoe UI" pitchFamily="34" charset="0"/>
+                <a:ea typeface="Segoe UI" pitchFamily="34" charset="-122"/>
+                <a:cs typeface="Segoe UI" pitchFamily="34" charset="-120"/>
+              </a:rPr>
+              <a:t>13 Machine Learning Algorithms · Ethical Fairness &amp; Site Auditing · SHAP Explainability · Nilearn fMRI Connectomes</a:t>
+            </a:r>
+            <a:endParaRPr lang="en-US" sz="1300" dirty="0"/>
+          </a:p>
+        </p:txBody>
+      </p:sp>
+      <p:sp>
+        <p:nvSpPr>
+          <p:cNvPr id="7" name="Shape 5"/>
+          <p:cNvSpPr/>
+          <p:nvPr/>
+        </p:nvSpPr>
+        <p:spPr>
+          <a:xfrm>
+            <a:off x="731520" y="4434840"/>
+            <a:ext cx="1691640" cy="384048"/>
+          </a:xfrm>
+          <a:prstGeom prst="roundRect">
+            <a:avLst>
+              <a:gd name="adj" fmla="val 23810"/>
+            </a:avLst>
           </a:prstGeom>
           <a:solidFill>
-            <a:srgbClr val="2DD4BF"/>
+            <a:srgbClr val="121726"/>
           </a:solidFill>
           <a:ln w="12700">
             <a:solidFill>
-              <a:srgbClr val="2DD4BF"/>
+              <a:srgbClr val="1E293B"/>
             </a:solidFill>
             <a:prstDash val="solid"/>
           </a:ln>
@@ -2384,63 +2445,370 @@
       </p:sp>
       <p:sp>
         <p:nvSpPr>
-          <p:cNvPr id="7" name="Text 5"/>
-          <p:cNvSpPr/>
-          <p:nvPr/>
-        </p:nvSpPr>
-        <p:spPr>
-          <a:xfrm>
-            <a:off x="914400" y="3794760"/>
-            <a:ext cx="10058400" cy="685800"/>
-          </a:xfrm>
-          <a:prstGeom prst="rect">
-            <a:avLst/>
-          </a:prstGeom>
-          <a:noFill/>
-          <a:ln/>
-        </p:spPr>
-        <p:txBody>
-          <a:bodyPr wrap="square" rtlCol="0" anchor="ctr"/>
-          <a:lstStyle/>
-          <a:p>
-            <a:pPr indent="0" marL="0">
-              <a:lnSpc>
-                <a:spcPct val="120000"/>
-              </a:lnSpc>
-              <a:buNone/>
-            </a:pPr>
-            <a:r>
-              <a:rPr lang="en-US" sz="1250" dirty="0">
-                <a:solidFill>
-                  <a:srgbClr val="94A3B8"/>
-                </a:solidFill>
-                <a:latin typeface="Segoe UI" pitchFamily="34" charset="0"/>
-                <a:ea typeface="Segoe UI" pitchFamily="34" charset="-122"/>
-                <a:cs typeface="Segoe UI" pitchFamily="34" charset="-120"/>
-              </a:rPr>
-              <a:t>An End-to-End Computational Investigation:</a:t>
-            </a:r>
-            <a:endParaRPr lang="en-US" sz="1250" dirty="0"/>
-          </a:p>
-          <a:p>
-            <a:pPr indent="0" marL="0">
-              <a:lnSpc>
-                <a:spcPct val="120000"/>
-              </a:lnSpc>
-              <a:buNone/>
-            </a:pPr>
-            <a:r>
-              <a:rPr lang="en-US" sz="1250" dirty="0">
-                <a:solidFill>
-                  <a:srgbClr val="94A3B8"/>
-                </a:solidFill>
-                <a:latin typeface="Segoe UI" pitchFamily="34" charset="0"/>
-                <a:ea typeface="Segoe UI" pitchFamily="34" charset="-122"/>
-                <a:cs typeface="Segoe UI" pitchFamily="34" charset="-120"/>
-              </a:rPr>
-              <a:t>13 Machine Learning Algorithms · SHAP Explainability · Resting-State fMRI Connectomes</a:t>
-            </a:r>
-            <a:endParaRPr lang="en-US" sz="1250" dirty="0"/>
+          <p:cNvPr id="8" name="Text 6"/>
+          <p:cNvSpPr/>
+          <p:nvPr/>
+        </p:nvSpPr>
+        <p:spPr>
+          <a:xfrm>
+            <a:off x="731520" y="4480560"/>
+            <a:ext cx="1691640" cy="292608"/>
+          </a:xfrm>
+          <a:prstGeom prst="rect">
+            <a:avLst/>
+          </a:prstGeom>
+          <a:noFill/>
+          <a:ln/>
+        </p:spPr>
+        <p:txBody>
+          <a:bodyPr wrap="square" rtlCol="0" anchor="ctr"/>
+          <a:lstStyle/>
+          <a:p>
+            <a:pPr algn="ctr" indent="0" marL="0">
+              <a:buNone/>
+            </a:pPr>
+            <a:r>
+              <a:rPr lang="en-US" sz="1000" b="1" dirty="0">
+                <a:solidFill>
+                  <a:srgbClr val="FFFFFF"/>
+                </a:solidFill>
+                <a:latin typeface="Segoe UI" pitchFamily="34" charset="0"/>
+                <a:ea typeface="Segoe UI" pitchFamily="34" charset="-122"/>
+                <a:cs typeface="Segoe UI" pitchFamily="34" charset="-120"/>
+              </a:rPr>
+              <a:t>935 Children</a:t>
+            </a:r>
+            <a:endParaRPr lang="en-US" sz="1000" dirty="0"/>
+          </a:p>
+        </p:txBody>
+      </p:sp>
+      <p:sp>
+        <p:nvSpPr>
+          <p:cNvPr id="9" name="Shape 7"/>
+          <p:cNvSpPr/>
+          <p:nvPr/>
+        </p:nvSpPr>
+        <p:spPr>
+          <a:xfrm>
+            <a:off x="2514600" y="4434840"/>
+            <a:ext cx="1691640" cy="384048"/>
+          </a:xfrm>
+          <a:prstGeom prst="roundRect">
+            <a:avLst>
+              <a:gd name="adj" fmla="val 23810"/>
+            </a:avLst>
+          </a:prstGeom>
+          <a:solidFill>
+            <a:srgbClr val="121726"/>
+          </a:solidFill>
+          <a:ln w="12700">
+            <a:solidFill>
+              <a:srgbClr val="1E293B"/>
+            </a:solidFill>
+            <a:prstDash val="solid"/>
+          </a:ln>
+        </p:spPr>
+      </p:sp>
+      <p:sp>
+        <p:nvSpPr>
+          <p:cNvPr id="10" name="Text 8"/>
+          <p:cNvSpPr/>
+          <p:nvPr/>
+        </p:nvSpPr>
+        <p:spPr>
+          <a:xfrm>
+            <a:off x="2514600" y="4480560"/>
+            <a:ext cx="1691640" cy="292608"/>
+          </a:xfrm>
+          <a:prstGeom prst="rect">
+            <a:avLst/>
+          </a:prstGeom>
+          <a:noFill/>
+          <a:ln/>
+        </p:spPr>
+        <p:txBody>
+          <a:bodyPr wrap="square" rtlCol="0" anchor="ctr"/>
+          <a:lstStyle/>
+          <a:p>
+            <a:pPr algn="ctr" indent="0" marL="0">
+              <a:buNone/>
+            </a:pPr>
+            <a:r>
+              <a:rPr lang="en-US" sz="1000" b="1" dirty="0">
+                <a:solidFill>
+                  <a:srgbClr val="FFFFFF"/>
+                </a:solidFill>
+                <a:latin typeface="Segoe UI" pitchFamily="34" charset="0"/>
+                <a:ea typeface="Segoe UI" pitchFamily="34" charset="-122"/>
+                <a:cs typeface="Segoe UI" pitchFamily="34" charset="-120"/>
+              </a:rPr>
+              <a:t>9 Clinical Sites</a:t>
+            </a:r>
+            <a:endParaRPr lang="en-US" sz="1000" dirty="0"/>
+          </a:p>
+        </p:txBody>
+      </p:sp>
+      <p:sp>
+        <p:nvSpPr>
+          <p:cNvPr id="11" name="Shape 9"/>
+          <p:cNvSpPr/>
+          <p:nvPr/>
+        </p:nvSpPr>
+        <p:spPr>
+          <a:xfrm>
+            <a:off x="4297680" y="4434840"/>
+            <a:ext cx="1691640" cy="384048"/>
+          </a:xfrm>
+          <a:prstGeom prst="roundRect">
+            <a:avLst>
+              <a:gd name="adj" fmla="val 23810"/>
+            </a:avLst>
+          </a:prstGeom>
+          <a:solidFill>
+            <a:srgbClr val="121726"/>
+          </a:solidFill>
+          <a:ln w="12700">
+            <a:solidFill>
+              <a:srgbClr val="1E293B"/>
+            </a:solidFill>
+            <a:prstDash val="solid"/>
+          </a:ln>
+        </p:spPr>
+      </p:sp>
+      <p:sp>
+        <p:nvSpPr>
+          <p:cNvPr id="12" name="Text 10"/>
+          <p:cNvSpPr/>
+          <p:nvPr/>
+        </p:nvSpPr>
+        <p:spPr>
+          <a:xfrm>
+            <a:off x="4297680" y="4480560"/>
+            <a:ext cx="1691640" cy="292608"/>
+          </a:xfrm>
+          <a:prstGeom prst="rect">
+            <a:avLst/>
+          </a:prstGeom>
+          <a:noFill/>
+          <a:ln/>
+        </p:spPr>
+        <p:txBody>
+          <a:bodyPr wrap="square" rtlCol="0" anchor="ctr"/>
+          <a:lstStyle/>
+          <a:p>
+            <a:pPr algn="ctr" indent="0" marL="0">
+              <a:buNone/>
+            </a:pPr>
+            <a:r>
+              <a:rPr lang="en-US" sz="1000" b="1" dirty="0">
+                <a:solidFill>
+                  <a:srgbClr val="FFFFFF"/>
+                </a:solidFill>
+                <a:latin typeface="Segoe UI" pitchFamily="34" charset="0"/>
+                <a:ea typeface="Segoe UI" pitchFamily="34" charset="-122"/>
+                <a:cs typeface="Segoe UI" pitchFamily="34" charset="-120"/>
+              </a:rPr>
+              <a:t>13 ML Algorithms</a:t>
+            </a:r>
+            <a:endParaRPr lang="en-US" sz="1000" dirty="0"/>
+          </a:p>
+        </p:txBody>
+      </p:sp>
+      <p:sp>
+        <p:nvSpPr>
+          <p:cNvPr id="13" name="Shape 11"/>
+          <p:cNvSpPr/>
+          <p:nvPr/>
+        </p:nvSpPr>
+        <p:spPr>
+          <a:xfrm>
+            <a:off x="6080760" y="4434840"/>
+            <a:ext cx="1691640" cy="384048"/>
+          </a:xfrm>
+          <a:prstGeom prst="roundRect">
+            <a:avLst>
+              <a:gd name="adj" fmla="val 23810"/>
+            </a:avLst>
+          </a:prstGeom>
+          <a:solidFill>
+            <a:srgbClr val="121726"/>
+          </a:solidFill>
+          <a:ln w="12700">
+            <a:solidFill>
+              <a:srgbClr val="1E293B"/>
+            </a:solidFill>
+            <a:prstDash val="solid"/>
+          </a:ln>
+        </p:spPr>
+      </p:sp>
+      <p:sp>
+        <p:nvSpPr>
+          <p:cNvPr id="14" name="Text 12"/>
+          <p:cNvSpPr/>
+          <p:nvPr/>
+        </p:nvSpPr>
+        <p:spPr>
+          <a:xfrm>
+            <a:off x="6080760" y="4480560"/>
+            <a:ext cx="1691640" cy="292608"/>
+          </a:xfrm>
+          <a:prstGeom prst="rect">
+            <a:avLst/>
+          </a:prstGeom>
+          <a:noFill/>
+          <a:ln/>
+        </p:spPr>
+        <p:txBody>
+          <a:bodyPr wrap="square" rtlCol="0" anchor="ctr"/>
+          <a:lstStyle/>
+          <a:p>
+            <a:pPr algn="ctr" indent="0" marL="0">
+              <a:buNone/>
+            </a:pPr>
+            <a:r>
+              <a:rPr lang="en-US" sz="1000" b="1" dirty="0">
+                <a:solidFill>
+                  <a:srgbClr val="FFFFFF"/>
+                </a:solidFill>
+                <a:latin typeface="Segoe UI" pitchFamily="34" charset="0"/>
+                <a:ea typeface="Segoe UI" pitchFamily="34" charset="-122"/>
+                <a:cs typeface="Segoe UI" pitchFamily="34" charset="-120"/>
+              </a:rPr>
+              <a:t>5-Fold Stratified CV</a:t>
+            </a:r>
+            <a:endParaRPr lang="en-US" sz="1000" dirty="0"/>
+          </a:p>
+        </p:txBody>
+      </p:sp>
+      <p:sp>
+        <p:nvSpPr>
+          <p:cNvPr id="15" name="Shape 13"/>
+          <p:cNvSpPr/>
+          <p:nvPr/>
+        </p:nvSpPr>
+        <p:spPr>
+          <a:xfrm>
+            <a:off x="7863840" y="4434840"/>
+            <a:ext cx="1691640" cy="384048"/>
+          </a:xfrm>
+          <a:prstGeom prst="roundRect">
+            <a:avLst>
+              <a:gd name="adj" fmla="val 23810"/>
+            </a:avLst>
+          </a:prstGeom>
+          <a:solidFill>
+            <a:srgbClr val="121726"/>
+          </a:solidFill>
+          <a:ln w="12700">
+            <a:solidFill>
+              <a:srgbClr val="1E293B"/>
+            </a:solidFill>
+            <a:prstDash val="solid"/>
+          </a:ln>
+        </p:spPr>
+      </p:sp>
+      <p:sp>
+        <p:nvSpPr>
+          <p:cNvPr id="16" name="Text 14"/>
+          <p:cNvSpPr/>
+          <p:nvPr/>
+        </p:nvSpPr>
+        <p:spPr>
+          <a:xfrm>
+            <a:off x="7863840" y="4480560"/>
+            <a:ext cx="1691640" cy="292608"/>
+          </a:xfrm>
+          <a:prstGeom prst="rect">
+            <a:avLst/>
+          </a:prstGeom>
+          <a:noFill/>
+          <a:ln/>
+        </p:spPr>
+        <p:txBody>
+          <a:bodyPr wrap="square" rtlCol="0" anchor="ctr"/>
+          <a:lstStyle/>
+          <a:p>
+            <a:pPr algn="ctr" indent="0" marL="0">
+              <a:buNone/>
+            </a:pPr>
+            <a:r>
+              <a:rPr lang="en-US" sz="1000" b="1" dirty="0">
+                <a:solidFill>
+                  <a:srgbClr val="FFFFFF"/>
+                </a:solidFill>
+                <a:latin typeface="Segoe UI" pitchFamily="34" charset="0"/>
+                <a:ea typeface="Segoe UI" pitchFamily="34" charset="-122"/>
+                <a:cs typeface="Segoe UI" pitchFamily="34" charset="-120"/>
+              </a:rPr>
+              <a:t>SHAP Feature Attribution</a:t>
+            </a:r>
+            <a:endParaRPr lang="en-US" sz="1000" dirty="0"/>
+          </a:p>
+        </p:txBody>
+      </p:sp>
+      <p:sp>
+        <p:nvSpPr>
+          <p:cNvPr id="17" name="Shape 15"/>
+          <p:cNvSpPr/>
+          <p:nvPr/>
+        </p:nvSpPr>
+        <p:spPr>
+          <a:xfrm>
+            <a:off x="9646920" y="4434840"/>
+            <a:ext cx="1691640" cy="384048"/>
+          </a:xfrm>
+          <a:prstGeom prst="roundRect">
+            <a:avLst>
+              <a:gd name="adj" fmla="val 23810"/>
+            </a:avLst>
+          </a:prstGeom>
+          <a:solidFill>
+            <a:srgbClr val="121726"/>
+          </a:solidFill>
+          <a:ln w="12700">
+            <a:solidFill>
+              <a:srgbClr val="1E293B"/>
+            </a:solidFill>
+            <a:prstDash val="solid"/>
+          </a:ln>
+        </p:spPr>
+      </p:sp>
+      <p:sp>
+        <p:nvSpPr>
+          <p:cNvPr id="18" name="Text 16"/>
+          <p:cNvSpPr/>
+          <p:nvPr/>
+        </p:nvSpPr>
+        <p:spPr>
+          <a:xfrm>
+            <a:off x="9646920" y="4480560"/>
+            <a:ext cx="1691640" cy="292608"/>
+          </a:xfrm>
+          <a:prstGeom prst="rect">
+            <a:avLst/>
+          </a:prstGeom>
+          <a:noFill/>
+          <a:ln/>
+        </p:spPr>
+        <p:txBody>
+          <a:bodyPr wrap="square" rtlCol="0" anchor="ctr"/>
+          <a:lstStyle/>
+          <a:p>
+            <a:pPr algn="ctr" indent="0" marL="0">
+              <a:buNone/>
+            </a:pPr>
+            <a:r>
+              <a:rPr lang="en-US" sz="1000" b="1" dirty="0">
+                <a:solidFill>
+                  <a:srgbClr val="FFFFFF"/>
+                </a:solidFill>
+                <a:latin typeface="Segoe UI" pitchFamily="34" charset="0"/>
+                <a:ea typeface="Segoe UI" pitchFamily="34" charset="-122"/>
+                <a:cs typeface="Segoe UI" pitchFamily="34" charset="-120"/>
+              </a:rPr>
+              <a:t>40 rs-fMRI Scans</a:t>
+            </a:r>
+            <a:endParaRPr lang="en-US" sz="1000" dirty="0"/>
           </a:p>
         </p:txBody>
       </p:sp>
@@ -2458,7 +2826,7 @@
     <p:bg>
       <p:bgPr>
         <a:solidFill>
-          <a:srgbClr val="07090E"/>
+          <a:srgbClr val="090A0F"/>
         </a:solidFill>
       </p:bgPr>
     </p:bg>
@@ -2478,102 +2846,26 @@
       </p:grpSpPr>
       <p:sp>
         <p:nvSpPr>
-          <p:cNvPr id="2" name="Text 0"/>
-          <p:cNvSpPr/>
-          <p:nvPr/>
-        </p:nvSpPr>
-        <p:spPr>
-          <a:xfrm>
-            <a:off x="731520" y="411480"/>
-            <a:ext cx="9144000" cy="228600"/>
-          </a:xfrm>
-          <a:prstGeom prst="rect">
-            <a:avLst/>
-          </a:prstGeom>
-          <a:noFill/>
-          <a:ln/>
-        </p:spPr>
-        <p:txBody>
-          <a:bodyPr wrap="square" rtlCol="0" anchor="ctr"/>
-          <a:lstStyle/>
-          <a:p>
-            <a:pPr indent="0" marL="0">
-              <a:buNone/>
-            </a:pPr>
-            <a:r>
-              <a:rPr lang="en-US" sz="1000" b="1" dirty="0">
-                <a:solidFill>
-                  <a:srgbClr val="2DD4BF"/>
-                </a:solidFill>
-                <a:latin typeface="Segoe UI" pitchFamily="34" charset="0"/>
-                <a:ea typeface="Segoe UI" pitchFamily="34" charset="-122"/>
-                <a:cs typeface="Segoe UI" pitchFamily="34" charset="-120"/>
-              </a:rPr>
-              <a:t>PHASE 6: ALGORITHMIC FAIRNESS</a:t>
-            </a:r>
-            <a:endParaRPr lang="en-US" sz="1000" dirty="0"/>
-          </a:p>
-        </p:txBody>
-      </p:sp>
-      <p:sp>
-        <p:nvSpPr>
-          <p:cNvPr id="3" name="Text 1"/>
-          <p:cNvSpPr/>
-          <p:nvPr/>
-        </p:nvSpPr>
-        <p:spPr>
-          <a:xfrm>
-            <a:off x="731520" y="685800"/>
-            <a:ext cx="10515600" cy="502920"/>
-          </a:xfrm>
-          <a:prstGeom prst="rect">
-            <a:avLst/>
-          </a:prstGeom>
-          <a:noFill/>
-          <a:ln/>
-        </p:spPr>
-        <p:txBody>
-          <a:bodyPr wrap="square" rtlCol="0" anchor="ctr"/>
-          <a:lstStyle/>
-          <a:p>
-            <a:pPr indent="0" marL="0">
-              <a:buNone/>
-            </a:pPr>
-            <a:r>
-              <a:rPr lang="en-US" sz="2100" b="1" dirty="0">
-                <a:solidFill>
-                  <a:srgbClr val="FFFFFF"/>
-                </a:solidFill>
-                <a:latin typeface="Segoe UI" pitchFamily="34" charset="0"/>
-                <a:ea typeface="Segoe UI" pitchFamily="34" charset="-122"/>
-                <a:cs typeface="Segoe UI" pitchFamily="34" charset="-120"/>
-              </a:rPr>
-              <a:t>Uncovering Severe Gender Disparities in Set A</a:t>
-            </a:r>
-            <a:endParaRPr lang="en-US" sz="2100" dirty="0"/>
-          </a:p>
-        </p:txBody>
-      </p:sp>
-      <p:sp>
-        <p:nvSpPr>
-          <p:cNvPr id="4" name="Shape 2"/>
-          <p:cNvSpPr/>
-          <p:nvPr/>
-        </p:nvSpPr>
-        <p:spPr>
-          <a:xfrm>
-            <a:off x="731520" y="1234440"/>
-            <a:ext cx="1828800" cy="36576"/>
-          </a:xfrm>
-          <a:prstGeom prst="rect">
-            <a:avLst/>
+          <p:cNvPr id="2" name="Shape 0"/>
+          <p:cNvSpPr/>
+          <p:nvPr/>
+        </p:nvSpPr>
+        <p:spPr>
+          <a:xfrm>
+            <a:off x="731520" y="365760"/>
+            <a:ext cx="2926080" cy="256032"/>
+          </a:xfrm>
+          <a:prstGeom prst="roundRect">
+            <a:avLst>
+              <a:gd name="adj" fmla="val 50000"/>
+            </a:avLst>
           </a:prstGeom>
           <a:solidFill>
-            <a:srgbClr val="2DD4BF"/>
+            <a:srgbClr val="162235"/>
           </a:solidFill>
           <a:ln w="12700">
             <a:solidFill>
-              <a:srgbClr val="2DD4BF"/>
+              <a:srgbClr val="06B6D4"/>
             </a:solidFill>
             <a:prstDash val="solid"/>
           </a:ln>
@@ -2581,7 +2873,135 @@
       </p:sp>
       <p:sp>
         <p:nvSpPr>
+          <p:cNvPr id="3" name="Text 1"/>
+          <p:cNvSpPr/>
+          <p:nvPr/>
+        </p:nvSpPr>
+        <p:spPr>
+          <a:xfrm>
+            <a:off x="731520" y="384048"/>
+            <a:ext cx="2926080" cy="219456"/>
+          </a:xfrm>
+          <a:prstGeom prst="rect">
+            <a:avLst/>
+          </a:prstGeom>
+          <a:noFill/>
+          <a:ln/>
+        </p:spPr>
+        <p:txBody>
+          <a:bodyPr wrap="square" rtlCol="0" anchor="ctr"/>
+          <a:lstStyle/>
+          <a:p>
+            <a:pPr algn="ctr" indent="0" marL="0">
+              <a:buNone/>
+            </a:pPr>
+            <a:r>
+              <a:rPr lang="en-US" sz="950" b="1" dirty="0">
+                <a:solidFill>
+                  <a:srgbClr val="22D3EE"/>
+                </a:solidFill>
+                <a:latin typeface="Segoe UI" pitchFamily="34" charset="0"/>
+                <a:ea typeface="Segoe UI" pitchFamily="34" charset="-122"/>
+                <a:cs typeface="Segoe UI" pitchFamily="34" charset="-120"/>
+              </a:rPr>
+              <a:t>PHASE 6: ALGORITHMIC FAIRNESS</a:t>
+            </a:r>
+            <a:endParaRPr lang="en-US" sz="950" dirty="0"/>
+          </a:p>
+        </p:txBody>
+      </p:sp>
+      <p:sp>
+        <p:nvSpPr>
+          <p:cNvPr id="4" name="Text 2"/>
+          <p:cNvSpPr/>
+          <p:nvPr/>
+        </p:nvSpPr>
+        <p:spPr>
+          <a:xfrm>
+            <a:off x="731520" y="713232"/>
+            <a:ext cx="10515600" cy="502920"/>
+          </a:xfrm>
+          <a:prstGeom prst="rect">
+            <a:avLst/>
+          </a:prstGeom>
+          <a:noFill/>
+          <a:ln/>
+        </p:spPr>
+        <p:txBody>
+          <a:bodyPr wrap="square" rtlCol="0" anchor="ctr"/>
+          <a:lstStyle/>
+          <a:p>
+            <a:pPr indent="0" marL="0">
+              <a:buNone/>
+            </a:pPr>
+            <a:r>
+              <a:rPr lang="en-US" sz="2200" b="1" dirty="0">
+                <a:solidFill>
+                  <a:srgbClr val="FFFFFF"/>
+                </a:solidFill>
+                <a:latin typeface="Segoe UI" pitchFamily="34" charset="0"/>
+                <a:ea typeface="Segoe UI" pitchFamily="34" charset="-122"/>
+                <a:cs typeface="Segoe UI" pitchFamily="34" charset="-120"/>
+              </a:rPr>
+              <a:t>Uncovering Severe Gender Disparities in Set A</a:t>
+            </a:r>
+            <a:endParaRPr lang="en-US" sz="2200" dirty="0"/>
+          </a:p>
+        </p:txBody>
+      </p:sp>
+      <p:sp>
+        <p:nvSpPr>
           <p:cNvPr id="5" name="Shape 3"/>
+          <p:cNvSpPr/>
+          <p:nvPr/>
+        </p:nvSpPr>
+        <p:spPr>
+          <a:xfrm>
+            <a:off x="731520" y="1261872"/>
+            <a:ext cx="1645920" cy="36576"/>
+          </a:xfrm>
+          <a:prstGeom prst="rect">
+            <a:avLst/>
+          </a:prstGeom>
+          <a:solidFill>
+            <a:srgbClr val="06B6D4"/>
+          </a:solidFill>
+          <a:ln w="12700">
+            <a:solidFill>
+              <a:srgbClr val="06B6D4"/>
+            </a:solidFill>
+            <a:prstDash val="solid"/>
+          </a:ln>
+        </p:spPr>
+      </p:sp>
+      <p:sp>
+        <p:nvSpPr>
+          <p:cNvPr id="6" name="Shape 4"/>
+          <p:cNvSpPr/>
+          <p:nvPr/>
+        </p:nvSpPr>
+        <p:spPr>
+          <a:xfrm>
+            <a:off x="2377440" y="1261872"/>
+            <a:ext cx="1097280" cy="36576"/>
+          </a:xfrm>
+          <a:prstGeom prst="rect">
+            <a:avLst/>
+          </a:prstGeom>
+          <a:solidFill>
+            <a:srgbClr val="2563EB"/>
+          </a:solidFill>
+          <a:ln w="12700">
+            <a:solidFill>
+              <a:srgbClr val="2563EB"/>
+            </a:solidFill>
+            <a:prstDash val="solid"/>
+          </a:ln>
+        </p:spPr>
+      </p:sp>
+      <p:sp>
+        <p:nvSpPr>
+          <p:cNvPr id="7" name="Shape 5"/>
           <p:cNvSpPr/>
           <p:nvPr/>
         </p:nvSpPr>
@@ -2591,10 +3011,12 @@
             <a:ext cx="5029200" cy="4572000"/>
           </a:xfrm>
           <a:prstGeom prst="roundRect">
-            <a:avLst/>
+            <a:avLst>
+              <a:gd name="adj" fmla="val 3000"/>
+            </a:avLst>
           </a:prstGeom>
           <a:solidFill>
-            <a:srgbClr val="10151F"/>
+            <a:srgbClr val="121726"/>
           </a:solidFill>
           <a:ln w="12700">
             <a:solidFill>
@@ -2606,7 +3028,7 @@
       </p:sp>
       <p:sp>
         <p:nvSpPr>
-          <p:cNvPr id="6" name="Text 4"/>
+          <p:cNvPr id="8" name="Text 6"/>
           <p:cNvSpPr/>
           <p:nvPr/>
         </p:nvSpPr>
@@ -2631,7 +3053,7 @@
             <a:r>
               <a:rPr lang="en-US" sz="1500" b="1" dirty="0">
                 <a:solidFill>
-                  <a:srgbClr val="2DD4BF"/>
+                  <a:srgbClr val="22D3EE"/>
                 </a:solidFill>
                 <a:latin typeface="Segoe UI" pitchFamily="34" charset="0"/>
                 <a:ea typeface="Segoe UI" pitchFamily="34" charset="-122"/>
@@ -2645,7 +3067,7 @@
       </p:sp>
       <p:sp>
         <p:nvSpPr>
-          <p:cNvPr id="7" name="Text 5"/>
+          <p:cNvPr id="9" name="Text 7"/>
           <p:cNvSpPr/>
           <p:nvPr/>
         </p:nvSpPr>
@@ -2670,7 +3092,7 @@
             <a:r>
               <a:rPr lang="en-US" sz="1200" dirty="0">
                 <a:solidFill>
-                  <a:srgbClr val="CBD5E1"/>
+                  <a:srgbClr val="E2E8F0"/>
                 </a:solidFill>
                 <a:latin typeface="Segoe UI" pitchFamily="34" charset="0"/>
                 <a:ea typeface="Segoe UI" pitchFamily="34" charset="-122"/>
@@ -2693,7 +3115,7 @@
             <a:r>
               <a:rPr lang="en-US" sz="1200" dirty="0">
                 <a:solidFill>
-                  <a:srgbClr val="CBD5E1"/>
+                  <a:srgbClr val="E2E8F0"/>
                 </a:solidFill>
                 <a:latin typeface="Segoe UI" pitchFamily="34" charset="0"/>
                 <a:ea typeface="Segoe UI" pitchFamily="34" charset="-122"/>
@@ -2716,7 +3138,7 @@
             <a:r>
               <a:rPr lang="en-US" sz="1200" dirty="0">
                 <a:solidFill>
-                  <a:srgbClr val="CBD5E1"/>
+                  <a:srgbClr val="E2E8F0"/>
                 </a:solidFill>
                 <a:latin typeface="Segoe UI" pitchFamily="34" charset="0"/>
                 <a:ea typeface="Segoe UI" pitchFamily="34" charset="-122"/>
@@ -2739,7 +3161,7 @@
             <a:r>
               <a:rPr lang="en-US" sz="1200" dirty="0">
                 <a:solidFill>
-                  <a:srgbClr val="CBD5E1"/>
+                  <a:srgbClr val="E2E8F0"/>
                 </a:solidFill>
                 <a:latin typeface="Segoe UI" pitchFamily="34" charset="0"/>
                 <a:ea typeface="Segoe UI" pitchFamily="34" charset="-122"/>
@@ -2762,7 +3184,7 @@
             <a:r>
               <a:rPr lang="en-US" sz="1200" dirty="0">
                 <a:solidFill>
-                  <a:srgbClr val="CBD5E1"/>
+                  <a:srgbClr val="E2E8F0"/>
                 </a:solidFill>
                 <a:latin typeface="Segoe UI" pitchFamily="34" charset="0"/>
                 <a:ea typeface="Segoe UI" pitchFamily="34" charset="-122"/>
@@ -2785,7 +3207,7 @@
             <a:r>
               <a:rPr lang="en-US" sz="1200" dirty="0">
                 <a:solidFill>
-                  <a:srgbClr val="CBD5E1"/>
+                  <a:srgbClr val="E2E8F0"/>
                 </a:solidFill>
                 <a:latin typeface="Segoe UI" pitchFamily="34" charset="0"/>
                 <a:ea typeface="Segoe UI" pitchFamily="34" charset="-122"/>
@@ -2799,7 +3221,7 @@
       </p:sp>
       <p:pic>
         <p:nvPicPr>
-          <p:cNvPr id="8" name="Image 0" descr="C:\Users\hariv\OneDrive\Desktop\NeuroADHD\website\assets\img\04_confusion_matrices.png">    </p:cNvPr>
+          <p:cNvPr id="10" name="Image 0" descr="C:\Users\hariv\OneDrive\Desktop\NeuroADHD\website\assets\img\04_confusion_matrices.png">    </p:cNvPr>
           <p:cNvPicPr>
             <a:picLocks noChangeAspect="1"/>
           </p:cNvPicPr>
@@ -2835,7 +3257,7 @@
     <p:bg>
       <p:bgPr>
         <a:solidFill>
-          <a:srgbClr val="07090E"/>
+          <a:srgbClr val="090A0F"/>
         </a:solidFill>
       </p:bgPr>
     </p:bg>
@@ -2855,102 +3277,26 @@
       </p:grpSpPr>
       <p:sp>
         <p:nvSpPr>
-          <p:cNvPr id="2" name="Text 0"/>
-          <p:cNvSpPr/>
-          <p:nvPr/>
-        </p:nvSpPr>
-        <p:spPr>
-          <a:xfrm>
-            <a:off x="731520" y="411480"/>
-            <a:ext cx="9144000" cy="228600"/>
-          </a:xfrm>
-          <a:prstGeom prst="rect">
-            <a:avLst/>
-          </a:prstGeom>
-          <a:noFill/>
-          <a:ln/>
-        </p:spPr>
-        <p:txBody>
-          <a:bodyPr wrap="square" rtlCol="0" anchor="ctr"/>
-          <a:lstStyle/>
-          <a:p>
-            <a:pPr indent="0" marL="0">
-              <a:buNone/>
-            </a:pPr>
-            <a:r>
-              <a:rPr lang="en-US" sz="1000" b="1" dirty="0">
-                <a:solidFill>
-                  <a:srgbClr val="2DD4BF"/>
-                </a:solidFill>
-                <a:latin typeface="Segoe UI" pitchFamily="34" charset="0"/>
-                <a:ea typeface="Segoe UI" pitchFamily="34" charset="-122"/>
-                <a:cs typeface="Segoe UI" pitchFamily="34" charset="-120"/>
-              </a:rPr>
-              <a:t>PHASE 7: CONFOUNDER AUDITING</a:t>
-            </a:r>
-            <a:endParaRPr lang="en-US" sz="1000" dirty="0"/>
-          </a:p>
-        </p:txBody>
-      </p:sp>
-      <p:sp>
-        <p:nvSpPr>
-          <p:cNvPr id="3" name="Text 1"/>
-          <p:cNvSpPr/>
-          <p:nvPr/>
-        </p:nvSpPr>
-        <p:spPr>
-          <a:xfrm>
-            <a:off x="731520" y="685800"/>
-            <a:ext cx="10515600" cy="502920"/>
-          </a:xfrm>
-          <a:prstGeom prst="rect">
-            <a:avLst/>
-          </a:prstGeom>
-          <a:noFill/>
-          <a:ln/>
-        </p:spPr>
-        <p:txBody>
-          <a:bodyPr wrap="square" rtlCol="0" anchor="ctr"/>
-          <a:lstStyle/>
-          <a:p>
-            <a:pPr indent="0" marL="0">
-              <a:buNone/>
-            </a:pPr>
-            <a:r>
-              <a:rPr lang="en-US" sz="2100" b="1" dirty="0">
-                <a:solidFill>
-                  <a:srgbClr val="FFFFFF"/>
-                </a:solidFill>
-                <a:latin typeface="Segoe UI" pitchFamily="34" charset="0"/>
-                <a:ea typeface="Segoe UI" pitchFamily="34" charset="-122"/>
-                <a:cs typeface="Segoe UI" pitchFamily="34" charset="-120"/>
-              </a:rPr>
-              <a:t>Clinic Confounder Discovery &amp; Leave-One-Site-Out (LOSO)</a:t>
-            </a:r>
-            <a:endParaRPr lang="en-US" sz="2100" dirty="0"/>
-          </a:p>
-        </p:txBody>
-      </p:sp>
-      <p:sp>
-        <p:nvSpPr>
-          <p:cNvPr id="4" name="Shape 2"/>
-          <p:cNvSpPr/>
-          <p:nvPr/>
-        </p:nvSpPr>
-        <p:spPr>
-          <a:xfrm>
-            <a:off x="731520" y="1234440"/>
-            <a:ext cx="1828800" cy="36576"/>
-          </a:xfrm>
-          <a:prstGeom prst="rect">
-            <a:avLst/>
+          <p:cNvPr id="2" name="Shape 0"/>
+          <p:cNvSpPr/>
+          <p:nvPr/>
+        </p:nvSpPr>
+        <p:spPr>
+          <a:xfrm>
+            <a:off x="731520" y="365760"/>
+            <a:ext cx="2926080" cy="256032"/>
+          </a:xfrm>
+          <a:prstGeom prst="roundRect">
+            <a:avLst>
+              <a:gd name="adj" fmla="val 50000"/>
+            </a:avLst>
           </a:prstGeom>
           <a:solidFill>
-            <a:srgbClr val="2DD4BF"/>
+            <a:srgbClr val="162235"/>
           </a:solidFill>
           <a:ln w="12700">
             <a:solidFill>
-              <a:srgbClr val="2DD4BF"/>
+              <a:srgbClr val="06B6D4"/>
             </a:solidFill>
             <a:prstDash val="solid"/>
           </a:ln>
@@ -2958,7 +3304,135 @@
       </p:sp>
       <p:sp>
         <p:nvSpPr>
+          <p:cNvPr id="3" name="Text 1"/>
+          <p:cNvSpPr/>
+          <p:nvPr/>
+        </p:nvSpPr>
+        <p:spPr>
+          <a:xfrm>
+            <a:off x="731520" y="384048"/>
+            <a:ext cx="2926080" cy="219456"/>
+          </a:xfrm>
+          <a:prstGeom prst="rect">
+            <a:avLst/>
+          </a:prstGeom>
+          <a:noFill/>
+          <a:ln/>
+        </p:spPr>
+        <p:txBody>
+          <a:bodyPr wrap="square" rtlCol="0" anchor="ctr"/>
+          <a:lstStyle/>
+          <a:p>
+            <a:pPr algn="ctr" indent="0" marL="0">
+              <a:buNone/>
+            </a:pPr>
+            <a:r>
+              <a:rPr lang="en-US" sz="950" b="1" dirty="0">
+                <a:solidFill>
+                  <a:srgbClr val="22D3EE"/>
+                </a:solidFill>
+                <a:latin typeface="Segoe UI" pitchFamily="34" charset="0"/>
+                <a:ea typeface="Segoe UI" pitchFamily="34" charset="-122"/>
+                <a:cs typeface="Segoe UI" pitchFamily="34" charset="-120"/>
+              </a:rPr>
+              <a:t>PHASE 7: CONFOUNDER AUDITING</a:t>
+            </a:r>
+            <a:endParaRPr lang="en-US" sz="950" dirty="0"/>
+          </a:p>
+        </p:txBody>
+      </p:sp>
+      <p:sp>
+        <p:nvSpPr>
+          <p:cNvPr id="4" name="Text 2"/>
+          <p:cNvSpPr/>
+          <p:nvPr/>
+        </p:nvSpPr>
+        <p:spPr>
+          <a:xfrm>
+            <a:off x="731520" y="713232"/>
+            <a:ext cx="10515600" cy="502920"/>
+          </a:xfrm>
+          <a:prstGeom prst="rect">
+            <a:avLst/>
+          </a:prstGeom>
+          <a:noFill/>
+          <a:ln/>
+        </p:spPr>
+        <p:txBody>
+          <a:bodyPr wrap="square" rtlCol="0" anchor="ctr"/>
+          <a:lstStyle/>
+          <a:p>
+            <a:pPr indent="0" marL="0">
+              <a:buNone/>
+            </a:pPr>
+            <a:r>
+              <a:rPr lang="en-US" sz="2200" b="1" dirty="0">
+                <a:solidFill>
+                  <a:srgbClr val="FFFFFF"/>
+                </a:solidFill>
+                <a:latin typeface="Segoe UI" pitchFamily="34" charset="0"/>
+                <a:ea typeface="Segoe UI" pitchFamily="34" charset="-122"/>
+                <a:cs typeface="Segoe UI" pitchFamily="34" charset="-120"/>
+              </a:rPr>
+              <a:t>Clinic Confounder Discovery &amp; Leave-One-Site-Out (LOSO)</a:t>
+            </a:r>
+            <a:endParaRPr lang="en-US" sz="2200" dirty="0"/>
+          </a:p>
+        </p:txBody>
+      </p:sp>
+      <p:sp>
+        <p:nvSpPr>
           <p:cNvPr id="5" name="Shape 3"/>
+          <p:cNvSpPr/>
+          <p:nvPr/>
+        </p:nvSpPr>
+        <p:spPr>
+          <a:xfrm>
+            <a:off x="731520" y="1261872"/>
+            <a:ext cx="1645920" cy="36576"/>
+          </a:xfrm>
+          <a:prstGeom prst="rect">
+            <a:avLst/>
+          </a:prstGeom>
+          <a:solidFill>
+            <a:srgbClr val="06B6D4"/>
+          </a:solidFill>
+          <a:ln w="12700">
+            <a:solidFill>
+              <a:srgbClr val="06B6D4"/>
+            </a:solidFill>
+            <a:prstDash val="solid"/>
+          </a:ln>
+        </p:spPr>
+      </p:sp>
+      <p:sp>
+        <p:nvSpPr>
+          <p:cNvPr id="6" name="Shape 4"/>
+          <p:cNvSpPr/>
+          <p:nvPr/>
+        </p:nvSpPr>
+        <p:spPr>
+          <a:xfrm>
+            <a:off x="2377440" y="1261872"/>
+            <a:ext cx="1097280" cy="36576"/>
+          </a:xfrm>
+          <a:prstGeom prst="rect">
+            <a:avLst/>
+          </a:prstGeom>
+          <a:solidFill>
+            <a:srgbClr val="2563EB"/>
+          </a:solidFill>
+          <a:ln w="12700">
+            <a:solidFill>
+              <a:srgbClr val="2563EB"/>
+            </a:solidFill>
+            <a:prstDash val="solid"/>
+          </a:ln>
+        </p:spPr>
+      </p:sp>
+      <p:sp>
+        <p:nvSpPr>
+          <p:cNvPr id="7" name="Shape 5"/>
           <p:cNvSpPr/>
           <p:nvPr/>
         </p:nvSpPr>
@@ -2968,10 +3442,12 @@
             <a:ext cx="5029200" cy="4572000"/>
           </a:xfrm>
           <a:prstGeom prst="roundRect">
-            <a:avLst/>
+            <a:avLst>
+              <a:gd name="adj" fmla="val 3000"/>
+            </a:avLst>
           </a:prstGeom>
           <a:solidFill>
-            <a:srgbClr val="10151F"/>
+            <a:srgbClr val="121726"/>
           </a:solidFill>
           <a:ln w="12700">
             <a:solidFill>
@@ -2983,7 +3459,7 @@
       </p:sp>
       <p:sp>
         <p:nvSpPr>
-          <p:cNvPr id="6" name="Text 4"/>
+          <p:cNvPr id="8" name="Text 6"/>
           <p:cNvSpPr/>
           <p:nvPr/>
         </p:nvSpPr>
@@ -3008,7 +3484,7 @@
             <a:r>
               <a:rPr lang="en-US" sz="1500" b="1" dirty="0">
                 <a:solidFill>
-                  <a:srgbClr val="2DD4BF"/>
+                  <a:srgbClr val="22D3EE"/>
                 </a:solidFill>
                 <a:latin typeface="Segoe UI" pitchFamily="34" charset="0"/>
                 <a:ea typeface="Segoe UI" pitchFamily="34" charset="-122"/>
@@ -3022,7 +3498,7 @@
       </p:sp>
       <p:sp>
         <p:nvSpPr>
-          <p:cNvPr id="7" name="Text 5"/>
+          <p:cNvPr id="9" name="Text 7"/>
           <p:cNvSpPr/>
           <p:nvPr/>
         </p:nvSpPr>
@@ -3047,7 +3523,7 @@
             <a:r>
               <a:rPr lang="en-US" sz="1200" dirty="0">
                 <a:solidFill>
-                  <a:srgbClr val="CBD5E1"/>
+                  <a:srgbClr val="E2E8F0"/>
                 </a:solidFill>
                 <a:latin typeface="Segoe UI" pitchFamily="34" charset="0"/>
                 <a:ea typeface="Segoe UI" pitchFamily="34" charset="-122"/>
@@ -3070,7 +3546,7 @@
             <a:r>
               <a:rPr lang="en-US" sz="1200" dirty="0">
                 <a:solidFill>
-                  <a:srgbClr val="CBD5E1"/>
+                  <a:srgbClr val="E2E8F0"/>
                 </a:solidFill>
                 <a:latin typeface="Segoe UI" pitchFamily="34" charset="0"/>
                 <a:ea typeface="Segoe UI" pitchFamily="34" charset="-122"/>
@@ -3093,7 +3569,7 @@
             <a:r>
               <a:rPr lang="en-US" sz="1200" dirty="0">
                 <a:solidFill>
-                  <a:srgbClr val="CBD5E1"/>
+                  <a:srgbClr val="E2E8F0"/>
                 </a:solidFill>
                 <a:latin typeface="Segoe UI" pitchFamily="34" charset="0"/>
                 <a:ea typeface="Segoe UI" pitchFamily="34" charset="-122"/>
@@ -3116,7 +3592,7 @@
             <a:r>
               <a:rPr lang="en-US" sz="1200" dirty="0">
                 <a:solidFill>
-                  <a:srgbClr val="CBD5E1"/>
+                  <a:srgbClr val="E2E8F0"/>
                 </a:solidFill>
                 <a:latin typeface="Segoe UI" pitchFamily="34" charset="0"/>
                 <a:ea typeface="Segoe UI" pitchFamily="34" charset="-122"/>
@@ -3139,7 +3615,7 @@
             <a:r>
               <a:rPr lang="en-US" sz="1200" dirty="0">
                 <a:solidFill>
-                  <a:srgbClr val="CBD5E1"/>
+                  <a:srgbClr val="E2E8F0"/>
                 </a:solidFill>
                 <a:latin typeface="Segoe UI" pitchFamily="34" charset="0"/>
                 <a:ea typeface="Segoe UI" pitchFamily="34" charset="-122"/>
@@ -3162,7 +3638,7 @@
             <a:r>
               <a:rPr lang="en-US" sz="1200" dirty="0">
                 <a:solidFill>
-                  <a:srgbClr val="CBD5E1"/>
+                  <a:srgbClr val="E2E8F0"/>
                 </a:solidFill>
                 <a:latin typeface="Segoe UI" pitchFamily="34" charset="0"/>
                 <a:ea typeface="Segoe UI" pitchFamily="34" charset="-122"/>
@@ -3176,7 +3652,7 @@
       </p:sp>
       <p:pic>
         <p:nvPicPr>
-          <p:cNvPr id="8" name="Image 0" descr="C:\Users\hariv\OneDrive\Desktop\NeuroADHD\website\assets\img\04_leave_one_site_out.png">    </p:cNvPr>
+          <p:cNvPr id="10" name="Image 0" descr="C:\Users\hariv\OneDrive\Desktop\NeuroADHD\website\assets\img\04_leave_one_site_out.png">    </p:cNvPr>
           <p:cNvPicPr>
             <a:picLocks noChangeAspect="1"/>
           </p:cNvPicPr>
@@ -3212,7 +3688,7 @@
     <p:bg>
       <p:bgPr>
         <a:solidFill>
-          <a:srgbClr val="07090E"/>
+          <a:srgbClr val="090A0F"/>
         </a:solidFill>
       </p:bgPr>
     </p:bg>
@@ -3232,102 +3708,26 @@
       </p:grpSpPr>
       <p:sp>
         <p:nvSpPr>
-          <p:cNvPr id="2" name="Text 0"/>
-          <p:cNvSpPr/>
-          <p:nvPr/>
-        </p:nvSpPr>
-        <p:spPr>
-          <a:xfrm>
-            <a:off x="731520" y="411480"/>
-            <a:ext cx="9144000" cy="228600"/>
-          </a:xfrm>
-          <a:prstGeom prst="rect">
-            <a:avLst/>
-          </a:prstGeom>
-          <a:noFill/>
-          <a:ln/>
-        </p:spPr>
-        <p:txBody>
-          <a:bodyPr wrap="square" rtlCol="0" anchor="ctr"/>
-          <a:lstStyle/>
-          <a:p>
-            <a:pPr indent="0" marL="0">
-              <a:buNone/>
-            </a:pPr>
-            <a:r>
-              <a:rPr lang="en-US" sz="1000" b="1" dirty="0">
-                <a:solidFill>
-                  <a:srgbClr val="2DD4BF"/>
-                </a:solidFill>
-                <a:latin typeface="Segoe UI" pitchFamily="34" charset="0"/>
-                <a:ea typeface="Segoe UI" pitchFamily="34" charset="-122"/>
-                <a:cs typeface="Segoe UI" pitchFamily="34" charset="-120"/>
-              </a:rPr>
-              <a:t>PHASE 8: MODEL EXPLAINABILITY</a:t>
-            </a:r>
-            <a:endParaRPr lang="en-US" sz="1000" dirty="0"/>
-          </a:p>
-        </p:txBody>
-      </p:sp>
-      <p:sp>
-        <p:nvSpPr>
-          <p:cNvPr id="3" name="Text 1"/>
-          <p:cNvSpPr/>
-          <p:nvPr/>
-        </p:nvSpPr>
-        <p:spPr>
-          <a:xfrm>
-            <a:off x="731520" y="685800"/>
-            <a:ext cx="10515600" cy="502920"/>
-          </a:xfrm>
-          <a:prstGeom prst="rect">
-            <a:avLst/>
-          </a:prstGeom>
-          <a:noFill/>
-          <a:ln/>
-        </p:spPr>
-        <p:txBody>
-          <a:bodyPr wrap="square" rtlCol="0" anchor="ctr"/>
-          <a:lstStyle/>
-          <a:p>
-            <a:pPr indent="0" marL="0">
-              <a:buNone/>
-            </a:pPr>
-            <a:r>
-              <a:rPr lang="en-US" sz="2100" b="1" dirty="0">
-                <a:solidFill>
-                  <a:srgbClr val="FFFFFF"/>
-                </a:solidFill>
-                <a:latin typeface="Segoe UI" pitchFamily="34" charset="0"/>
-                <a:ea typeface="Segoe UI" pitchFamily="34" charset="-122"/>
-                <a:cs typeface="Segoe UI" pitchFamily="34" charset="-120"/>
-              </a:rPr>
-              <a:t>SHAP Feature Attributions &amp; The Handedness Glitch</a:t>
-            </a:r>
-            <a:endParaRPr lang="en-US" sz="2100" dirty="0"/>
-          </a:p>
-        </p:txBody>
-      </p:sp>
-      <p:sp>
-        <p:nvSpPr>
-          <p:cNvPr id="4" name="Shape 2"/>
-          <p:cNvSpPr/>
-          <p:nvPr/>
-        </p:nvSpPr>
-        <p:spPr>
-          <a:xfrm>
-            <a:off x="731520" y="1234440"/>
-            <a:ext cx="1828800" cy="36576"/>
-          </a:xfrm>
-          <a:prstGeom prst="rect">
-            <a:avLst/>
+          <p:cNvPr id="2" name="Shape 0"/>
+          <p:cNvSpPr/>
+          <p:nvPr/>
+        </p:nvSpPr>
+        <p:spPr>
+          <a:xfrm>
+            <a:off x="731520" y="365760"/>
+            <a:ext cx="2926080" cy="256032"/>
+          </a:xfrm>
+          <a:prstGeom prst="roundRect">
+            <a:avLst>
+              <a:gd name="adj" fmla="val 50000"/>
+            </a:avLst>
           </a:prstGeom>
           <a:solidFill>
-            <a:srgbClr val="2DD4BF"/>
+            <a:srgbClr val="162235"/>
           </a:solidFill>
           <a:ln w="12700">
             <a:solidFill>
-              <a:srgbClr val="2DD4BF"/>
+              <a:srgbClr val="06B6D4"/>
             </a:solidFill>
             <a:prstDash val="solid"/>
           </a:ln>
@@ -3335,7 +3735,135 @@
       </p:sp>
       <p:sp>
         <p:nvSpPr>
+          <p:cNvPr id="3" name="Text 1"/>
+          <p:cNvSpPr/>
+          <p:nvPr/>
+        </p:nvSpPr>
+        <p:spPr>
+          <a:xfrm>
+            <a:off x="731520" y="384048"/>
+            <a:ext cx="2926080" cy="219456"/>
+          </a:xfrm>
+          <a:prstGeom prst="rect">
+            <a:avLst/>
+          </a:prstGeom>
+          <a:noFill/>
+          <a:ln/>
+        </p:spPr>
+        <p:txBody>
+          <a:bodyPr wrap="square" rtlCol="0" anchor="ctr"/>
+          <a:lstStyle/>
+          <a:p>
+            <a:pPr algn="ctr" indent="0" marL="0">
+              <a:buNone/>
+            </a:pPr>
+            <a:r>
+              <a:rPr lang="en-US" sz="950" b="1" dirty="0">
+                <a:solidFill>
+                  <a:srgbClr val="22D3EE"/>
+                </a:solidFill>
+                <a:latin typeface="Segoe UI" pitchFamily="34" charset="0"/>
+                <a:ea typeface="Segoe UI" pitchFamily="34" charset="-122"/>
+                <a:cs typeface="Segoe UI" pitchFamily="34" charset="-120"/>
+              </a:rPr>
+              <a:t>PHASE 8: MODEL EXPLAINABILITY</a:t>
+            </a:r>
+            <a:endParaRPr lang="en-US" sz="950" dirty="0"/>
+          </a:p>
+        </p:txBody>
+      </p:sp>
+      <p:sp>
+        <p:nvSpPr>
+          <p:cNvPr id="4" name="Text 2"/>
+          <p:cNvSpPr/>
+          <p:nvPr/>
+        </p:nvSpPr>
+        <p:spPr>
+          <a:xfrm>
+            <a:off x="731520" y="713232"/>
+            <a:ext cx="10515600" cy="502920"/>
+          </a:xfrm>
+          <a:prstGeom prst="rect">
+            <a:avLst/>
+          </a:prstGeom>
+          <a:noFill/>
+          <a:ln/>
+        </p:spPr>
+        <p:txBody>
+          <a:bodyPr wrap="square" rtlCol="0" anchor="ctr"/>
+          <a:lstStyle/>
+          <a:p>
+            <a:pPr indent="0" marL="0">
+              <a:buNone/>
+            </a:pPr>
+            <a:r>
+              <a:rPr lang="en-US" sz="2200" b="1" dirty="0">
+                <a:solidFill>
+                  <a:srgbClr val="FFFFFF"/>
+                </a:solidFill>
+                <a:latin typeface="Segoe UI" pitchFamily="34" charset="0"/>
+                <a:ea typeface="Segoe UI" pitchFamily="34" charset="-122"/>
+                <a:cs typeface="Segoe UI" pitchFamily="34" charset="-120"/>
+              </a:rPr>
+              <a:t>SHAP Feature Attributions &amp; The Handedness Glitch</a:t>
+            </a:r>
+            <a:endParaRPr lang="en-US" sz="2200" dirty="0"/>
+          </a:p>
+        </p:txBody>
+      </p:sp>
+      <p:sp>
+        <p:nvSpPr>
           <p:cNvPr id="5" name="Shape 3"/>
+          <p:cNvSpPr/>
+          <p:nvPr/>
+        </p:nvSpPr>
+        <p:spPr>
+          <a:xfrm>
+            <a:off x="731520" y="1261872"/>
+            <a:ext cx="1645920" cy="36576"/>
+          </a:xfrm>
+          <a:prstGeom prst="rect">
+            <a:avLst/>
+          </a:prstGeom>
+          <a:solidFill>
+            <a:srgbClr val="06B6D4"/>
+          </a:solidFill>
+          <a:ln w="12700">
+            <a:solidFill>
+              <a:srgbClr val="06B6D4"/>
+            </a:solidFill>
+            <a:prstDash val="solid"/>
+          </a:ln>
+        </p:spPr>
+      </p:sp>
+      <p:sp>
+        <p:nvSpPr>
+          <p:cNvPr id="6" name="Shape 4"/>
+          <p:cNvSpPr/>
+          <p:nvPr/>
+        </p:nvSpPr>
+        <p:spPr>
+          <a:xfrm>
+            <a:off x="2377440" y="1261872"/>
+            <a:ext cx="1097280" cy="36576"/>
+          </a:xfrm>
+          <a:prstGeom prst="rect">
+            <a:avLst/>
+          </a:prstGeom>
+          <a:solidFill>
+            <a:srgbClr val="2563EB"/>
+          </a:solidFill>
+          <a:ln w="12700">
+            <a:solidFill>
+              <a:srgbClr val="2563EB"/>
+            </a:solidFill>
+            <a:prstDash val="solid"/>
+          </a:ln>
+        </p:spPr>
+      </p:sp>
+      <p:sp>
+        <p:nvSpPr>
+          <p:cNvPr id="7" name="Shape 5"/>
           <p:cNvSpPr/>
           <p:nvPr/>
         </p:nvSpPr>
@@ -3345,10 +3873,12 @@
             <a:ext cx="5029200" cy="4572000"/>
           </a:xfrm>
           <a:prstGeom prst="roundRect">
-            <a:avLst/>
+            <a:avLst>
+              <a:gd name="adj" fmla="val 3000"/>
+            </a:avLst>
           </a:prstGeom>
           <a:solidFill>
-            <a:srgbClr val="10151F"/>
+            <a:srgbClr val="121726"/>
           </a:solidFill>
           <a:ln w="12700">
             <a:solidFill>
@@ -3360,7 +3890,7 @@
       </p:sp>
       <p:sp>
         <p:nvSpPr>
-          <p:cNvPr id="6" name="Text 4"/>
+          <p:cNvPr id="8" name="Text 6"/>
           <p:cNvSpPr/>
           <p:nvPr/>
         </p:nvSpPr>
@@ -3385,7 +3915,7 @@
             <a:r>
               <a:rPr lang="en-US" sz="1500" b="1" dirty="0">
                 <a:solidFill>
-                  <a:srgbClr val="2DD4BF"/>
+                  <a:srgbClr val="22D3EE"/>
                 </a:solidFill>
                 <a:latin typeface="Segoe UI" pitchFamily="34" charset="0"/>
                 <a:ea typeface="Segoe UI" pitchFamily="34" charset="-122"/>
@@ -3399,7 +3929,7 @@
       </p:sp>
       <p:sp>
         <p:nvSpPr>
-          <p:cNvPr id="7" name="Text 5"/>
+          <p:cNvPr id="9" name="Text 7"/>
           <p:cNvSpPr/>
           <p:nvPr/>
         </p:nvSpPr>
@@ -3424,7 +3954,7 @@
             <a:r>
               <a:rPr lang="en-US" sz="1200" dirty="0">
                 <a:solidFill>
-                  <a:srgbClr val="CBD5E1"/>
+                  <a:srgbClr val="E2E8F0"/>
                 </a:solidFill>
                 <a:latin typeface="Segoe UI" pitchFamily="34" charset="0"/>
                 <a:ea typeface="Segoe UI" pitchFamily="34" charset="-122"/>
@@ -3447,7 +3977,7 @@
             <a:r>
               <a:rPr lang="en-US" sz="1200" dirty="0">
                 <a:solidFill>
-                  <a:srgbClr val="CBD5E1"/>
+                  <a:srgbClr val="E2E8F0"/>
                 </a:solidFill>
                 <a:latin typeface="Segoe UI" pitchFamily="34" charset="0"/>
                 <a:ea typeface="Segoe UI" pitchFamily="34" charset="-122"/>
@@ -3470,7 +4000,7 @@
             <a:r>
               <a:rPr lang="en-US" sz="1200" dirty="0">
                 <a:solidFill>
-                  <a:srgbClr val="CBD5E1"/>
+                  <a:srgbClr val="E2E8F0"/>
                 </a:solidFill>
                 <a:latin typeface="Segoe UI" pitchFamily="34" charset="0"/>
                 <a:ea typeface="Segoe UI" pitchFamily="34" charset="-122"/>
@@ -3493,7 +4023,7 @@
             <a:r>
               <a:rPr lang="en-US" sz="1200" dirty="0">
                 <a:solidFill>
-                  <a:srgbClr val="CBD5E1"/>
+                  <a:srgbClr val="E2E8F0"/>
                 </a:solidFill>
                 <a:latin typeface="Segoe UI" pitchFamily="34" charset="0"/>
                 <a:ea typeface="Segoe UI" pitchFamily="34" charset="-122"/>
@@ -3516,7 +4046,7 @@
             <a:r>
               <a:rPr lang="en-US" sz="1200" dirty="0">
                 <a:solidFill>
-                  <a:srgbClr val="CBD5E1"/>
+                  <a:srgbClr val="E2E8F0"/>
                 </a:solidFill>
                 <a:latin typeface="Segoe UI" pitchFamily="34" charset="0"/>
                 <a:ea typeface="Segoe UI" pitchFamily="34" charset="-122"/>
@@ -3530,7 +4060,7 @@
       </p:sp>
       <p:pic>
         <p:nvPicPr>
-          <p:cNvPr id="8" name="Image 0" descr="C:\Users\hariv\OneDrive\Desktop\NeuroADHD\website\assets\img\05_shap_beeswarm_SetA.png">    </p:cNvPr>
+          <p:cNvPr id="10" name="Image 0" descr="C:\Users\hariv\OneDrive\Desktop\NeuroADHD\website\assets\img\05_shap_beeswarm_SetA.png">    </p:cNvPr>
           <p:cNvPicPr>
             <a:picLocks noChangeAspect="1"/>
           </p:cNvPicPr>
@@ -3566,7 +4096,7 @@
     <p:bg>
       <p:bgPr>
         <a:solidFill>
-          <a:srgbClr val="07090E"/>
+          <a:srgbClr val="090A0F"/>
         </a:solidFill>
       </p:bgPr>
     </p:bg>
@@ -3586,102 +4116,26 @@
       </p:grpSpPr>
       <p:sp>
         <p:nvSpPr>
-          <p:cNvPr id="2" name="Text 0"/>
-          <p:cNvSpPr/>
-          <p:nvPr/>
-        </p:nvSpPr>
-        <p:spPr>
-          <a:xfrm>
-            <a:off x="731520" y="411480"/>
-            <a:ext cx="9144000" cy="228600"/>
-          </a:xfrm>
-          <a:prstGeom prst="rect">
-            <a:avLst/>
-          </a:prstGeom>
-          <a:noFill/>
-          <a:ln/>
-        </p:spPr>
-        <p:txBody>
-          <a:bodyPr wrap="square" rtlCol="0" anchor="ctr"/>
-          <a:lstStyle/>
-          <a:p>
-            <a:pPr indent="0" marL="0">
-              <a:buNone/>
-            </a:pPr>
-            <a:r>
-              <a:rPr lang="en-US" sz="1000" b="1" dirty="0">
-                <a:solidFill>
-                  <a:srgbClr val="2DD4BF"/>
-                </a:solidFill>
-                <a:latin typeface="Segoe UI" pitchFamily="34" charset="0"/>
-                <a:ea typeface="Segoe UI" pitchFamily="34" charset="-122"/>
-                <a:cs typeface="Segoe UI" pitchFamily="34" charset="-120"/>
-              </a:rPr>
-              <a:t>PHASE 9: NEUROIMAGING ANALYSIS</a:t>
-            </a:r>
-            <a:endParaRPr lang="en-US" sz="1000" dirty="0"/>
-          </a:p>
-        </p:txBody>
-      </p:sp>
-      <p:sp>
-        <p:nvSpPr>
-          <p:cNvPr id="3" name="Text 1"/>
-          <p:cNvSpPr/>
-          <p:nvPr/>
-        </p:nvSpPr>
-        <p:spPr>
-          <a:xfrm>
-            <a:off x="731520" y="685800"/>
-            <a:ext cx="10515600" cy="502920"/>
-          </a:xfrm>
-          <a:prstGeom prst="rect">
-            <a:avLst/>
-          </a:prstGeom>
-          <a:noFill/>
-          <a:ln/>
-        </p:spPr>
-        <p:txBody>
-          <a:bodyPr wrap="square" rtlCol="0" anchor="ctr"/>
-          <a:lstStyle/>
-          <a:p>
-            <a:pPr indent="0" marL="0">
-              <a:buNone/>
-            </a:pPr>
-            <a:r>
-              <a:rPr lang="en-US" sz="2100" b="1" dirty="0">
-                <a:solidFill>
-                  <a:srgbClr val="FFFFFF"/>
-                </a:solidFill>
-                <a:latin typeface="Segoe UI" pitchFamily="34" charset="0"/>
-                <a:ea typeface="Segoe UI" pitchFamily="34" charset="-122"/>
-                <a:cs typeface="Segoe UI" pitchFamily="34" charset="-120"/>
-              </a:rPr>
-              <a:t>Resting-State fMRI Brain Connectomes via Nilearn</a:t>
-            </a:r>
-            <a:endParaRPr lang="en-US" sz="2100" dirty="0"/>
-          </a:p>
-        </p:txBody>
-      </p:sp>
-      <p:sp>
-        <p:nvSpPr>
-          <p:cNvPr id="4" name="Shape 2"/>
-          <p:cNvSpPr/>
-          <p:nvPr/>
-        </p:nvSpPr>
-        <p:spPr>
-          <a:xfrm>
-            <a:off x="731520" y="1234440"/>
-            <a:ext cx="1828800" cy="36576"/>
-          </a:xfrm>
-          <a:prstGeom prst="rect">
-            <a:avLst/>
+          <p:cNvPr id="2" name="Shape 0"/>
+          <p:cNvSpPr/>
+          <p:nvPr/>
+        </p:nvSpPr>
+        <p:spPr>
+          <a:xfrm>
+            <a:off x="731520" y="365760"/>
+            <a:ext cx="2926080" cy="256032"/>
+          </a:xfrm>
+          <a:prstGeom prst="roundRect">
+            <a:avLst>
+              <a:gd name="adj" fmla="val 50000"/>
+            </a:avLst>
           </a:prstGeom>
           <a:solidFill>
-            <a:srgbClr val="2DD4BF"/>
+            <a:srgbClr val="162235"/>
           </a:solidFill>
           <a:ln w="12700">
             <a:solidFill>
-              <a:srgbClr val="2DD4BF"/>
+              <a:srgbClr val="06B6D4"/>
             </a:solidFill>
             <a:prstDash val="solid"/>
           </a:ln>
@@ -3689,7 +4143,135 @@
       </p:sp>
       <p:sp>
         <p:nvSpPr>
+          <p:cNvPr id="3" name="Text 1"/>
+          <p:cNvSpPr/>
+          <p:nvPr/>
+        </p:nvSpPr>
+        <p:spPr>
+          <a:xfrm>
+            <a:off x="731520" y="384048"/>
+            <a:ext cx="2926080" cy="219456"/>
+          </a:xfrm>
+          <a:prstGeom prst="rect">
+            <a:avLst/>
+          </a:prstGeom>
+          <a:noFill/>
+          <a:ln/>
+        </p:spPr>
+        <p:txBody>
+          <a:bodyPr wrap="square" rtlCol="0" anchor="ctr"/>
+          <a:lstStyle/>
+          <a:p>
+            <a:pPr algn="ctr" indent="0" marL="0">
+              <a:buNone/>
+            </a:pPr>
+            <a:r>
+              <a:rPr lang="en-US" sz="950" b="1" dirty="0">
+                <a:solidFill>
+                  <a:srgbClr val="22D3EE"/>
+                </a:solidFill>
+                <a:latin typeface="Segoe UI" pitchFamily="34" charset="0"/>
+                <a:ea typeface="Segoe UI" pitchFamily="34" charset="-122"/>
+                <a:cs typeface="Segoe UI" pitchFamily="34" charset="-120"/>
+              </a:rPr>
+              <a:t>PHASE 9: NEUROIMAGING ANALYSIS</a:t>
+            </a:r>
+            <a:endParaRPr lang="en-US" sz="950" dirty="0"/>
+          </a:p>
+        </p:txBody>
+      </p:sp>
+      <p:sp>
+        <p:nvSpPr>
+          <p:cNvPr id="4" name="Text 2"/>
+          <p:cNvSpPr/>
+          <p:nvPr/>
+        </p:nvSpPr>
+        <p:spPr>
+          <a:xfrm>
+            <a:off x="731520" y="713232"/>
+            <a:ext cx="10515600" cy="502920"/>
+          </a:xfrm>
+          <a:prstGeom prst="rect">
+            <a:avLst/>
+          </a:prstGeom>
+          <a:noFill/>
+          <a:ln/>
+        </p:spPr>
+        <p:txBody>
+          <a:bodyPr wrap="square" rtlCol="0" anchor="ctr"/>
+          <a:lstStyle/>
+          <a:p>
+            <a:pPr indent="0" marL="0">
+              <a:buNone/>
+            </a:pPr>
+            <a:r>
+              <a:rPr lang="en-US" sz="2200" b="1" dirty="0">
+                <a:solidFill>
+                  <a:srgbClr val="FFFFFF"/>
+                </a:solidFill>
+                <a:latin typeface="Segoe UI" pitchFamily="34" charset="0"/>
+                <a:ea typeface="Segoe UI" pitchFamily="34" charset="-122"/>
+                <a:cs typeface="Segoe UI" pitchFamily="34" charset="-120"/>
+              </a:rPr>
+              <a:t>Resting-State fMRI Brain Connectomes via Nilearn</a:t>
+            </a:r>
+            <a:endParaRPr lang="en-US" sz="2200" dirty="0"/>
+          </a:p>
+        </p:txBody>
+      </p:sp>
+      <p:sp>
+        <p:nvSpPr>
           <p:cNvPr id="5" name="Shape 3"/>
+          <p:cNvSpPr/>
+          <p:nvPr/>
+        </p:nvSpPr>
+        <p:spPr>
+          <a:xfrm>
+            <a:off x="731520" y="1261872"/>
+            <a:ext cx="1645920" cy="36576"/>
+          </a:xfrm>
+          <a:prstGeom prst="rect">
+            <a:avLst/>
+          </a:prstGeom>
+          <a:solidFill>
+            <a:srgbClr val="06B6D4"/>
+          </a:solidFill>
+          <a:ln w="12700">
+            <a:solidFill>
+              <a:srgbClr val="06B6D4"/>
+            </a:solidFill>
+            <a:prstDash val="solid"/>
+          </a:ln>
+        </p:spPr>
+      </p:sp>
+      <p:sp>
+        <p:nvSpPr>
+          <p:cNvPr id="6" name="Shape 4"/>
+          <p:cNvSpPr/>
+          <p:nvPr/>
+        </p:nvSpPr>
+        <p:spPr>
+          <a:xfrm>
+            <a:off x="2377440" y="1261872"/>
+            <a:ext cx="1097280" cy="36576"/>
+          </a:xfrm>
+          <a:prstGeom prst="rect">
+            <a:avLst/>
+          </a:prstGeom>
+          <a:solidFill>
+            <a:srgbClr val="2563EB"/>
+          </a:solidFill>
+          <a:ln w="12700">
+            <a:solidFill>
+              <a:srgbClr val="2563EB"/>
+            </a:solidFill>
+            <a:prstDash val="solid"/>
+          </a:ln>
+        </p:spPr>
+      </p:sp>
+      <p:sp>
+        <p:nvSpPr>
+          <p:cNvPr id="7" name="Shape 5"/>
           <p:cNvSpPr/>
           <p:nvPr/>
         </p:nvSpPr>
@@ -3699,10 +4281,12 @@
             <a:ext cx="5029200" cy="4572000"/>
           </a:xfrm>
           <a:prstGeom prst="roundRect">
-            <a:avLst/>
+            <a:avLst>
+              <a:gd name="adj" fmla="val 3000"/>
+            </a:avLst>
           </a:prstGeom>
           <a:solidFill>
-            <a:srgbClr val="10151F"/>
+            <a:srgbClr val="121726"/>
           </a:solidFill>
           <a:ln w="12700">
             <a:solidFill>
@@ -3714,7 +4298,7 @@
       </p:sp>
       <p:sp>
         <p:nvSpPr>
-          <p:cNvPr id="6" name="Text 4"/>
+          <p:cNvPr id="8" name="Text 6"/>
           <p:cNvSpPr/>
           <p:nvPr/>
         </p:nvSpPr>
@@ -3739,7 +4323,7 @@
             <a:r>
               <a:rPr lang="en-US" sz="1500" b="1" dirty="0">
                 <a:solidFill>
-                  <a:srgbClr val="2DD4BF"/>
+                  <a:srgbClr val="22D3EE"/>
                 </a:solidFill>
                 <a:latin typeface="Segoe UI" pitchFamily="34" charset="0"/>
                 <a:ea typeface="Segoe UI" pitchFamily="34" charset="-122"/>
@@ -3753,7 +4337,7 @@
       </p:sp>
       <p:sp>
         <p:nvSpPr>
-          <p:cNvPr id="7" name="Text 5"/>
+          <p:cNvPr id="9" name="Text 7"/>
           <p:cNvSpPr/>
           <p:nvPr/>
         </p:nvSpPr>
@@ -3778,7 +4362,7 @@
             <a:r>
               <a:rPr lang="en-US" sz="1200" dirty="0">
                 <a:solidFill>
-                  <a:srgbClr val="CBD5E1"/>
+                  <a:srgbClr val="E2E8F0"/>
                 </a:solidFill>
                 <a:latin typeface="Segoe UI" pitchFamily="34" charset="0"/>
                 <a:ea typeface="Segoe UI" pitchFamily="34" charset="-122"/>
@@ -3801,7 +4385,7 @@
             <a:r>
               <a:rPr lang="en-US" sz="1200" dirty="0">
                 <a:solidFill>
-                  <a:srgbClr val="CBD5E1"/>
+                  <a:srgbClr val="E2E8F0"/>
                 </a:solidFill>
                 <a:latin typeface="Segoe UI" pitchFamily="34" charset="0"/>
                 <a:ea typeface="Segoe UI" pitchFamily="34" charset="-122"/>
@@ -3824,7 +4408,7 @@
             <a:r>
               <a:rPr lang="en-US" sz="1200" dirty="0">
                 <a:solidFill>
-                  <a:srgbClr val="CBD5E1"/>
+                  <a:srgbClr val="E2E8F0"/>
                 </a:solidFill>
                 <a:latin typeface="Segoe UI" pitchFamily="34" charset="0"/>
                 <a:ea typeface="Segoe UI" pitchFamily="34" charset="-122"/>
@@ -3847,7 +4431,7 @@
             <a:r>
               <a:rPr lang="en-US" sz="1200" dirty="0">
                 <a:solidFill>
-                  <a:srgbClr val="CBD5E1"/>
+                  <a:srgbClr val="E2E8F0"/>
                 </a:solidFill>
                 <a:latin typeface="Segoe UI" pitchFamily="34" charset="0"/>
                 <a:ea typeface="Segoe UI" pitchFamily="34" charset="-122"/>
@@ -3870,7 +4454,7 @@
             <a:r>
               <a:rPr lang="en-US" sz="1200" dirty="0">
                 <a:solidFill>
-                  <a:srgbClr val="CBD5E1"/>
+                  <a:srgbClr val="E2E8F0"/>
                 </a:solidFill>
                 <a:latin typeface="Segoe UI" pitchFamily="34" charset="0"/>
                 <a:ea typeface="Segoe UI" pitchFamily="34" charset="-122"/>
@@ -3893,7 +4477,7 @@
             <a:r>
               <a:rPr lang="en-US" sz="1200" dirty="0">
                 <a:solidFill>
-                  <a:srgbClr val="CBD5E1"/>
+                  <a:srgbClr val="E2E8F0"/>
                 </a:solidFill>
                 <a:latin typeface="Segoe UI" pitchFamily="34" charset="0"/>
                 <a:ea typeface="Segoe UI" pitchFamily="34" charset="-122"/>
@@ -3907,7 +4491,7 @@
       </p:sp>
       <p:pic>
         <p:nvPicPr>
-          <p:cNvPr id="8" name="Image 0" descr="C:\Users\hariv\OneDrive\Desktop\NeuroADHD\website\assets\img\06_connectome.png">    </p:cNvPr>
+          <p:cNvPr id="10" name="Image 0" descr="C:\Users\hariv\OneDrive\Desktop\NeuroADHD\website\assets\img\06_connectome.png">    </p:cNvPr>
           <p:cNvPicPr>
             <a:picLocks noChangeAspect="1"/>
           </p:cNvPicPr>
@@ -3943,7 +4527,7 @@
     <p:bg>
       <p:bgPr>
         <a:solidFill>
-          <a:srgbClr val="07090E"/>
+          <a:srgbClr val="090A0F"/>
         </a:solidFill>
       </p:bgPr>
     </p:bg>
@@ -3963,102 +4547,26 @@
       </p:grpSpPr>
       <p:sp>
         <p:nvSpPr>
-          <p:cNvPr id="2" name="Text 0"/>
-          <p:cNvSpPr/>
-          <p:nvPr/>
-        </p:nvSpPr>
-        <p:spPr>
-          <a:xfrm>
-            <a:off x="731520" y="411480"/>
-            <a:ext cx="9144000" cy="228600"/>
-          </a:xfrm>
-          <a:prstGeom prst="rect">
-            <a:avLst/>
-          </a:prstGeom>
-          <a:noFill/>
-          <a:ln/>
-        </p:spPr>
-        <p:txBody>
-          <a:bodyPr wrap="square" rtlCol="0" anchor="ctr"/>
-          <a:lstStyle/>
-          <a:p>
-            <a:pPr indent="0" marL="0">
-              <a:buNone/>
-            </a:pPr>
-            <a:r>
-              <a:rPr lang="en-US" sz="1000" b="1" dirty="0">
-                <a:solidFill>
-                  <a:srgbClr val="2DD4BF"/>
-                </a:solidFill>
-                <a:latin typeface="Segoe UI" pitchFamily="34" charset="0"/>
-                <a:ea typeface="Segoe UI" pitchFamily="34" charset="-122"/>
-                <a:cs typeface="Segoe UI" pitchFamily="34" charset="-120"/>
-              </a:rPr>
-              <a:t>PHASE 10: PRODUCTION DEPLOYMENT</a:t>
-            </a:r>
-            <a:endParaRPr lang="en-US" sz="1000" dirty="0"/>
-          </a:p>
-        </p:txBody>
-      </p:sp>
-      <p:sp>
-        <p:nvSpPr>
-          <p:cNvPr id="3" name="Text 1"/>
-          <p:cNvSpPr/>
-          <p:nvPr/>
-        </p:nvSpPr>
-        <p:spPr>
-          <a:xfrm>
-            <a:off x="731520" y="685800"/>
-            <a:ext cx="10515600" cy="502920"/>
-          </a:xfrm>
-          <a:prstGeom prst="rect">
-            <a:avLst/>
-          </a:prstGeom>
-          <a:noFill/>
-          <a:ln/>
-        </p:spPr>
-        <p:txBody>
-          <a:bodyPr wrap="square" rtlCol="0" anchor="ctr"/>
-          <a:lstStyle/>
-          <a:p>
-            <a:pPr indent="0" marL="0">
-              <a:buNone/>
-            </a:pPr>
-            <a:r>
-              <a:rPr lang="en-US" sz="2100" b="1" dirty="0">
-                <a:solidFill>
-                  <a:srgbClr val="FFFFFF"/>
-                </a:solidFill>
-                <a:latin typeface="Segoe UI" pitchFamily="34" charset="0"/>
-                <a:ea typeface="Segoe UI" pitchFamily="34" charset="-122"/>
-                <a:cs typeface="Segoe UI" pitchFamily="34" charset="-120"/>
-              </a:rPr>
-              <a:t>Interactive 3D Web Application &amp; Client-Side Inference</a:t>
-            </a:r>
-            <a:endParaRPr lang="en-US" sz="2100" dirty="0"/>
-          </a:p>
-        </p:txBody>
-      </p:sp>
-      <p:sp>
-        <p:nvSpPr>
-          <p:cNvPr id="4" name="Shape 2"/>
-          <p:cNvSpPr/>
-          <p:nvPr/>
-        </p:nvSpPr>
-        <p:spPr>
-          <a:xfrm>
-            <a:off x="731520" y="1234440"/>
-            <a:ext cx="1828800" cy="36576"/>
-          </a:xfrm>
-          <a:prstGeom prst="rect">
-            <a:avLst/>
+          <p:cNvPr id="2" name="Shape 0"/>
+          <p:cNvSpPr/>
+          <p:nvPr/>
+        </p:nvSpPr>
+        <p:spPr>
+          <a:xfrm>
+            <a:off x="731520" y="365760"/>
+            <a:ext cx="2926080" cy="256032"/>
+          </a:xfrm>
+          <a:prstGeom prst="roundRect">
+            <a:avLst>
+              <a:gd name="adj" fmla="val 50000"/>
+            </a:avLst>
           </a:prstGeom>
           <a:solidFill>
-            <a:srgbClr val="2DD4BF"/>
+            <a:srgbClr val="162235"/>
           </a:solidFill>
           <a:ln w="12700">
             <a:solidFill>
-              <a:srgbClr val="2DD4BF"/>
+              <a:srgbClr val="06B6D4"/>
             </a:solidFill>
             <a:prstDash val="solid"/>
           </a:ln>
@@ -4066,7 +4574,135 @@
       </p:sp>
       <p:sp>
         <p:nvSpPr>
+          <p:cNvPr id="3" name="Text 1"/>
+          <p:cNvSpPr/>
+          <p:nvPr/>
+        </p:nvSpPr>
+        <p:spPr>
+          <a:xfrm>
+            <a:off x="731520" y="384048"/>
+            <a:ext cx="2926080" cy="219456"/>
+          </a:xfrm>
+          <a:prstGeom prst="rect">
+            <a:avLst/>
+          </a:prstGeom>
+          <a:noFill/>
+          <a:ln/>
+        </p:spPr>
+        <p:txBody>
+          <a:bodyPr wrap="square" rtlCol="0" anchor="ctr"/>
+          <a:lstStyle/>
+          <a:p>
+            <a:pPr algn="ctr" indent="0" marL="0">
+              <a:buNone/>
+            </a:pPr>
+            <a:r>
+              <a:rPr lang="en-US" sz="950" b="1" dirty="0">
+                <a:solidFill>
+                  <a:srgbClr val="22D3EE"/>
+                </a:solidFill>
+                <a:latin typeface="Segoe UI" pitchFamily="34" charset="0"/>
+                <a:ea typeface="Segoe UI" pitchFamily="34" charset="-122"/>
+                <a:cs typeface="Segoe UI" pitchFamily="34" charset="-120"/>
+              </a:rPr>
+              <a:t>PHASE 10: PRODUCTION DEPLOYMENT</a:t>
+            </a:r>
+            <a:endParaRPr lang="en-US" sz="950" dirty="0"/>
+          </a:p>
+        </p:txBody>
+      </p:sp>
+      <p:sp>
+        <p:nvSpPr>
+          <p:cNvPr id="4" name="Text 2"/>
+          <p:cNvSpPr/>
+          <p:nvPr/>
+        </p:nvSpPr>
+        <p:spPr>
+          <a:xfrm>
+            <a:off x="731520" y="713232"/>
+            <a:ext cx="10515600" cy="502920"/>
+          </a:xfrm>
+          <a:prstGeom prst="rect">
+            <a:avLst/>
+          </a:prstGeom>
+          <a:noFill/>
+          <a:ln/>
+        </p:spPr>
+        <p:txBody>
+          <a:bodyPr wrap="square" rtlCol="0" anchor="ctr"/>
+          <a:lstStyle/>
+          <a:p>
+            <a:pPr indent="0" marL="0">
+              <a:buNone/>
+            </a:pPr>
+            <a:r>
+              <a:rPr lang="en-US" sz="2200" b="1" dirty="0">
+                <a:solidFill>
+                  <a:srgbClr val="FFFFFF"/>
+                </a:solidFill>
+                <a:latin typeface="Segoe UI" pitchFamily="34" charset="0"/>
+                <a:ea typeface="Segoe UI" pitchFamily="34" charset="-122"/>
+                <a:cs typeface="Segoe UI" pitchFamily="34" charset="-120"/>
+              </a:rPr>
+              <a:t>Interactive 3D Web Application &amp; Client-Side Inference</a:t>
+            </a:r>
+            <a:endParaRPr lang="en-US" sz="2200" dirty="0"/>
+          </a:p>
+        </p:txBody>
+      </p:sp>
+      <p:sp>
+        <p:nvSpPr>
           <p:cNvPr id="5" name="Shape 3"/>
+          <p:cNvSpPr/>
+          <p:nvPr/>
+        </p:nvSpPr>
+        <p:spPr>
+          <a:xfrm>
+            <a:off x="731520" y="1261872"/>
+            <a:ext cx="1645920" cy="36576"/>
+          </a:xfrm>
+          <a:prstGeom prst="rect">
+            <a:avLst/>
+          </a:prstGeom>
+          <a:solidFill>
+            <a:srgbClr val="06B6D4"/>
+          </a:solidFill>
+          <a:ln w="12700">
+            <a:solidFill>
+              <a:srgbClr val="06B6D4"/>
+            </a:solidFill>
+            <a:prstDash val="solid"/>
+          </a:ln>
+        </p:spPr>
+      </p:sp>
+      <p:sp>
+        <p:nvSpPr>
+          <p:cNvPr id="6" name="Shape 4"/>
+          <p:cNvSpPr/>
+          <p:nvPr/>
+        </p:nvSpPr>
+        <p:spPr>
+          <a:xfrm>
+            <a:off x="2377440" y="1261872"/>
+            <a:ext cx="1097280" cy="36576"/>
+          </a:xfrm>
+          <a:prstGeom prst="rect">
+            <a:avLst/>
+          </a:prstGeom>
+          <a:solidFill>
+            <a:srgbClr val="2563EB"/>
+          </a:solidFill>
+          <a:ln w="12700">
+            <a:solidFill>
+              <a:srgbClr val="2563EB"/>
+            </a:solidFill>
+            <a:prstDash val="solid"/>
+          </a:ln>
+        </p:spPr>
+      </p:sp>
+      <p:sp>
+        <p:nvSpPr>
+          <p:cNvPr id="7" name="Shape 5"/>
           <p:cNvSpPr/>
           <p:nvPr/>
         </p:nvSpPr>
@@ -4076,10 +4712,12 @@
             <a:ext cx="10698480" cy="804672"/>
           </a:xfrm>
           <a:prstGeom prst="roundRect">
-            <a:avLst/>
+            <a:avLst>
+              <a:gd name="adj" fmla="val 13636"/>
+            </a:avLst>
           </a:prstGeom>
           <a:solidFill>
-            <a:srgbClr val="10151F"/>
+            <a:srgbClr val="121726"/>
           </a:solidFill>
           <a:ln w="12700">
             <a:solidFill>
@@ -4091,7 +4729,7 @@
       </p:sp>
       <p:sp>
         <p:nvSpPr>
-          <p:cNvPr id="6" name="Text 4"/>
+          <p:cNvPr id="8" name="Text 6"/>
           <p:cNvSpPr/>
           <p:nvPr/>
         </p:nvSpPr>
@@ -4116,7 +4754,7 @@
             <a:r>
               <a:rPr lang="en-US" sz="1400" b="1" dirty="0">
                 <a:solidFill>
-                  <a:srgbClr val="2DD4BF"/>
+                  <a:srgbClr val="22D3EE"/>
                 </a:solidFill>
                 <a:latin typeface="Segoe UI" pitchFamily="34" charset="0"/>
                 <a:ea typeface="Segoe UI" pitchFamily="34" charset="-122"/>
@@ -4130,7 +4768,7 @@
       </p:sp>
       <p:sp>
         <p:nvSpPr>
-          <p:cNvPr id="7" name="Text 5"/>
+          <p:cNvPr id="9" name="Text 7"/>
           <p:cNvSpPr/>
           <p:nvPr/>
         </p:nvSpPr>
@@ -4155,7 +4793,7 @@
             <a:r>
               <a:rPr lang="en-US" sz="1150" dirty="0">
                 <a:solidFill>
-                  <a:srgbClr val="CBD5E1"/>
+                  <a:srgbClr val="E2E8F0"/>
                 </a:solidFill>
                 <a:latin typeface="Segoe UI" pitchFamily="34" charset="0"/>
                 <a:ea typeface="Segoe UI" pitchFamily="34" charset="-122"/>
@@ -4169,7 +4807,7 @@
       </p:sp>
       <p:sp>
         <p:nvSpPr>
-          <p:cNvPr id="8" name="Shape 6"/>
+          <p:cNvPr id="10" name="Shape 8"/>
           <p:cNvSpPr/>
           <p:nvPr/>
         </p:nvSpPr>
@@ -4179,10 +4817,12 @@
             <a:ext cx="10698480" cy="804672"/>
           </a:xfrm>
           <a:prstGeom prst="roundRect">
-            <a:avLst/>
+            <a:avLst>
+              <a:gd name="adj" fmla="val 13636"/>
+            </a:avLst>
           </a:prstGeom>
           <a:solidFill>
-            <a:srgbClr val="10151F"/>
+            <a:srgbClr val="121726"/>
           </a:solidFill>
           <a:ln w="12700">
             <a:solidFill>
@@ -4194,7 +4834,7 @@
       </p:sp>
       <p:sp>
         <p:nvSpPr>
-          <p:cNvPr id="9" name="Text 7"/>
+          <p:cNvPr id="11" name="Text 9"/>
           <p:cNvSpPr/>
           <p:nvPr/>
         </p:nvSpPr>
@@ -4219,7 +4859,7 @@
             <a:r>
               <a:rPr lang="en-US" sz="1400" b="1" dirty="0">
                 <a:solidFill>
-                  <a:srgbClr val="2DD4BF"/>
+                  <a:srgbClr val="22D3EE"/>
                 </a:solidFill>
                 <a:latin typeface="Segoe UI" pitchFamily="34" charset="0"/>
                 <a:ea typeface="Segoe UI" pitchFamily="34" charset="-122"/>
@@ -4233,7 +4873,7 @@
       </p:sp>
       <p:sp>
         <p:nvSpPr>
-          <p:cNvPr id="10" name="Text 8"/>
+          <p:cNvPr id="12" name="Text 10"/>
           <p:cNvSpPr/>
           <p:nvPr/>
         </p:nvSpPr>
@@ -4258,7 +4898,7 @@
             <a:r>
               <a:rPr lang="en-US" sz="1150" dirty="0">
                 <a:solidFill>
-                  <a:srgbClr val="CBD5E1"/>
+                  <a:srgbClr val="E2E8F0"/>
                 </a:solidFill>
                 <a:latin typeface="Segoe UI" pitchFamily="34" charset="0"/>
                 <a:ea typeface="Segoe UI" pitchFamily="34" charset="-122"/>
@@ -4272,7 +4912,7 @@
       </p:sp>
       <p:sp>
         <p:nvSpPr>
-          <p:cNvPr id="11" name="Shape 9"/>
+          <p:cNvPr id="13" name="Shape 11"/>
           <p:cNvSpPr/>
           <p:nvPr/>
         </p:nvSpPr>
@@ -4282,10 +4922,12 @@
             <a:ext cx="10698480" cy="804672"/>
           </a:xfrm>
           <a:prstGeom prst="roundRect">
-            <a:avLst/>
+            <a:avLst>
+              <a:gd name="adj" fmla="val 13636"/>
+            </a:avLst>
           </a:prstGeom>
           <a:solidFill>
-            <a:srgbClr val="10151F"/>
+            <a:srgbClr val="121726"/>
           </a:solidFill>
           <a:ln w="12700">
             <a:solidFill>
@@ -4297,7 +4939,7 @@
       </p:sp>
       <p:sp>
         <p:nvSpPr>
-          <p:cNvPr id="12" name="Text 10"/>
+          <p:cNvPr id="14" name="Text 12"/>
           <p:cNvSpPr/>
           <p:nvPr/>
         </p:nvSpPr>
@@ -4322,7 +4964,7 @@
             <a:r>
               <a:rPr lang="en-US" sz="1400" b="1" dirty="0">
                 <a:solidFill>
-                  <a:srgbClr val="2DD4BF"/>
+                  <a:srgbClr val="22D3EE"/>
                 </a:solidFill>
                 <a:latin typeface="Segoe UI" pitchFamily="34" charset="0"/>
                 <a:ea typeface="Segoe UI" pitchFamily="34" charset="-122"/>
@@ -4336,7 +4978,7 @@
       </p:sp>
       <p:sp>
         <p:nvSpPr>
-          <p:cNvPr id="13" name="Text 11"/>
+          <p:cNvPr id="15" name="Text 13"/>
           <p:cNvSpPr/>
           <p:nvPr/>
         </p:nvSpPr>
@@ -4361,7 +5003,7 @@
             <a:r>
               <a:rPr lang="en-US" sz="1150" dirty="0">
                 <a:solidFill>
-                  <a:srgbClr val="CBD5E1"/>
+                  <a:srgbClr val="E2E8F0"/>
                 </a:solidFill>
                 <a:latin typeface="Segoe UI" pitchFamily="34" charset="0"/>
                 <a:ea typeface="Segoe UI" pitchFamily="34" charset="-122"/>
@@ -4375,7 +5017,7 @@
       </p:sp>
       <p:sp>
         <p:nvSpPr>
-          <p:cNvPr id="14" name="Shape 12"/>
+          <p:cNvPr id="16" name="Shape 14"/>
           <p:cNvSpPr/>
           <p:nvPr/>
         </p:nvSpPr>
@@ -4385,10 +5027,12 @@
             <a:ext cx="10698480" cy="804672"/>
           </a:xfrm>
           <a:prstGeom prst="roundRect">
-            <a:avLst/>
+            <a:avLst>
+              <a:gd name="adj" fmla="val 13636"/>
+            </a:avLst>
           </a:prstGeom>
           <a:solidFill>
-            <a:srgbClr val="10151F"/>
+            <a:srgbClr val="121726"/>
           </a:solidFill>
           <a:ln w="12700">
             <a:solidFill>
@@ -4400,7 +5044,7 @@
       </p:sp>
       <p:sp>
         <p:nvSpPr>
-          <p:cNvPr id="15" name="Text 13"/>
+          <p:cNvPr id="17" name="Text 15"/>
           <p:cNvSpPr/>
           <p:nvPr/>
         </p:nvSpPr>
@@ -4425,7 +5069,7 @@
             <a:r>
               <a:rPr lang="en-US" sz="1400" b="1" dirty="0">
                 <a:solidFill>
-                  <a:srgbClr val="2DD4BF"/>
+                  <a:srgbClr val="22D3EE"/>
                 </a:solidFill>
                 <a:latin typeface="Segoe UI" pitchFamily="34" charset="0"/>
                 <a:ea typeface="Segoe UI" pitchFamily="34" charset="-122"/>
@@ -4439,7 +5083,7 @@
       </p:sp>
       <p:sp>
         <p:nvSpPr>
-          <p:cNvPr id="16" name="Text 14"/>
+          <p:cNvPr id="18" name="Text 16"/>
           <p:cNvSpPr/>
           <p:nvPr/>
         </p:nvSpPr>
@@ -4464,7 +5108,7 @@
             <a:r>
               <a:rPr lang="en-US" sz="1150" dirty="0">
                 <a:solidFill>
-                  <a:srgbClr val="CBD5E1"/>
+                  <a:srgbClr val="E2E8F0"/>
                 </a:solidFill>
                 <a:latin typeface="Segoe UI" pitchFamily="34" charset="0"/>
                 <a:ea typeface="Segoe UI" pitchFamily="34" charset="-122"/>
@@ -4478,7 +5122,7 @@
       </p:sp>
       <p:sp>
         <p:nvSpPr>
-          <p:cNvPr id="17" name="Shape 15"/>
+          <p:cNvPr id="19" name="Shape 17"/>
           <p:cNvSpPr/>
           <p:nvPr/>
         </p:nvSpPr>
@@ -4488,10 +5132,12 @@
             <a:ext cx="10698480" cy="804672"/>
           </a:xfrm>
           <a:prstGeom prst="roundRect">
-            <a:avLst/>
+            <a:avLst>
+              <a:gd name="adj" fmla="val 13636"/>
+            </a:avLst>
           </a:prstGeom>
           <a:solidFill>
-            <a:srgbClr val="10151F"/>
+            <a:srgbClr val="121726"/>
           </a:solidFill>
           <a:ln w="12700">
             <a:solidFill>
@@ -4503,7 +5149,7 @@
       </p:sp>
       <p:sp>
         <p:nvSpPr>
-          <p:cNvPr id="18" name="Text 16"/>
+          <p:cNvPr id="20" name="Text 18"/>
           <p:cNvSpPr/>
           <p:nvPr/>
         </p:nvSpPr>
@@ -4528,7 +5174,7 @@
             <a:r>
               <a:rPr lang="en-US" sz="1400" b="1" dirty="0">
                 <a:solidFill>
-                  <a:srgbClr val="2DD4BF"/>
+                  <a:srgbClr val="22D3EE"/>
                 </a:solidFill>
                 <a:latin typeface="Segoe UI" pitchFamily="34" charset="0"/>
                 <a:ea typeface="Segoe UI" pitchFamily="34" charset="-122"/>
@@ -4542,7 +5188,7 @@
       </p:sp>
       <p:sp>
         <p:nvSpPr>
-          <p:cNvPr id="19" name="Text 17"/>
+          <p:cNvPr id="21" name="Text 19"/>
           <p:cNvSpPr/>
           <p:nvPr/>
         </p:nvSpPr>
@@ -4567,7 +5213,7 @@
             <a:r>
               <a:rPr lang="en-US" sz="1150" dirty="0">
                 <a:solidFill>
-                  <a:srgbClr val="CBD5E1"/>
+                  <a:srgbClr val="E2E8F0"/>
                 </a:solidFill>
                 <a:latin typeface="Segoe UI" pitchFamily="34" charset="0"/>
                 <a:ea typeface="Segoe UI" pitchFamily="34" charset="-122"/>
@@ -4593,7 +5239,7 @@
     <p:bg>
       <p:bgPr>
         <a:solidFill>
-          <a:srgbClr val="07090E"/>
+          <a:srgbClr val="090A0F"/>
         </a:solidFill>
       </p:bgPr>
     </p:bg>
@@ -4613,102 +5259,26 @@
       </p:grpSpPr>
       <p:sp>
         <p:nvSpPr>
-          <p:cNvPr id="2" name="Text 0"/>
-          <p:cNvSpPr/>
-          <p:nvPr/>
-        </p:nvSpPr>
-        <p:spPr>
-          <a:xfrm>
-            <a:off x="731520" y="411480"/>
-            <a:ext cx="9144000" cy="228600"/>
-          </a:xfrm>
-          <a:prstGeom prst="rect">
-            <a:avLst/>
-          </a:prstGeom>
-          <a:noFill/>
-          <a:ln/>
-        </p:spPr>
-        <p:txBody>
-          <a:bodyPr wrap="square" rtlCol="0" anchor="ctr"/>
-          <a:lstStyle/>
-          <a:p>
-            <a:pPr indent="0" marL="0">
-              <a:buNone/>
-            </a:pPr>
-            <a:r>
-              <a:rPr lang="en-US" sz="1000" b="1" dirty="0">
-                <a:solidFill>
-                  <a:srgbClr val="2DD4BF"/>
-                </a:solidFill>
-                <a:latin typeface="Segoe UI" pitchFamily="34" charset="0"/>
-                <a:ea typeface="Segoe UI" pitchFamily="34" charset="-122"/>
-                <a:cs typeface="Segoe UI" pitchFamily="34" charset="-120"/>
-              </a:rPr>
-              <a:t>CONCLUSION</a:t>
-            </a:r>
-            <a:endParaRPr lang="en-US" sz="1000" dirty="0"/>
-          </a:p>
-        </p:txBody>
-      </p:sp>
-      <p:sp>
-        <p:nvSpPr>
-          <p:cNvPr id="3" name="Text 1"/>
-          <p:cNvSpPr/>
-          <p:nvPr/>
-        </p:nvSpPr>
-        <p:spPr>
-          <a:xfrm>
-            <a:off x="731520" y="685800"/>
-            <a:ext cx="10515600" cy="502920"/>
-          </a:xfrm>
-          <a:prstGeom prst="rect">
-            <a:avLst/>
-          </a:prstGeom>
-          <a:noFill/>
-          <a:ln/>
-        </p:spPr>
-        <p:txBody>
-          <a:bodyPr wrap="square" rtlCol="0" anchor="ctr"/>
-          <a:lstStyle/>
-          <a:p>
-            <a:pPr indent="0" marL="0">
-              <a:buNone/>
-            </a:pPr>
-            <a:r>
-              <a:rPr lang="en-US" sz="2100" b="1" dirty="0">
-                <a:solidFill>
-                  <a:srgbClr val="FFFFFF"/>
-                </a:solidFill>
-                <a:latin typeface="Segoe UI" pitchFamily="34" charset="0"/>
-                <a:ea typeface="Segoe UI" pitchFamily="34" charset="-122"/>
-                <a:cs typeface="Segoe UI" pitchFamily="34" charset="-120"/>
-              </a:rPr>
-              <a:t>Key Scientific Insights &amp; Takeaways</a:t>
-            </a:r>
-            <a:endParaRPr lang="en-US" sz="2100" dirty="0"/>
-          </a:p>
-        </p:txBody>
-      </p:sp>
-      <p:sp>
-        <p:nvSpPr>
-          <p:cNvPr id="4" name="Shape 2"/>
-          <p:cNvSpPr/>
-          <p:nvPr/>
-        </p:nvSpPr>
-        <p:spPr>
-          <a:xfrm>
-            <a:off x="731520" y="1234440"/>
-            <a:ext cx="1828800" cy="36576"/>
-          </a:xfrm>
-          <a:prstGeom prst="rect">
-            <a:avLst/>
+          <p:cNvPr id="2" name="Shape 0"/>
+          <p:cNvSpPr/>
+          <p:nvPr/>
+        </p:nvSpPr>
+        <p:spPr>
+          <a:xfrm>
+            <a:off x="731520" y="365760"/>
+            <a:ext cx="2926080" cy="256032"/>
+          </a:xfrm>
+          <a:prstGeom prst="roundRect">
+            <a:avLst>
+              <a:gd name="adj" fmla="val 50000"/>
+            </a:avLst>
           </a:prstGeom>
           <a:solidFill>
-            <a:srgbClr val="2DD4BF"/>
+            <a:srgbClr val="162235"/>
           </a:solidFill>
           <a:ln w="12700">
             <a:solidFill>
-              <a:srgbClr val="2DD4BF"/>
+              <a:srgbClr val="06B6D4"/>
             </a:solidFill>
             <a:prstDash val="solid"/>
           </a:ln>
@@ -4716,7 +5286,135 @@
       </p:sp>
       <p:sp>
         <p:nvSpPr>
+          <p:cNvPr id="3" name="Text 1"/>
+          <p:cNvSpPr/>
+          <p:nvPr/>
+        </p:nvSpPr>
+        <p:spPr>
+          <a:xfrm>
+            <a:off x="731520" y="384048"/>
+            <a:ext cx="2926080" cy="219456"/>
+          </a:xfrm>
+          <a:prstGeom prst="rect">
+            <a:avLst/>
+          </a:prstGeom>
+          <a:noFill/>
+          <a:ln/>
+        </p:spPr>
+        <p:txBody>
+          <a:bodyPr wrap="square" rtlCol="0" anchor="ctr"/>
+          <a:lstStyle/>
+          <a:p>
+            <a:pPr algn="ctr" indent="0" marL="0">
+              <a:buNone/>
+            </a:pPr>
+            <a:r>
+              <a:rPr lang="en-US" sz="950" b="1" dirty="0">
+                <a:solidFill>
+                  <a:srgbClr val="22D3EE"/>
+                </a:solidFill>
+                <a:latin typeface="Segoe UI" pitchFamily="34" charset="0"/>
+                <a:ea typeface="Segoe UI" pitchFamily="34" charset="-122"/>
+                <a:cs typeface="Segoe UI" pitchFamily="34" charset="-120"/>
+              </a:rPr>
+              <a:t>CONCLUSION</a:t>
+            </a:r>
+            <a:endParaRPr lang="en-US" sz="950" dirty="0"/>
+          </a:p>
+        </p:txBody>
+      </p:sp>
+      <p:sp>
+        <p:nvSpPr>
+          <p:cNvPr id="4" name="Text 2"/>
+          <p:cNvSpPr/>
+          <p:nvPr/>
+        </p:nvSpPr>
+        <p:spPr>
+          <a:xfrm>
+            <a:off x="731520" y="713232"/>
+            <a:ext cx="10515600" cy="502920"/>
+          </a:xfrm>
+          <a:prstGeom prst="rect">
+            <a:avLst/>
+          </a:prstGeom>
+          <a:noFill/>
+          <a:ln/>
+        </p:spPr>
+        <p:txBody>
+          <a:bodyPr wrap="square" rtlCol="0" anchor="ctr"/>
+          <a:lstStyle/>
+          <a:p>
+            <a:pPr indent="0" marL="0">
+              <a:buNone/>
+            </a:pPr>
+            <a:r>
+              <a:rPr lang="en-US" sz="2200" b="1" dirty="0">
+                <a:solidFill>
+                  <a:srgbClr val="FFFFFF"/>
+                </a:solidFill>
+                <a:latin typeface="Segoe UI" pitchFamily="34" charset="0"/>
+                <a:ea typeface="Segoe UI" pitchFamily="34" charset="-122"/>
+                <a:cs typeface="Segoe UI" pitchFamily="34" charset="-120"/>
+              </a:rPr>
+              <a:t>Key Scientific Insights &amp; Takeaways</a:t>
+            </a:r>
+            <a:endParaRPr lang="en-US" sz="2200" dirty="0"/>
+          </a:p>
+        </p:txBody>
+      </p:sp>
+      <p:sp>
+        <p:nvSpPr>
           <p:cNvPr id="5" name="Shape 3"/>
+          <p:cNvSpPr/>
+          <p:nvPr/>
+        </p:nvSpPr>
+        <p:spPr>
+          <a:xfrm>
+            <a:off x="731520" y="1261872"/>
+            <a:ext cx="1645920" cy="36576"/>
+          </a:xfrm>
+          <a:prstGeom prst="rect">
+            <a:avLst/>
+          </a:prstGeom>
+          <a:solidFill>
+            <a:srgbClr val="06B6D4"/>
+          </a:solidFill>
+          <a:ln w="12700">
+            <a:solidFill>
+              <a:srgbClr val="06B6D4"/>
+            </a:solidFill>
+            <a:prstDash val="solid"/>
+          </a:ln>
+        </p:spPr>
+      </p:sp>
+      <p:sp>
+        <p:nvSpPr>
+          <p:cNvPr id="6" name="Shape 4"/>
+          <p:cNvSpPr/>
+          <p:nvPr/>
+        </p:nvSpPr>
+        <p:spPr>
+          <a:xfrm>
+            <a:off x="2377440" y="1261872"/>
+            <a:ext cx="1097280" cy="36576"/>
+          </a:xfrm>
+          <a:prstGeom prst="rect">
+            <a:avLst/>
+          </a:prstGeom>
+          <a:solidFill>
+            <a:srgbClr val="2563EB"/>
+          </a:solidFill>
+          <a:ln w="12700">
+            <a:solidFill>
+              <a:srgbClr val="2563EB"/>
+            </a:solidFill>
+            <a:prstDash val="solid"/>
+          </a:ln>
+        </p:spPr>
+      </p:sp>
+      <p:sp>
+        <p:nvSpPr>
+          <p:cNvPr id="7" name="Shape 5"/>
           <p:cNvSpPr/>
           <p:nvPr/>
         </p:nvSpPr>
@@ -4726,10 +5424,12 @@
             <a:ext cx="10698480" cy="804672"/>
           </a:xfrm>
           <a:prstGeom prst="roundRect">
-            <a:avLst/>
+            <a:avLst>
+              <a:gd name="adj" fmla="val 13636"/>
+            </a:avLst>
           </a:prstGeom>
           <a:solidFill>
-            <a:srgbClr val="10151F"/>
+            <a:srgbClr val="121726"/>
           </a:solidFill>
           <a:ln w="12700">
             <a:solidFill>
@@ -4741,7 +5441,7 @@
       </p:sp>
       <p:sp>
         <p:nvSpPr>
-          <p:cNvPr id="6" name="Text 4"/>
+          <p:cNvPr id="8" name="Text 6"/>
           <p:cNvSpPr/>
           <p:nvPr/>
         </p:nvSpPr>
@@ -4766,7 +5466,7 @@
             <a:r>
               <a:rPr lang="en-US" sz="1800" b="1" dirty="0">
                 <a:solidFill>
-                  <a:srgbClr val="2DD4BF"/>
+                  <a:srgbClr val="22D3EE"/>
                 </a:solidFill>
                 <a:latin typeface="Segoe UI" pitchFamily="34" charset="0"/>
                 <a:ea typeface="Segoe UI" pitchFamily="34" charset="-122"/>
@@ -4780,7 +5480,7 @@
       </p:sp>
       <p:sp>
         <p:nvSpPr>
-          <p:cNvPr id="7" name="Text 5"/>
+          <p:cNvPr id="9" name="Text 7"/>
           <p:cNvSpPr/>
           <p:nvPr/>
         </p:nvSpPr>
@@ -4819,7 +5519,7 @@
       </p:sp>
       <p:sp>
         <p:nvSpPr>
-          <p:cNvPr id="8" name="Text 6"/>
+          <p:cNvPr id="10" name="Text 8"/>
           <p:cNvSpPr/>
           <p:nvPr/>
         </p:nvSpPr>
@@ -4844,7 +5544,7 @@
             <a:r>
               <a:rPr lang="en-US" sz="1150" dirty="0">
                 <a:solidFill>
-                  <a:srgbClr val="CBD5E1"/>
+                  <a:srgbClr val="E2E8F0"/>
                 </a:solidFill>
                 <a:latin typeface="Segoe UI" pitchFamily="34" charset="0"/>
                 <a:ea typeface="Segoe UI" pitchFamily="34" charset="-122"/>
@@ -4858,7 +5558,7 @@
       </p:sp>
       <p:sp>
         <p:nvSpPr>
-          <p:cNvPr id="9" name="Shape 7"/>
+          <p:cNvPr id="11" name="Shape 9"/>
           <p:cNvSpPr/>
           <p:nvPr/>
         </p:nvSpPr>
@@ -4868,10 +5568,12 @@
             <a:ext cx="10698480" cy="804672"/>
           </a:xfrm>
           <a:prstGeom prst="roundRect">
-            <a:avLst/>
+            <a:avLst>
+              <a:gd name="adj" fmla="val 13636"/>
+            </a:avLst>
           </a:prstGeom>
           <a:solidFill>
-            <a:srgbClr val="10151F"/>
+            <a:srgbClr val="121726"/>
           </a:solidFill>
           <a:ln w="12700">
             <a:solidFill>
@@ -4883,7 +5585,7 @@
       </p:sp>
       <p:sp>
         <p:nvSpPr>
-          <p:cNvPr id="10" name="Text 8"/>
+          <p:cNvPr id="12" name="Text 10"/>
           <p:cNvSpPr/>
           <p:nvPr/>
         </p:nvSpPr>
@@ -4908,7 +5610,7 @@
             <a:r>
               <a:rPr lang="en-US" sz="1800" b="1" dirty="0">
                 <a:solidFill>
-                  <a:srgbClr val="2DD4BF"/>
+                  <a:srgbClr val="22D3EE"/>
                 </a:solidFill>
                 <a:latin typeface="Segoe UI" pitchFamily="34" charset="0"/>
                 <a:ea typeface="Segoe UI" pitchFamily="34" charset="-122"/>
@@ -4922,7 +5624,7 @@
       </p:sp>
       <p:sp>
         <p:nvSpPr>
-          <p:cNvPr id="11" name="Text 9"/>
+          <p:cNvPr id="13" name="Text 11"/>
           <p:cNvSpPr/>
           <p:nvPr/>
         </p:nvSpPr>
@@ -4961,7 +5663,7 @@
       </p:sp>
       <p:sp>
         <p:nvSpPr>
-          <p:cNvPr id="12" name="Text 10"/>
+          <p:cNvPr id="14" name="Text 12"/>
           <p:cNvSpPr/>
           <p:nvPr/>
         </p:nvSpPr>
@@ -4986,7 +5688,7 @@
             <a:r>
               <a:rPr lang="en-US" sz="1150" dirty="0">
                 <a:solidFill>
-                  <a:srgbClr val="CBD5E1"/>
+                  <a:srgbClr val="E2E8F0"/>
                 </a:solidFill>
                 <a:latin typeface="Segoe UI" pitchFamily="34" charset="0"/>
                 <a:ea typeface="Segoe UI" pitchFamily="34" charset="-122"/>
@@ -5000,7 +5702,7 @@
       </p:sp>
       <p:sp>
         <p:nvSpPr>
-          <p:cNvPr id="13" name="Shape 11"/>
+          <p:cNvPr id="15" name="Shape 13"/>
           <p:cNvSpPr/>
           <p:nvPr/>
         </p:nvSpPr>
@@ -5010,10 +5712,12 @@
             <a:ext cx="10698480" cy="804672"/>
           </a:xfrm>
           <a:prstGeom prst="roundRect">
-            <a:avLst/>
+            <a:avLst>
+              <a:gd name="adj" fmla="val 13636"/>
+            </a:avLst>
           </a:prstGeom>
           <a:solidFill>
-            <a:srgbClr val="10151F"/>
+            <a:srgbClr val="121726"/>
           </a:solidFill>
           <a:ln w="12700">
             <a:solidFill>
@@ -5025,7 +5729,7 @@
       </p:sp>
       <p:sp>
         <p:nvSpPr>
-          <p:cNvPr id="14" name="Text 12"/>
+          <p:cNvPr id="16" name="Text 14"/>
           <p:cNvSpPr/>
           <p:nvPr/>
         </p:nvSpPr>
@@ -5050,7 +5754,7 @@
             <a:r>
               <a:rPr lang="en-US" sz="1800" b="1" dirty="0">
                 <a:solidFill>
-                  <a:srgbClr val="2DD4BF"/>
+                  <a:srgbClr val="22D3EE"/>
                 </a:solidFill>
                 <a:latin typeface="Segoe UI" pitchFamily="34" charset="0"/>
                 <a:ea typeface="Segoe UI" pitchFamily="34" charset="-122"/>
@@ -5064,7 +5768,7 @@
       </p:sp>
       <p:sp>
         <p:nvSpPr>
-          <p:cNvPr id="15" name="Text 13"/>
+          <p:cNvPr id="17" name="Text 15"/>
           <p:cNvSpPr/>
           <p:nvPr/>
         </p:nvSpPr>
@@ -5103,7 +5807,7 @@
       </p:sp>
       <p:sp>
         <p:nvSpPr>
-          <p:cNvPr id="16" name="Text 14"/>
+          <p:cNvPr id="18" name="Text 16"/>
           <p:cNvSpPr/>
           <p:nvPr/>
         </p:nvSpPr>
@@ -5128,7 +5832,7 @@
             <a:r>
               <a:rPr lang="en-US" sz="1150" dirty="0">
                 <a:solidFill>
-                  <a:srgbClr val="CBD5E1"/>
+                  <a:srgbClr val="E2E8F0"/>
                 </a:solidFill>
                 <a:latin typeface="Segoe UI" pitchFamily="34" charset="0"/>
                 <a:ea typeface="Segoe UI" pitchFamily="34" charset="-122"/>
@@ -5142,7 +5846,7 @@
       </p:sp>
       <p:sp>
         <p:nvSpPr>
-          <p:cNvPr id="17" name="Shape 15"/>
+          <p:cNvPr id="19" name="Shape 17"/>
           <p:cNvSpPr/>
           <p:nvPr/>
         </p:nvSpPr>
@@ -5152,10 +5856,12 @@
             <a:ext cx="10698480" cy="804672"/>
           </a:xfrm>
           <a:prstGeom prst="roundRect">
-            <a:avLst/>
+            <a:avLst>
+              <a:gd name="adj" fmla="val 13636"/>
+            </a:avLst>
           </a:prstGeom>
           <a:solidFill>
-            <a:srgbClr val="10151F"/>
+            <a:srgbClr val="121726"/>
           </a:solidFill>
           <a:ln w="12700">
             <a:solidFill>
@@ -5167,7 +5873,7 @@
       </p:sp>
       <p:sp>
         <p:nvSpPr>
-          <p:cNvPr id="18" name="Text 16"/>
+          <p:cNvPr id="20" name="Text 18"/>
           <p:cNvSpPr/>
           <p:nvPr/>
         </p:nvSpPr>
@@ -5192,7 +5898,7 @@
             <a:r>
               <a:rPr lang="en-US" sz="1800" b="1" dirty="0">
                 <a:solidFill>
-                  <a:srgbClr val="2DD4BF"/>
+                  <a:srgbClr val="22D3EE"/>
                 </a:solidFill>
                 <a:latin typeface="Segoe UI" pitchFamily="34" charset="0"/>
                 <a:ea typeface="Segoe UI" pitchFamily="34" charset="-122"/>
@@ -5206,7 +5912,7 @@
       </p:sp>
       <p:sp>
         <p:nvSpPr>
-          <p:cNvPr id="19" name="Text 17"/>
+          <p:cNvPr id="21" name="Text 19"/>
           <p:cNvSpPr/>
           <p:nvPr/>
         </p:nvSpPr>
@@ -5245,7 +5951,7 @@
       </p:sp>
       <p:sp>
         <p:nvSpPr>
-          <p:cNvPr id="20" name="Text 18"/>
+          <p:cNvPr id="22" name="Text 20"/>
           <p:cNvSpPr/>
           <p:nvPr/>
         </p:nvSpPr>
@@ -5270,7 +5976,7 @@
             <a:r>
               <a:rPr lang="en-US" sz="1150" dirty="0">
                 <a:solidFill>
-                  <a:srgbClr val="CBD5E1"/>
+                  <a:srgbClr val="E2E8F0"/>
                 </a:solidFill>
                 <a:latin typeface="Segoe UI" pitchFamily="34" charset="0"/>
                 <a:ea typeface="Segoe UI" pitchFamily="34" charset="-122"/>
@@ -5284,7 +5990,7 @@
       </p:sp>
       <p:sp>
         <p:nvSpPr>
-          <p:cNvPr id="21" name="Shape 19"/>
+          <p:cNvPr id="23" name="Shape 21"/>
           <p:cNvSpPr/>
           <p:nvPr/>
         </p:nvSpPr>
@@ -5294,10 +6000,12 @@
             <a:ext cx="10698480" cy="804672"/>
           </a:xfrm>
           <a:prstGeom prst="roundRect">
-            <a:avLst/>
+            <a:avLst>
+              <a:gd name="adj" fmla="val 13636"/>
+            </a:avLst>
           </a:prstGeom>
           <a:solidFill>
-            <a:srgbClr val="10151F"/>
+            <a:srgbClr val="121726"/>
           </a:solidFill>
           <a:ln w="12700">
             <a:solidFill>
@@ -5309,7 +6017,7 @@
       </p:sp>
       <p:sp>
         <p:nvSpPr>
-          <p:cNvPr id="22" name="Text 20"/>
+          <p:cNvPr id="24" name="Text 22"/>
           <p:cNvSpPr/>
           <p:nvPr/>
         </p:nvSpPr>
@@ -5334,7 +6042,7 @@
             <a:r>
               <a:rPr lang="en-US" sz="1800" b="1" dirty="0">
                 <a:solidFill>
-                  <a:srgbClr val="2DD4BF"/>
+                  <a:srgbClr val="22D3EE"/>
                 </a:solidFill>
                 <a:latin typeface="Segoe UI" pitchFamily="34" charset="0"/>
                 <a:ea typeface="Segoe UI" pitchFamily="34" charset="-122"/>
@@ -5348,7 +6056,7 @@
       </p:sp>
       <p:sp>
         <p:nvSpPr>
-          <p:cNvPr id="23" name="Text 21"/>
+          <p:cNvPr id="25" name="Text 23"/>
           <p:cNvSpPr/>
           <p:nvPr/>
         </p:nvSpPr>
@@ -5387,7 +6095,7 @@
       </p:sp>
       <p:sp>
         <p:nvSpPr>
-          <p:cNvPr id="24" name="Text 22"/>
+          <p:cNvPr id="26" name="Text 24"/>
           <p:cNvSpPr/>
           <p:nvPr/>
         </p:nvSpPr>
@@ -5412,7 +6120,7 @@
             <a:r>
               <a:rPr lang="en-US" sz="1150" dirty="0">
                 <a:solidFill>
-                  <a:srgbClr val="CBD5E1"/>
+                  <a:srgbClr val="E2E8F0"/>
                 </a:solidFill>
                 <a:latin typeface="Segoe UI" pitchFamily="34" charset="0"/>
                 <a:ea typeface="Segoe UI" pitchFamily="34" charset="-122"/>
@@ -5438,7 +6146,7 @@
     <p:bg>
       <p:bgPr>
         <a:solidFill>
-          <a:srgbClr val="07090E"/>
+          <a:srgbClr val="090A0F"/>
         </a:solidFill>
       </p:bgPr>
     </p:bg>
@@ -5465,7 +6173,7 @@
         <p:spPr>
           <a:xfrm>
             <a:off x="731520" y="1645920"/>
-            <a:ext cx="10515600" cy="1097280"/>
+            <a:ext cx="10515600" cy="914400"/>
           </a:xfrm>
           <a:prstGeom prst="rect">
             <a:avLst/>
@@ -5481,17 +6189,17 @@
               <a:buNone/>
             </a:pPr>
             <a:r>
-              <a:rPr lang="en-US" sz="5400" i="1" dirty="0">
+              <a:rPr lang="en-US" sz="5200" b="1" dirty="0">
                 <a:solidFill>
                   <a:srgbClr val="FFFFFF"/>
                 </a:solidFill>
-                <a:latin typeface="Georgia" pitchFamily="34" charset="0"/>
-                <a:ea typeface="Georgia" pitchFamily="34" charset="-122"/>
-                <a:cs typeface="Georgia" pitchFamily="34" charset="-120"/>
-              </a:rPr>
-              <a:t>Healthcare, together.</a:t>
-            </a:r>
-            <a:endParaRPr lang="en-US" sz="5400" dirty="0"/>
+                <a:latin typeface="Segoe UI" pitchFamily="34" charset="0"/>
+                <a:ea typeface="Segoe UI" pitchFamily="34" charset="-122"/>
+                <a:cs typeface="Segoe UI" pitchFamily="34" charset="-120"/>
+              </a:rPr>
+              <a:t>Thank You</a:t>
+            </a:r>
+            <a:endParaRPr lang="en-US" sz="5200" dirty="0"/>
           </a:p>
         </p:txBody>
       </p:sp>
@@ -5503,8 +6211,8 @@
         </p:nvSpPr>
         <p:spPr>
           <a:xfrm>
-            <a:off x="1828800" y="3200400"/>
-            <a:ext cx="8503920" cy="0"/>
+            <a:off x="2011680" y="3108960"/>
+            <a:ext cx="2926080" cy="0"/>
           </a:xfrm>
           <a:prstGeom prst="line">
             <a:avLst/>
@@ -5512,7 +6220,7 @@
           <a:noFill/>
           <a:ln w="31750">
             <a:solidFill>
-              <a:srgbClr val="2DD4BF"/>
+              <a:srgbClr val="06B6D4"/>
             </a:solidFill>
             <a:prstDash val="solid"/>
           </a:ln>
@@ -5520,14 +6228,106 @@
       </p:sp>
       <p:sp>
         <p:nvSpPr>
-          <p:cNvPr id="4" name="Text 2"/>
-          <p:cNvSpPr/>
-          <p:nvPr/>
-        </p:nvSpPr>
-        <p:spPr>
-          <a:xfrm>
-            <a:off x="731520" y="4023360"/>
-            <a:ext cx="10515600" cy="457200"/>
+          <p:cNvPr id="4" name="Shape 2"/>
+          <p:cNvSpPr/>
+          <p:nvPr/>
+        </p:nvSpPr>
+        <p:spPr>
+          <a:xfrm>
+            <a:off x="4937760" y="3108960"/>
+            <a:ext cx="320040" cy="-822960"/>
+          </a:xfrm>
+          <a:prstGeom prst="line">
+            <a:avLst/>
+          </a:prstGeom>
+          <a:noFill/>
+          <a:ln w="38100">
+            <a:solidFill>
+              <a:srgbClr val="38BDF8"/>
+            </a:solidFill>
+            <a:prstDash val="solid"/>
+          </a:ln>
+        </p:spPr>
+      </p:sp>
+      <p:sp>
+        <p:nvSpPr>
+          <p:cNvPr id="5" name="Shape 3"/>
+          <p:cNvSpPr/>
+          <p:nvPr/>
+        </p:nvSpPr>
+        <p:spPr>
+          <a:xfrm>
+            <a:off x="5257800" y="2286000"/>
+            <a:ext cx="411480" cy="1371600"/>
+          </a:xfrm>
+          <a:prstGeom prst="line">
+            <a:avLst/>
+          </a:prstGeom>
+          <a:noFill/>
+          <a:ln w="38100">
+            <a:solidFill>
+              <a:srgbClr val="22D3EE"/>
+            </a:solidFill>
+            <a:prstDash val="solid"/>
+          </a:ln>
+        </p:spPr>
+      </p:sp>
+      <p:sp>
+        <p:nvSpPr>
+          <p:cNvPr id="6" name="Shape 4"/>
+          <p:cNvSpPr/>
+          <p:nvPr/>
+        </p:nvSpPr>
+        <p:spPr>
+          <a:xfrm>
+            <a:off x="5669280" y="3657600"/>
+            <a:ext cx="320040" cy="-548640"/>
+          </a:xfrm>
+          <a:prstGeom prst="line">
+            <a:avLst/>
+          </a:prstGeom>
+          <a:noFill/>
+          <a:ln w="38100">
+            <a:solidFill>
+              <a:srgbClr val="38BDF8"/>
+            </a:solidFill>
+            <a:prstDash val="solid"/>
+          </a:ln>
+        </p:spPr>
+      </p:sp>
+      <p:sp>
+        <p:nvSpPr>
+          <p:cNvPr id="7" name="Shape 5"/>
+          <p:cNvSpPr/>
+          <p:nvPr/>
+        </p:nvSpPr>
+        <p:spPr>
+          <a:xfrm>
+            <a:off x="5989320" y="3108960"/>
+            <a:ext cx="4114800" cy="0"/>
+          </a:xfrm>
+          <a:prstGeom prst="line">
+            <a:avLst/>
+          </a:prstGeom>
+          <a:noFill/>
+          <a:ln w="31750">
+            <a:solidFill>
+              <a:srgbClr val="06B6D4"/>
+            </a:solidFill>
+            <a:prstDash val="solid"/>
+          </a:ln>
+        </p:spPr>
+      </p:sp>
+      <p:sp>
+        <p:nvSpPr>
+          <p:cNvPr id="8" name="Text 6"/>
+          <p:cNvSpPr/>
+          <p:nvPr/>
+        </p:nvSpPr>
+        <p:spPr>
+          <a:xfrm>
+            <a:off x="731520" y="4114800"/>
+            <a:ext cx="10515600" cy="411480"/>
           </a:xfrm>
           <a:prstGeom prst="rect">
             <a:avLst/>
@@ -5543,30 +6343,30 @@
               <a:buNone/>
             </a:pPr>
             <a:r>
-              <a:rPr lang="en-US" sz="2200" b="1" dirty="0">
-                <a:solidFill>
-                  <a:srgbClr val="FFFFFF"/>
-                </a:solidFill>
-                <a:latin typeface="Segoe UI" pitchFamily="34" charset="0"/>
-                <a:ea typeface="Segoe UI" pitchFamily="34" charset="-122"/>
-                <a:cs typeface="Segoe UI" pitchFamily="34" charset="-120"/>
-              </a:rPr>
-              <a:t>Thank You</a:t>
-            </a:r>
-            <a:endParaRPr lang="en-US" sz="2200" dirty="0"/>
-          </a:p>
-        </p:txBody>
-      </p:sp>
-      <p:sp>
-        <p:nvSpPr>
-          <p:cNvPr id="5" name="Text 3"/>
-          <p:cNvSpPr/>
-          <p:nvPr/>
-        </p:nvSpPr>
-        <p:spPr>
-          <a:xfrm>
-            <a:off x="731520" y="4572000"/>
-            <a:ext cx="10515600" cy="365760"/>
+              <a:rPr lang="en-US" sz="1800" b="1" dirty="0">
+                <a:solidFill>
+                  <a:srgbClr val="38BDF8"/>
+                </a:solidFill>
+                <a:latin typeface="Segoe UI" pitchFamily="34" charset="0"/>
+                <a:ea typeface="Segoe UI" pitchFamily="34" charset="-122"/>
+                <a:cs typeface="Segoe UI" pitchFamily="34" charset="-120"/>
+              </a:rPr>
+              <a:t>Questions &amp; Open Discussion</a:t>
+            </a:r>
+            <a:endParaRPr lang="en-US" sz="1800" dirty="0"/>
+          </a:p>
+        </p:txBody>
+      </p:sp>
+      <p:sp>
+        <p:nvSpPr>
+          <p:cNvPr id="9" name="Text 7"/>
+          <p:cNvSpPr/>
+          <p:nvPr/>
+        </p:nvSpPr>
+        <p:spPr>
+          <a:xfrm>
+            <a:off x="731520" y="4617720"/>
+            <a:ext cx="10515600" cy="320040"/>
           </a:xfrm>
           <a:prstGeom prst="rect">
             <a:avLst/>
@@ -5590,7 +6390,7 @@
                 <a:ea typeface="Segoe UI" pitchFamily="34" charset="-122"/>
                 <a:cs typeface="Segoe UI" pitchFamily="34" charset="-120"/>
               </a:rPr>
-              <a:t>Questions &amp; Open Discussion · NeuroADHD Benchmark Study</a:t>
+              <a:t>NeuroADHD Multi-Center Clinical Benchmark Study</a:t>
             </a:r>
             <a:endParaRPr lang="en-US" sz="1300" dirty="0"/>
           </a:p>
@@ -5610,7 +6410,7 @@
     <p:bg>
       <p:bgPr>
         <a:solidFill>
-          <a:srgbClr val="07090E"/>
+          <a:srgbClr val="090A0F"/>
         </a:solidFill>
       </p:bgPr>
     </p:bg>
@@ -5630,102 +6430,26 @@
       </p:grpSpPr>
       <p:sp>
         <p:nvSpPr>
-          <p:cNvPr id="2" name="Text 0"/>
-          <p:cNvSpPr/>
-          <p:nvPr/>
-        </p:nvSpPr>
-        <p:spPr>
-          <a:xfrm>
-            <a:off x="731520" y="411480"/>
-            <a:ext cx="9144000" cy="228600"/>
-          </a:xfrm>
-          <a:prstGeom prst="rect">
-            <a:avLst/>
-          </a:prstGeom>
-          <a:noFill/>
-          <a:ln/>
-        </p:spPr>
-        <p:txBody>
-          <a:bodyPr wrap="square" rtlCol="0" anchor="ctr"/>
-          <a:lstStyle/>
-          <a:p>
-            <a:pPr indent="0" marL="0">
-              <a:buNone/>
-            </a:pPr>
-            <a:r>
-              <a:rPr lang="en-US" sz="1000" b="1" dirty="0">
-                <a:solidFill>
-                  <a:srgbClr val="2DD4BF"/>
-                </a:solidFill>
-                <a:latin typeface="Segoe UI" pitchFamily="34" charset="0"/>
-                <a:ea typeface="Segoe UI" pitchFamily="34" charset="-122"/>
-                <a:cs typeface="Segoe UI" pitchFamily="34" charset="-120"/>
-              </a:rPr>
-              <a:t>EXECUTIVE SUMMARY</a:t>
-            </a:r>
-            <a:endParaRPr lang="en-US" sz="1000" dirty="0"/>
-          </a:p>
-        </p:txBody>
-      </p:sp>
-      <p:sp>
-        <p:nvSpPr>
-          <p:cNvPr id="3" name="Text 1"/>
-          <p:cNvSpPr/>
-          <p:nvPr/>
-        </p:nvSpPr>
-        <p:spPr>
-          <a:xfrm>
-            <a:off x="731520" y="685800"/>
-            <a:ext cx="10515600" cy="502920"/>
-          </a:xfrm>
-          <a:prstGeom prst="rect">
-            <a:avLst/>
-          </a:prstGeom>
-          <a:noFill/>
-          <a:ln/>
-        </p:spPr>
-        <p:txBody>
-          <a:bodyPr wrap="square" rtlCol="0" anchor="ctr"/>
-          <a:lstStyle/>
-          <a:p>
-            <a:pPr indent="0" marL="0">
-              <a:buNone/>
-            </a:pPr>
-            <a:r>
-              <a:rPr lang="en-US" sz="2100" b="1" dirty="0">
-                <a:solidFill>
-                  <a:srgbClr val="FFFFFF"/>
-                </a:solidFill>
-                <a:latin typeface="Segoe UI" pitchFamily="34" charset="0"/>
-                <a:ea typeface="Segoe UI" pitchFamily="34" charset="-122"/>
-                <a:cs typeface="Segoe UI" pitchFamily="34" charset="-120"/>
-              </a:rPr>
-              <a:t>Key Benchmark Results at a Glance</a:t>
-            </a:r>
-            <a:endParaRPr lang="en-US" sz="2100" dirty="0"/>
-          </a:p>
-        </p:txBody>
-      </p:sp>
-      <p:sp>
-        <p:nvSpPr>
-          <p:cNvPr id="4" name="Shape 2"/>
-          <p:cNvSpPr/>
-          <p:nvPr/>
-        </p:nvSpPr>
-        <p:spPr>
-          <a:xfrm>
-            <a:off x="731520" y="1234440"/>
-            <a:ext cx="1828800" cy="36576"/>
-          </a:xfrm>
-          <a:prstGeom prst="rect">
-            <a:avLst/>
+          <p:cNvPr id="2" name="Shape 0"/>
+          <p:cNvSpPr/>
+          <p:nvPr/>
+        </p:nvSpPr>
+        <p:spPr>
+          <a:xfrm>
+            <a:off x="731520" y="365760"/>
+            <a:ext cx="2926080" cy="256032"/>
+          </a:xfrm>
+          <a:prstGeom prst="roundRect">
+            <a:avLst>
+              <a:gd name="adj" fmla="val 50000"/>
+            </a:avLst>
           </a:prstGeom>
           <a:solidFill>
-            <a:srgbClr val="2DD4BF"/>
+            <a:srgbClr val="162235"/>
           </a:solidFill>
           <a:ln w="12700">
             <a:solidFill>
-              <a:srgbClr val="2DD4BF"/>
+              <a:srgbClr val="06B6D4"/>
             </a:solidFill>
             <a:prstDash val="solid"/>
           </a:ln>
@@ -5733,7 +6457,135 @@
       </p:sp>
       <p:sp>
         <p:nvSpPr>
+          <p:cNvPr id="3" name="Text 1"/>
+          <p:cNvSpPr/>
+          <p:nvPr/>
+        </p:nvSpPr>
+        <p:spPr>
+          <a:xfrm>
+            <a:off x="731520" y="384048"/>
+            <a:ext cx="2926080" cy="219456"/>
+          </a:xfrm>
+          <a:prstGeom prst="rect">
+            <a:avLst/>
+          </a:prstGeom>
+          <a:noFill/>
+          <a:ln/>
+        </p:spPr>
+        <p:txBody>
+          <a:bodyPr wrap="square" rtlCol="0" anchor="ctr"/>
+          <a:lstStyle/>
+          <a:p>
+            <a:pPr algn="ctr" indent="0" marL="0">
+              <a:buNone/>
+            </a:pPr>
+            <a:r>
+              <a:rPr lang="en-US" sz="950" b="1" dirty="0">
+                <a:solidFill>
+                  <a:srgbClr val="22D3EE"/>
+                </a:solidFill>
+                <a:latin typeface="Segoe UI" pitchFamily="34" charset="0"/>
+                <a:ea typeface="Segoe UI" pitchFamily="34" charset="-122"/>
+                <a:cs typeface="Segoe UI" pitchFamily="34" charset="-120"/>
+              </a:rPr>
+              <a:t>EXECUTIVE SUMMARY</a:t>
+            </a:r>
+            <a:endParaRPr lang="en-US" sz="950" dirty="0"/>
+          </a:p>
+        </p:txBody>
+      </p:sp>
+      <p:sp>
+        <p:nvSpPr>
+          <p:cNvPr id="4" name="Text 2"/>
+          <p:cNvSpPr/>
+          <p:nvPr/>
+        </p:nvSpPr>
+        <p:spPr>
+          <a:xfrm>
+            <a:off x="731520" y="713232"/>
+            <a:ext cx="10515600" cy="502920"/>
+          </a:xfrm>
+          <a:prstGeom prst="rect">
+            <a:avLst/>
+          </a:prstGeom>
+          <a:noFill/>
+          <a:ln/>
+        </p:spPr>
+        <p:txBody>
+          <a:bodyPr wrap="square" rtlCol="0" anchor="ctr"/>
+          <a:lstStyle/>
+          <a:p>
+            <a:pPr indent="0" marL="0">
+              <a:buNone/>
+            </a:pPr>
+            <a:r>
+              <a:rPr lang="en-US" sz="2200" b="1" dirty="0">
+                <a:solidFill>
+                  <a:srgbClr val="FFFFFF"/>
+                </a:solidFill>
+                <a:latin typeface="Segoe UI" pitchFamily="34" charset="0"/>
+                <a:ea typeface="Segoe UI" pitchFamily="34" charset="-122"/>
+                <a:cs typeface="Segoe UI" pitchFamily="34" charset="-120"/>
+              </a:rPr>
+              <a:t>Key Benchmark Results at a Glance</a:t>
+            </a:r>
+            <a:endParaRPr lang="en-US" sz="2200" dirty="0"/>
+          </a:p>
+        </p:txBody>
+      </p:sp>
+      <p:sp>
+        <p:nvSpPr>
           <p:cNvPr id="5" name="Shape 3"/>
+          <p:cNvSpPr/>
+          <p:nvPr/>
+        </p:nvSpPr>
+        <p:spPr>
+          <a:xfrm>
+            <a:off x="731520" y="1261872"/>
+            <a:ext cx="1645920" cy="36576"/>
+          </a:xfrm>
+          <a:prstGeom prst="rect">
+            <a:avLst/>
+          </a:prstGeom>
+          <a:solidFill>
+            <a:srgbClr val="06B6D4"/>
+          </a:solidFill>
+          <a:ln w="12700">
+            <a:solidFill>
+              <a:srgbClr val="06B6D4"/>
+            </a:solidFill>
+            <a:prstDash val="solid"/>
+          </a:ln>
+        </p:spPr>
+      </p:sp>
+      <p:sp>
+        <p:nvSpPr>
+          <p:cNvPr id="6" name="Shape 4"/>
+          <p:cNvSpPr/>
+          <p:nvPr/>
+        </p:nvSpPr>
+        <p:spPr>
+          <a:xfrm>
+            <a:off x="2377440" y="1261872"/>
+            <a:ext cx="1097280" cy="36576"/>
+          </a:xfrm>
+          <a:prstGeom prst="rect">
+            <a:avLst/>
+          </a:prstGeom>
+          <a:solidFill>
+            <a:srgbClr val="2563EB"/>
+          </a:solidFill>
+          <a:ln w="12700">
+            <a:solidFill>
+              <a:srgbClr val="2563EB"/>
+            </a:solidFill>
+            <a:prstDash val="solid"/>
+          </a:ln>
+        </p:spPr>
+      </p:sp>
+      <p:sp>
+        <p:nvSpPr>
+          <p:cNvPr id="7" name="Shape 5"/>
           <p:cNvSpPr/>
           <p:nvPr/>
         </p:nvSpPr>
@@ -5743,10 +6595,12 @@
             <a:ext cx="3383280" cy="2011680"/>
           </a:xfrm>
           <a:prstGeom prst="roundRect">
-            <a:avLst/>
+            <a:avLst>
+              <a:gd name="adj" fmla="val 6818"/>
+            </a:avLst>
           </a:prstGeom>
           <a:solidFill>
-            <a:srgbClr val="10151F"/>
+            <a:srgbClr val="121726"/>
           </a:solidFill>
           <a:ln w="12700">
             <a:solidFill>
@@ -5758,7 +6612,7 @@
       </p:sp>
       <p:sp>
         <p:nvSpPr>
-          <p:cNvPr id="6" name="Text 4"/>
+          <p:cNvPr id="8" name="Text 6"/>
           <p:cNvSpPr/>
           <p:nvPr/>
         </p:nvSpPr>
@@ -5781,7 +6635,7 @@
               <a:buNone/>
             </a:pPr>
             <a:r>
-              <a:rPr lang="en-US" sz="3600" b="1" dirty="0">
+              <a:rPr lang="en-US" sz="3800" b="1" dirty="0">
                 <a:solidFill>
                   <a:srgbClr val="FFFFFF"/>
                 </a:solidFill>
@@ -5791,13 +6645,13 @@
               </a:rPr>
               <a:t>935</a:t>
             </a:r>
-            <a:endParaRPr lang="en-US" sz="3600" dirty="0"/>
-          </a:p>
-        </p:txBody>
-      </p:sp>
-      <p:sp>
-        <p:nvSpPr>
-          <p:cNvPr id="7" name="Text 5"/>
+            <a:endParaRPr lang="en-US" sz="3800" dirty="0"/>
+          </a:p>
+        </p:txBody>
+      </p:sp>
+      <p:sp>
+        <p:nvSpPr>
+          <p:cNvPr id="9" name="Text 7"/>
           <p:cNvSpPr/>
           <p:nvPr/>
         </p:nvSpPr>
@@ -5836,7 +6690,7 @@
       </p:sp>
       <p:sp>
         <p:nvSpPr>
-          <p:cNvPr id="8" name="Text 6"/>
+          <p:cNvPr id="10" name="Text 8"/>
           <p:cNvSpPr/>
           <p:nvPr/>
         </p:nvSpPr>
@@ -5875,7 +6729,7 @@
       </p:sp>
       <p:sp>
         <p:nvSpPr>
-          <p:cNvPr id="9" name="Shape 7"/>
+          <p:cNvPr id="11" name="Shape 9"/>
           <p:cNvSpPr/>
           <p:nvPr/>
         </p:nvSpPr>
@@ -5885,10 +6739,588 @@
             <a:ext cx="3383280" cy="2011680"/>
           </a:xfrm>
           <a:prstGeom prst="roundRect">
-            <a:avLst/>
+            <a:avLst>
+              <a:gd name="adj" fmla="val 6818"/>
+            </a:avLst>
           </a:prstGeom>
           <a:solidFill>
-            <a:srgbClr val="10151F"/>
+            <a:srgbClr val="121726"/>
+          </a:solidFill>
+          <a:ln w="12700">
+            <a:solidFill>
+              <a:srgbClr val="06B6D4"/>
+            </a:solidFill>
+            <a:prstDash val="solid"/>
+          </a:ln>
+        </p:spPr>
+      </p:sp>
+      <p:sp>
+        <p:nvSpPr>
+          <p:cNvPr id="12" name="Text 10"/>
+          <p:cNvSpPr/>
+          <p:nvPr/>
+        </p:nvSpPr>
+        <p:spPr>
+          <a:xfrm>
+            <a:off x="4389120" y="1600200"/>
+            <a:ext cx="3383280" cy="731520"/>
+          </a:xfrm>
+          <a:prstGeom prst="rect">
+            <a:avLst/>
+          </a:prstGeom>
+          <a:noFill/>
+          <a:ln/>
+        </p:spPr>
+        <p:txBody>
+          <a:bodyPr wrap="square" rtlCol="0" anchor="ctr"/>
+          <a:lstStyle/>
+          <a:p>
+            <a:pPr algn="ctr" indent="0" marL="0">
+              <a:buNone/>
+            </a:pPr>
+            <a:r>
+              <a:rPr lang="en-US" sz="3800" b="1" dirty="0">
+                <a:solidFill>
+                  <a:srgbClr val="22D3EE"/>
+                </a:solidFill>
+                <a:latin typeface="Segoe UI" pitchFamily="34" charset="0"/>
+                <a:ea typeface="Segoe UI" pitchFamily="34" charset="-122"/>
+                <a:cs typeface="Segoe UI" pitchFamily="34" charset="-120"/>
+              </a:rPr>
+              <a:t>13</a:t>
+            </a:r>
+            <a:endParaRPr lang="en-US" sz="3800" dirty="0"/>
+          </a:p>
+        </p:txBody>
+      </p:sp>
+      <p:sp>
+        <p:nvSpPr>
+          <p:cNvPr id="13" name="Text 11"/>
+          <p:cNvSpPr/>
+          <p:nvPr/>
+        </p:nvSpPr>
+        <p:spPr>
+          <a:xfrm>
+            <a:off x="4389120" y="2331720"/>
+            <a:ext cx="3383280" cy="320040"/>
+          </a:xfrm>
+          <a:prstGeom prst="rect">
+            <a:avLst/>
+          </a:prstGeom>
+          <a:noFill/>
+          <a:ln/>
+        </p:spPr>
+        <p:txBody>
+          <a:bodyPr wrap="square" rtlCol="0" anchor="ctr"/>
+          <a:lstStyle/>
+          <a:p>
+            <a:pPr algn="ctr" indent="0" marL="0">
+              <a:buNone/>
+            </a:pPr>
+            <a:r>
+              <a:rPr lang="en-US" sz="1400" b="1" dirty="0">
+                <a:solidFill>
+                  <a:srgbClr val="FFFFFF"/>
+                </a:solidFill>
+                <a:latin typeface="Segoe UI" pitchFamily="34" charset="0"/>
+                <a:ea typeface="Segoe UI" pitchFamily="34" charset="-122"/>
+                <a:cs typeface="Segoe UI" pitchFamily="34" charset="-120"/>
+              </a:rPr>
+              <a:t>ML Architectures</a:t>
+            </a:r>
+            <a:endParaRPr lang="en-US" sz="1400" dirty="0"/>
+          </a:p>
+        </p:txBody>
+      </p:sp>
+      <p:sp>
+        <p:nvSpPr>
+          <p:cNvPr id="14" name="Text 12"/>
+          <p:cNvSpPr/>
+          <p:nvPr/>
+        </p:nvSpPr>
+        <p:spPr>
+          <a:xfrm>
+            <a:off x="4389120" y="2697480"/>
+            <a:ext cx="3383280" cy="457200"/>
+          </a:xfrm>
+          <a:prstGeom prst="rect">
+            <a:avLst/>
+          </a:prstGeom>
+          <a:noFill/>
+          <a:ln/>
+        </p:spPr>
+        <p:txBody>
+          <a:bodyPr wrap="square" rtlCol="0" anchor="ctr"/>
+          <a:lstStyle/>
+          <a:p>
+            <a:pPr algn="ctr" indent="0" marL="0">
+              <a:buNone/>
+            </a:pPr>
+            <a:r>
+              <a:rPr lang="en-US" sz="1100" dirty="0">
+                <a:solidFill>
+                  <a:srgbClr val="94A3B8"/>
+                </a:solidFill>
+                <a:latin typeface="Segoe UI" pitchFamily="34" charset="0"/>
+                <a:ea typeface="Segoe UI" pitchFamily="34" charset="-122"/>
+                <a:cs typeface="Segoe UI" pitchFamily="34" charset="-120"/>
+              </a:rPr>
+              <a:t>Tree, linear, SVM &amp; stacking ensembles</a:t>
+            </a:r>
+            <a:endParaRPr lang="en-US" sz="1100" dirty="0"/>
+          </a:p>
+        </p:txBody>
+      </p:sp>
+      <p:sp>
+        <p:nvSpPr>
+          <p:cNvPr id="15" name="Shape 13"/>
+          <p:cNvSpPr/>
+          <p:nvPr/>
+        </p:nvSpPr>
+        <p:spPr>
+          <a:xfrm>
+            <a:off x="8046720" y="1463040"/>
+            <a:ext cx="3383280" cy="2011680"/>
+          </a:xfrm>
+          <a:prstGeom prst="roundRect">
+            <a:avLst>
+              <a:gd name="adj" fmla="val 6818"/>
+            </a:avLst>
+          </a:prstGeom>
+          <a:solidFill>
+            <a:srgbClr val="121726"/>
+          </a:solidFill>
+          <a:ln w="12700">
+            <a:solidFill>
+              <a:srgbClr val="2563EB"/>
+            </a:solidFill>
+            <a:prstDash val="solid"/>
+          </a:ln>
+        </p:spPr>
+      </p:sp>
+      <p:sp>
+        <p:nvSpPr>
+          <p:cNvPr id="16" name="Text 14"/>
+          <p:cNvSpPr/>
+          <p:nvPr/>
+        </p:nvSpPr>
+        <p:spPr>
+          <a:xfrm>
+            <a:off x="8046720" y="1600200"/>
+            <a:ext cx="3383280" cy="731520"/>
+          </a:xfrm>
+          <a:prstGeom prst="rect">
+            <a:avLst/>
+          </a:prstGeom>
+          <a:noFill/>
+          <a:ln/>
+        </p:spPr>
+        <p:txBody>
+          <a:bodyPr wrap="square" rtlCol="0" anchor="ctr"/>
+          <a:lstStyle/>
+          <a:p>
+            <a:pPr algn="ctr" indent="0" marL="0">
+              <a:buNone/>
+            </a:pPr>
+            <a:r>
+              <a:rPr lang="en-US" sz="3800" b="1" dirty="0">
+                <a:solidFill>
+                  <a:srgbClr val="38BDF8"/>
+                </a:solidFill>
+                <a:latin typeface="Segoe UI" pitchFamily="34" charset="0"/>
+                <a:ea typeface="Segoe UI" pitchFamily="34" charset="-122"/>
+                <a:cs typeface="Segoe UI" pitchFamily="34" charset="-120"/>
+              </a:rPr>
+              <a:t>0.73</a:t>
+            </a:r>
+            <a:endParaRPr lang="en-US" sz="3800" dirty="0"/>
+          </a:p>
+        </p:txBody>
+      </p:sp>
+      <p:sp>
+        <p:nvSpPr>
+          <p:cNvPr id="17" name="Text 15"/>
+          <p:cNvSpPr/>
+          <p:nvPr/>
+        </p:nvSpPr>
+        <p:spPr>
+          <a:xfrm>
+            <a:off x="8046720" y="2331720"/>
+            <a:ext cx="3383280" cy="320040"/>
+          </a:xfrm>
+          <a:prstGeom prst="rect">
+            <a:avLst/>
+          </a:prstGeom>
+          <a:noFill/>
+          <a:ln/>
+        </p:spPr>
+        <p:txBody>
+          <a:bodyPr wrap="square" rtlCol="0" anchor="ctr"/>
+          <a:lstStyle/>
+          <a:p>
+            <a:pPr algn="ctr" indent="0" marL="0">
+              <a:buNone/>
+            </a:pPr>
+            <a:r>
+              <a:rPr lang="en-US" sz="1400" b="1" dirty="0">
+                <a:solidFill>
+                  <a:srgbClr val="FFFFFF"/>
+                </a:solidFill>
+                <a:latin typeface="Segoe UI" pitchFamily="34" charset="0"/>
+                <a:ea typeface="Segoe UI" pitchFamily="34" charset="-122"/>
+                <a:cs typeface="Segoe UI" pitchFamily="34" charset="-120"/>
+              </a:rPr>
+              <a:t>Set A ROC-AUC</a:t>
+            </a:r>
+            <a:endParaRPr lang="en-US" sz="1400" dirty="0"/>
+          </a:p>
+        </p:txBody>
+      </p:sp>
+      <p:sp>
+        <p:nvSpPr>
+          <p:cNvPr id="18" name="Text 16"/>
+          <p:cNvSpPr/>
+          <p:nvPr/>
+        </p:nvSpPr>
+        <p:spPr>
+          <a:xfrm>
+            <a:off x="8046720" y="2697480"/>
+            <a:ext cx="3383280" cy="457200"/>
+          </a:xfrm>
+          <a:prstGeom prst="rect">
+            <a:avLst/>
+          </a:prstGeom>
+          <a:noFill/>
+          <a:ln/>
+        </p:spPr>
+        <p:txBody>
+          <a:bodyPr wrap="square" rtlCol="0" anchor="ctr"/>
+          <a:lstStyle/>
+          <a:p>
+            <a:pPr algn="ctr" indent="0" marL="0">
+              <a:buNone/>
+            </a:pPr>
+            <a:r>
+              <a:rPr lang="en-US" sz="1100" dirty="0">
+                <a:solidFill>
+                  <a:srgbClr val="94A3B8"/>
+                </a:solidFill>
+                <a:latin typeface="Segoe UI" pitchFamily="34" charset="0"/>
+                <a:ea typeface="Segoe UI" pitchFamily="34" charset="-122"/>
+                <a:cs typeface="Segoe UI" pitchFamily="34" charset="-120"/>
+              </a:rPr>
+              <a:t>Demographics + Cognitive IQ only (No survey)</a:t>
+            </a:r>
+            <a:endParaRPr lang="en-US" sz="1100" dirty="0"/>
+          </a:p>
+        </p:txBody>
+      </p:sp>
+      <p:sp>
+        <p:nvSpPr>
+          <p:cNvPr id="19" name="Shape 17"/>
+          <p:cNvSpPr/>
+          <p:nvPr/>
+        </p:nvSpPr>
+        <p:spPr>
+          <a:xfrm>
+            <a:off x="731520" y="3749040"/>
+            <a:ext cx="3383280" cy="2011680"/>
+          </a:xfrm>
+          <a:prstGeom prst="roundRect">
+            <a:avLst>
+              <a:gd name="adj" fmla="val 6818"/>
+            </a:avLst>
+          </a:prstGeom>
+          <a:solidFill>
+            <a:srgbClr val="121726"/>
+          </a:solidFill>
+          <a:ln w="12700">
+            <a:solidFill>
+              <a:srgbClr val="F97316"/>
+            </a:solidFill>
+            <a:prstDash val="solid"/>
+          </a:ln>
+        </p:spPr>
+      </p:sp>
+      <p:sp>
+        <p:nvSpPr>
+          <p:cNvPr id="20" name="Text 18"/>
+          <p:cNvSpPr/>
+          <p:nvPr/>
+        </p:nvSpPr>
+        <p:spPr>
+          <a:xfrm>
+            <a:off x="731520" y="3886200"/>
+            <a:ext cx="3383280" cy="731520"/>
+          </a:xfrm>
+          <a:prstGeom prst="rect">
+            <a:avLst/>
+          </a:prstGeom>
+          <a:noFill/>
+          <a:ln/>
+        </p:spPr>
+        <p:txBody>
+          <a:bodyPr wrap="square" rtlCol="0" anchor="ctr"/>
+          <a:lstStyle/>
+          <a:p>
+            <a:pPr algn="ctr" indent="0" marL="0">
+              <a:buNone/>
+            </a:pPr>
+            <a:r>
+              <a:rPr lang="en-US" sz="3800" b="1" dirty="0">
+                <a:solidFill>
+                  <a:srgbClr val="F97316"/>
+                </a:solidFill>
+                <a:latin typeface="Segoe UI" pitchFamily="34" charset="0"/>
+                <a:ea typeface="Segoe UI" pitchFamily="34" charset="-122"/>
+                <a:cs typeface="Segoe UI" pitchFamily="34" charset="-120"/>
+              </a:rPr>
+              <a:t>0.96</a:t>
+            </a:r>
+            <a:endParaRPr lang="en-US" sz="3800" dirty="0"/>
+          </a:p>
+        </p:txBody>
+      </p:sp>
+      <p:sp>
+        <p:nvSpPr>
+          <p:cNvPr id="21" name="Text 19"/>
+          <p:cNvSpPr/>
+          <p:nvPr/>
+        </p:nvSpPr>
+        <p:spPr>
+          <a:xfrm>
+            <a:off x="731520" y="4617720"/>
+            <a:ext cx="3383280" cy="320040"/>
+          </a:xfrm>
+          <a:prstGeom prst="rect">
+            <a:avLst/>
+          </a:prstGeom>
+          <a:noFill/>
+          <a:ln/>
+        </p:spPr>
+        <p:txBody>
+          <a:bodyPr wrap="square" rtlCol="0" anchor="ctr"/>
+          <a:lstStyle/>
+          <a:p>
+            <a:pPr algn="ctr" indent="0" marL="0">
+              <a:buNone/>
+            </a:pPr>
+            <a:r>
+              <a:rPr lang="en-US" sz="1400" b="1" dirty="0">
+                <a:solidFill>
+                  <a:srgbClr val="FFFFFF"/>
+                </a:solidFill>
+                <a:latin typeface="Segoe UI" pitchFamily="34" charset="0"/>
+                <a:ea typeface="Segoe UI" pitchFamily="34" charset="-122"/>
+                <a:cs typeface="Segoe UI" pitchFamily="34" charset="-120"/>
+              </a:rPr>
+              <a:t>Set B ROC-AUC</a:t>
+            </a:r>
+            <a:endParaRPr lang="en-US" sz="1400" dirty="0"/>
+          </a:p>
+        </p:txBody>
+      </p:sp>
+      <p:sp>
+        <p:nvSpPr>
+          <p:cNvPr id="22" name="Text 20"/>
+          <p:cNvSpPr/>
+          <p:nvPr/>
+        </p:nvSpPr>
+        <p:spPr>
+          <a:xfrm>
+            <a:off x="731520" y="4983480"/>
+            <a:ext cx="3383280" cy="457200"/>
+          </a:xfrm>
+          <a:prstGeom prst="rect">
+            <a:avLst/>
+          </a:prstGeom>
+          <a:noFill/>
+          <a:ln/>
+        </p:spPr>
+        <p:txBody>
+          <a:bodyPr wrap="square" rtlCol="0" anchor="ctr"/>
+          <a:lstStyle/>
+          <a:p>
+            <a:pPr algn="ctr" indent="0" marL="0">
+              <a:buNone/>
+            </a:pPr>
+            <a:r>
+              <a:rPr lang="en-US" sz="1100" dirty="0">
+                <a:solidFill>
+                  <a:srgbClr val="94A3B8"/>
+                </a:solidFill>
+                <a:latin typeface="Segoe UI" pitchFamily="34" charset="0"/>
+                <a:ea typeface="Segoe UI" pitchFamily="34" charset="-122"/>
+                <a:cs typeface="Segoe UI" pitchFamily="34" charset="-120"/>
+              </a:rPr>
+              <a:t>Augmented with parent symptom ratings</a:t>
+            </a:r>
+            <a:endParaRPr lang="en-US" sz="1100" dirty="0"/>
+          </a:p>
+        </p:txBody>
+      </p:sp>
+      <p:sp>
+        <p:nvSpPr>
+          <p:cNvPr id="23" name="Shape 21"/>
+          <p:cNvSpPr/>
+          <p:nvPr/>
+        </p:nvSpPr>
+        <p:spPr>
+          <a:xfrm>
+            <a:off x="4389120" y="3749040"/>
+            <a:ext cx="3383280" cy="2011680"/>
+          </a:xfrm>
+          <a:prstGeom prst="roundRect">
+            <a:avLst>
+              <a:gd name="adj" fmla="val 6818"/>
+            </a:avLst>
+          </a:prstGeom>
+          <a:solidFill>
+            <a:srgbClr val="121726"/>
+          </a:solidFill>
+          <a:ln w="12700">
+            <a:solidFill>
+              <a:srgbClr val="06B6D4"/>
+            </a:solidFill>
+            <a:prstDash val="solid"/>
+          </a:ln>
+        </p:spPr>
+      </p:sp>
+      <p:sp>
+        <p:nvSpPr>
+          <p:cNvPr id="24" name="Text 22"/>
+          <p:cNvSpPr/>
+          <p:nvPr/>
+        </p:nvSpPr>
+        <p:spPr>
+          <a:xfrm>
+            <a:off x="4389120" y="3886200"/>
+            <a:ext cx="3383280" cy="731520"/>
+          </a:xfrm>
+          <a:prstGeom prst="rect">
+            <a:avLst/>
+          </a:prstGeom>
+          <a:noFill/>
+          <a:ln/>
+        </p:spPr>
+        <p:txBody>
+          <a:bodyPr wrap="square" rtlCol="0" anchor="ctr"/>
+          <a:lstStyle/>
+          <a:p>
+            <a:pPr algn="ctr" indent="0" marL="0">
+              <a:buNone/>
+            </a:pPr>
+            <a:r>
+              <a:rPr lang="en-US" sz="3800" b="1" dirty="0">
+                <a:solidFill>
+                  <a:srgbClr val="22D3EE"/>
+                </a:solidFill>
+                <a:latin typeface="Segoe UI" pitchFamily="34" charset="0"/>
+                <a:ea typeface="Segoe UI" pitchFamily="34" charset="-122"/>
+                <a:cs typeface="Segoe UI" pitchFamily="34" charset="-120"/>
+              </a:rPr>
+              <a:t>40</a:t>
+            </a:r>
+            <a:endParaRPr lang="en-US" sz="3800" dirty="0"/>
+          </a:p>
+        </p:txBody>
+      </p:sp>
+      <p:sp>
+        <p:nvSpPr>
+          <p:cNvPr id="25" name="Text 23"/>
+          <p:cNvSpPr/>
+          <p:nvPr/>
+        </p:nvSpPr>
+        <p:spPr>
+          <a:xfrm>
+            <a:off x="4389120" y="4617720"/>
+            <a:ext cx="3383280" cy="320040"/>
+          </a:xfrm>
+          <a:prstGeom prst="rect">
+            <a:avLst/>
+          </a:prstGeom>
+          <a:noFill/>
+          <a:ln/>
+        </p:spPr>
+        <p:txBody>
+          <a:bodyPr wrap="square" rtlCol="0" anchor="ctr"/>
+          <a:lstStyle/>
+          <a:p>
+            <a:pPr algn="ctr" indent="0" marL="0">
+              <a:buNone/>
+            </a:pPr>
+            <a:r>
+              <a:rPr lang="en-US" sz="1400" b="1" dirty="0">
+                <a:solidFill>
+                  <a:srgbClr val="FFFFFF"/>
+                </a:solidFill>
+                <a:latin typeface="Segoe UI" pitchFamily="34" charset="0"/>
+                <a:ea typeface="Segoe UI" pitchFamily="34" charset="-122"/>
+                <a:cs typeface="Segoe UI" pitchFamily="34" charset="-120"/>
+              </a:rPr>
+              <a:t>fMRI Scans</a:t>
+            </a:r>
+            <a:endParaRPr lang="en-US" sz="1400" dirty="0"/>
+          </a:p>
+        </p:txBody>
+      </p:sp>
+      <p:sp>
+        <p:nvSpPr>
+          <p:cNvPr id="26" name="Text 24"/>
+          <p:cNvSpPr/>
+          <p:nvPr/>
+        </p:nvSpPr>
+        <p:spPr>
+          <a:xfrm>
+            <a:off x="4389120" y="4983480"/>
+            <a:ext cx="3383280" cy="457200"/>
+          </a:xfrm>
+          <a:prstGeom prst="rect">
+            <a:avLst/>
+          </a:prstGeom>
+          <a:noFill/>
+          <a:ln/>
+        </p:spPr>
+        <p:txBody>
+          <a:bodyPr wrap="square" rtlCol="0" anchor="ctr"/>
+          <a:lstStyle/>
+          <a:p>
+            <a:pPr algn="ctr" indent="0" marL="0">
+              <a:buNone/>
+            </a:pPr>
+            <a:r>
+              <a:rPr lang="en-US" sz="1100" dirty="0">
+                <a:solidFill>
+                  <a:srgbClr val="94A3B8"/>
+                </a:solidFill>
+                <a:latin typeface="Segoe UI" pitchFamily="34" charset="0"/>
+                <a:ea typeface="Segoe UI" pitchFamily="34" charset="-122"/>
+                <a:cs typeface="Segoe UI" pitchFamily="34" charset="-120"/>
+              </a:rPr>
+              <a:t>Resting-state BOLD timeseries via Nilearn</a:t>
+            </a:r>
+            <a:endParaRPr lang="en-US" sz="1100" dirty="0"/>
+          </a:p>
+        </p:txBody>
+      </p:sp>
+      <p:sp>
+        <p:nvSpPr>
+          <p:cNvPr id="27" name="Shape 25"/>
+          <p:cNvSpPr/>
+          <p:nvPr/>
+        </p:nvSpPr>
+        <p:spPr>
+          <a:xfrm>
+            <a:off x="8046720" y="3749040"/>
+            <a:ext cx="3383280" cy="2011680"/>
+          </a:xfrm>
+          <a:prstGeom prst="roundRect">
+            <a:avLst>
+              <a:gd name="adj" fmla="val 6818"/>
+            </a:avLst>
+          </a:prstGeom>
+          <a:solidFill>
+            <a:srgbClr val="121726"/>
           </a:solidFill>
           <a:ln w="12700">
             <a:solidFill>
@@ -5900,575 +7332,7 @@
       </p:sp>
       <p:sp>
         <p:nvSpPr>
-          <p:cNvPr id="10" name="Text 8"/>
-          <p:cNvSpPr/>
-          <p:nvPr/>
-        </p:nvSpPr>
-        <p:spPr>
-          <a:xfrm>
-            <a:off x="4389120" y="1600200"/>
-            <a:ext cx="3383280" cy="731520"/>
-          </a:xfrm>
-          <a:prstGeom prst="rect">
-            <a:avLst/>
-          </a:prstGeom>
-          <a:noFill/>
-          <a:ln/>
-        </p:spPr>
-        <p:txBody>
-          <a:bodyPr wrap="square" rtlCol="0" anchor="ctr"/>
-          <a:lstStyle/>
-          <a:p>
-            <a:pPr algn="ctr" indent="0" marL="0">
-              <a:buNone/>
-            </a:pPr>
-            <a:r>
-              <a:rPr lang="en-US" sz="3600" b="1" dirty="0">
-                <a:solidFill>
-                  <a:srgbClr val="2DD4BF"/>
-                </a:solidFill>
-                <a:latin typeface="Segoe UI" pitchFamily="34" charset="0"/>
-                <a:ea typeface="Segoe UI" pitchFamily="34" charset="-122"/>
-                <a:cs typeface="Segoe UI" pitchFamily="34" charset="-120"/>
-              </a:rPr>
-              <a:t>13</a:t>
-            </a:r>
-            <a:endParaRPr lang="en-US" sz="3600" dirty="0"/>
-          </a:p>
-        </p:txBody>
-      </p:sp>
-      <p:sp>
-        <p:nvSpPr>
-          <p:cNvPr id="11" name="Text 9"/>
-          <p:cNvSpPr/>
-          <p:nvPr/>
-        </p:nvSpPr>
-        <p:spPr>
-          <a:xfrm>
-            <a:off x="4389120" y="2331720"/>
-            <a:ext cx="3383280" cy="320040"/>
-          </a:xfrm>
-          <a:prstGeom prst="rect">
-            <a:avLst/>
-          </a:prstGeom>
-          <a:noFill/>
-          <a:ln/>
-        </p:spPr>
-        <p:txBody>
-          <a:bodyPr wrap="square" rtlCol="0" anchor="ctr"/>
-          <a:lstStyle/>
-          <a:p>
-            <a:pPr algn="ctr" indent="0" marL="0">
-              <a:buNone/>
-            </a:pPr>
-            <a:r>
-              <a:rPr lang="en-US" sz="1400" b="1" dirty="0">
-                <a:solidFill>
-                  <a:srgbClr val="FFFFFF"/>
-                </a:solidFill>
-                <a:latin typeface="Segoe UI" pitchFamily="34" charset="0"/>
-                <a:ea typeface="Segoe UI" pitchFamily="34" charset="-122"/>
-                <a:cs typeface="Segoe UI" pitchFamily="34" charset="-120"/>
-              </a:rPr>
-              <a:t>ML Architectures</a:t>
-            </a:r>
-            <a:endParaRPr lang="en-US" sz="1400" dirty="0"/>
-          </a:p>
-        </p:txBody>
-      </p:sp>
-      <p:sp>
-        <p:nvSpPr>
-          <p:cNvPr id="12" name="Text 10"/>
-          <p:cNvSpPr/>
-          <p:nvPr/>
-        </p:nvSpPr>
-        <p:spPr>
-          <a:xfrm>
-            <a:off x="4389120" y="2697480"/>
-            <a:ext cx="3383280" cy="457200"/>
-          </a:xfrm>
-          <a:prstGeom prst="rect">
-            <a:avLst/>
-          </a:prstGeom>
-          <a:noFill/>
-          <a:ln/>
-        </p:spPr>
-        <p:txBody>
-          <a:bodyPr wrap="square" rtlCol="0" anchor="ctr"/>
-          <a:lstStyle/>
-          <a:p>
-            <a:pPr algn="ctr" indent="0" marL="0">
-              <a:buNone/>
-            </a:pPr>
-            <a:r>
-              <a:rPr lang="en-US" sz="1100" dirty="0">
-                <a:solidFill>
-                  <a:srgbClr val="94A3B8"/>
-                </a:solidFill>
-                <a:latin typeface="Segoe UI" pitchFamily="34" charset="0"/>
-                <a:ea typeface="Segoe UI" pitchFamily="34" charset="-122"/>
-                <a:cs typeface="Segoe UI" pitchFamily="34" charset="-120"/>
-              </a:rPr>
-              <a:t>Tree, linear, SVM &amp; stacking ensembles</a:t>
-            </a:r>
-            <a:endParaRPr lang="en-US" sz="1100" dirty="0"/>
-          </a:p>
-        </p:txBody>
-      </p:sp>
-      <p:sp>
-        <p:nvSpPr>
-          <p:cNvPr id="13" name="Shape 11"/>
-          <p:cNvSpPr/>
-          <p:nvPr/>
-        </p:nvSpPr>
-        <p:spPr>
-          <a:xfrm>
-            <a:off x="8046720" y="1463040"/>
-            <a:ext cx="3383280" cy="2011680"/>
-          </a:xfrm>
-          <a:prstGeom prst="roundRect">
-            <a:avLst/>
-          </a:prstGeom>
-          <a:solidFill>
-            <a:srgbClr val="10151F"/>
-          </a:solidFill>
-          <a:ln w="12700">
-            <a:solidFill>
-              <a:srgbClr val="1E293B"/>
-            </a:solidFill>
-            <a:prstDash val="solid"/>
-          </a:ln>
-        </p:spPr>
-      </p:sp>
-      <p:sp>
-        <p:nvSpPr>
-          <p:cNvPr id="14" name="Text 12"/>
-          <p:cNvSpPr/>
-          <p:nvPr/>
-        </p:nvSpPr>
-        <p:spPr>
-          <a:xfrm>
-            <a:off x="8046720" y="1600200"/>
-            <a:ext cx="3383280" cy="731520"/>
-          </a:xfrm>
-          <a:prstGeom prst="rect">
-            <a:avLst/>
-          </a:prstGeom>
-          <a:noFill/>
-          <a:ln/>
-        </p:spPr>
-        <p:txBody>
-          <a:bodyPr wrap="square" rtlCol="0" anchor="ctr"/>
-          <a:lstStyle/>
-          <a:p>
-            <a:pPr algn="ctr" indent="0" marL="0">
-              <a:buNone/>
-            </a:pPr>
-            <a:r>
-              <a:rPr lang="en-US" sz="3600" b="1" dirty="0">
-                <a:solidFill>
-                  <a:srgbClr val="38BDF8"/>
-                </a:solidFill>
-                <a:latin typeface="Segoe UI" pitchFamily="34" charset="0"/>
-                <a:ea typeface="Segoe UI" pitchFamily="34" charset="-122"/>
-                <a:cs typeface="Segoe UI" pitchFamily="34" charset="-120"/>
-              </a:rPr>
-              <a:t>0.73</a:t>
-            </a:r>
-            <a:endParaRPr lang="en-US" sz="3600" dirty="0"/>
-          </a:p>
-        </p:txBody>
-      </p:sp>
-      <p:sp>
-        <p:nvSpPr>
-          <p:cNvPr id="15" name="Text 13"/>
-          <p:cNvSpPr/>
-          <p:nvPr/>
-        </p:nvSpPr>
-        <p:spPr>
-          <a:xfrm>
-            <a:off x="8046720" y="2331720"/>
-            <a:ext cx="3383280" cy="320040"/>
-          </a:xfrm>
-          <a:prstGeom prst="rect">
-            <a:avLst/>
-          </a:prstGeom>
-          <a:noFill/>
-          <a:ln/>
-        </p:spPr>
-        <p:txBody>
-          <a:bodyPr wrap="square" rtlCol="0" anchor="ctr"/>
-          <a:lstStyle/>
-          <a:p>
-            <a:pPr algn="ctr" indent="0" marL="0">
-              <a:buNone/>
-            </a:pPr>
-            <a:r>
-              <a:rPr lang="en-US" sz="1400" b="1" dirty="0">
-                <a:solidFill>
-                  <a:srgbClr val="FFFFFF"/>
-                </a:solidFill>
-                <a:latin typeface="Segoe UI" pitchFamily="34" charset="0"/>
-                <a:ea typeface="Segoe UI" pitchFamily="34" charset="-122"/>
-                <a:cs typeface="Segoe UI" pitchFamily="34" charset="-120"/>
-              </a:rPr>
-              <a:t>Set A ROC-AUC</a:t>
-            </a:r>
-            <a:endParaRPr lang="en-US" sz="1400" dirty="0"/>
-          </a:p>
-        </p:txBody>
-      </p:sp>
-      <p:sp>
-        <p:nvSpPr>
-          <p:cNvPr id="16" name="Text 14"/>
-          <p:cNvSpPr/>
-          <p:nvPr/>
-        </p:nvSpPr>
-        <p:spPr>
-          <a:xfrm>
-            <a:off x="8046720" y="2697480"/>
-            <a:ext cx="3383280" cy="457200"/>
-          </a:xfrm>
-          <a:prstGeom prst="rect">
-            <a:avLst/>
-          </a:prstGeom>
-          <a:noFill/>
-          <a:ln/>
-        </p:spPr>
-        <p:txBody>
-          <a:bodyPr wrap="square" rtlCol="0" anchor="ctr"/>
-          <a:lstStyle/>
-          <a:p>
-            <a:pPr algn="ctr" indent="0" marL="0">
-              <a:buNone/>
-            </a:pPr>
-            <a:r>
-              <a:rPr lang="en-US" sz="1100" dirty="0">
-                <a:solidFill>
-                  <a:srgbClr val="94A3B8"/>
-                </a:solidFill>
-                <a:latin typeface="Segoe UI" pitchFamily="34" charset="0"/>
-                <a:ea typeface="Segoe UI" pitchFamily="34" charset="-122"/>
-                <a:cs typeface="Segoe UI" pitchFamily="34" charset="-120"/>
-              </a:rPr>
-              <a:t>Demographics + Cognitive IQ only (No survey)</a:t>
-            </a:r>
-            <a:endParaRPr lang="en-US" sz="1100" dirty="0"/>
-          </a:p>
-        </p:txBody>
-      </p:sp>
-      <p:sp>
-        <p:nvSpPr>
-          <p:cNvPr id="17" name="Shape 15"/>
-          <p:cNvSpPr/>
-          <p:nvPr/>
-        </p:nvSpPr>
-        <p:spPr>
-          <a:xfrm>
-            <a:off x="731520" y="3749040"/>
-            <a:ext cx="3383280" cy="2011680"/>
-          </a:xfrm>
-          <a:prstGeom prst="roundRect">
-            <a:avLst/>
-          </a:prstGeom>
-          <a:solidFill>
-            <a:srgbClr val="10151F"/>
-          </a:solidFill>
-          <a:ln w="12700">
-            <a:solidFill>
-              <a:srgbClr val="1E293B"/>
-            </a:solidFill>
-            <a:prstDash val="solid"/>
-          </a:ln>
-        </p:spPr>
-      </p:sp>
-      <p:sp>
-        <p:nvSpPr>
-          <p:cNvPr id="18" name="Text 16"/>
-          <p:cNvSpPr/>
-          <p:nvPr/>
-        </p:nvSpPr>
-        <p:spPr>
-          <a:xfrm>
-            <a:off x="731520" y="3886200"/>
-            <a:ext cx="3383280" cy="731520"/>
-          </a:xfrm>
-          <a:prstGeom prst="rect">
-            <a:avLst/>
-          </a:prstGeom>
-          <a:noFill/>
-          <a:ln/>
-        </p:spPr>
-        <p:txBody>
-          <a:bodyPr wrap="square" rtlCol="0" anchor="ctr"/>
-          <a:lstStyle/>
-          <a:p>
-            <a:pPr algn="ctr" indent="0" marL="0">
-              <a:buNone/>
-            </a:pPr>
-            <a:r>
-              <a:rPr lang="en-US" sz="3600" b="1" dirty="0">
-                <a:solidFill>
-                  <a:srgbClr val="F97316"/>
-                </a:solidFill>
-                <a:latin typeface="Segoe UI" pitchFamily="34" charset="0"/>
-                <a:ea typeface="Segoe UI" pitchFamily="34" charset="-122"/>
-                <a:cs typeface="Segoe UI" pitchFamily="34" charset="-120"/>
-              </a:rPr>
-              <a:t>0.96</a:t>
-            </a:r>
-            <a:endParaRPr lang="en-US" sz="3600" dirty="0"/>
-          </a:p>
-        </p:txBody>
-      </p:sp>
-      <p:sp>
-        <p:nvSpPr>
-          <p:cNvPr id="19" name="Text 17"/>
-          <p:cNvSpPr/>
-          <p:nvPr/>
-        </p:nvSpPr>
-        <p:spPr>
-          <a:xfrm>
-            <a:off x="731520" y="4617720"/>
-            <a:ext cx="3383280" cy="320040"/>
-          </a:xfrm>
-          <a:prstGeom prst="rect">
-            <a:avLst/>
-          </a:prstGeom>
-          <a:noFill/>
-          <a:ln/>
-        </p:spPr>
-        <p:txBody>
-          <a:bodyPr wrap="square" rtlCol="0" anchor="ctr"/>
-          <a:lstStyle/>
-          <a:p>
-            <a:pPr algn="ctr" indent="0" marL="0">
-              <a:buNone/>
-            </a:pPr>
-            <a:r>
-              <a:rPr lang="en-US" sz="1400" b="1" dirty="0">
-                <a:solidFill>
-                  <a:srgbClr val="FFFFFF"/>
-                </a:solidFill>
-                <a:latin typeface="Segoe UI" pitchFamily="34" charset="0"/>
-                <a:ea typeface="Segoe UI" pitchFamily="34" charset="-122"/>
-                <a:cs typeface="Segoe UI" pitchFamily="34" charset="-120"/>
-              </a:rPr>
-              <a:t>Set B ROC-AUC</a:t>
-            </a:r>
-            <a:endParaRPr lang="en-US" sz="1400" dirty="0"/>
-          </a:p>
-        </p:txBody>
-      </p:sp>
-      <p:sp>
-        <p:nvSpPr>
-          <p:cNvPr id="20" name="Text 18"/>
-          <p:cNvSpPr/>
-          <p:nvPr/>
-        </p:nvSpPr>
-        <p:spPr>
-          <a:xfrm>
-            <a:off x="731520" y="4983480"/>
-            <a:ext cx="3383280" cy="457200"/>
-          </a:xfrm>
-          <a:prstGeom prst="rect">
-            <a:avLst/>
-          </a:prstGeom>
-          <a:noFill/>
-          <a:ln/>
-        </p:spPr>
-        <p:txBody>
-          <a:bodyPr wrap="square" rtlCol="0" anchor="ctr"/>
-          <a:lstStyle/>
-          <a:p>
-            <a:pPr algn="ctr" indent="0" marL="0">
-              <a:buNone/>
-            </a:pPr>
-            <a:r>
-              <a:rPr lang="en-US" sz="1100" dirty="0">
-                <a:solidFill>
-                  <a:srgbClr val="94A3B8"/>
-                </a:solidFill>
-                <a:latin typeface="Segoe UI" pitchFamily="34" charset="0"/>
-                <a:ea typeface="Segoe UI" pitchFamily="34" charset="-122"/>
-                <a:cs typeface="Segoe UI" pitchFamily="34" charset="-120"/>
-              </a:rPr>
-              <a:t>Augmented with parent symptom ratings</a:t>
-            </a:r>
-            <a:endParaRPr lang="en-US" sz="1100" dirty="0"/>
-          </a:p>
-        </p:txBody>
-      </p:sp>
-      <p:sp>
-        <p:nvSpPr>
-          <p:cNvPr id="21" name="Shape 19"/>
-          <p:cNvSpPr/>
-          <p:nvPr/>
-        </p:nvSpPr>
-        <p:spPr>
-          <a:xfrm>
-            <a:off x="4389120" y="3749040"/>
-            <a:ext cx="3383280" cy="2011680"/>
-          </a:xfrm>
-          <a:prstGeom prst="roundRect">
-            <a:avLst/>
-          </a:prstGeom>
-          <a:solidFill>
-            <a:srgbClr val="10151F"/>
-          </a:solidFill>
-          <a:ln w="12700">
-            <a:solidFill>
-              <a:srgbClr val="1E293B"/>
-            </a:solidFill>
-            <a:prstDash val="solid"/>
-          </a:ln>
-        </p:spPr>
-      </p:sp>
-      <p:sp>
-        <p:nvSpPr>
-          <p:cNvPr id="22" name="Text 20"/>
-          <p:cNvSpPr/>
-          <p:nvPr/>
-        </p:nvSpPr>
-        <p:spPr>
-          <a:xfrm>
-            <a:off x="4389120" y="3886200"/>
-            <a:ext cx="3383280" cy="731520"/>
-          </a:xfrm>
-          <a:prstGeom prst="rect">
-            <a:avLst/>
-          </a:prstGeom>
-          <a:noFill/>
-          <a:ln/>
-        </p:spPr>
-        <p:txBody>
-          <a:bodyPr wrap="square" rtlCol="0" anchor="ctr"/>
-          <a:lstStyle/>
-          <a:p>
-            <a:pPr algn="ctr" indent="0" marL="0">
-              <a:buNone/>
-            </a:pPr>
-            <a:r>
-              <a:rPr lang="en-US" sz="3600" b="1" dirty="0">
-                <a:solidFill>
-                  <a:srgbClr val="2DD4BF"/>
-                </a:solidFill>
-                <a:latin typeface="Segoe UI" pitchFamily="34" charset="0"/>
-                <a:ea typeface="Segoe UI" pitchFamily="34" charset="-122"/>
-                <a:cs typeface="Segoe UI" pitchFamily="34" charset="-120"/>
-              </a:rPr>
-              <a:t>40</a:t>
-            </a:r>
-            <a:endParaRPr lang="en-US" sz="3600" dirty="0"/>
-          </a:p>
-        </p:txBody>
-      </p:sp>
-      <p:sp>
-        <p:nvSpPr>
-          <p:cNvPr id="23" name="Text 21"/>
-          <p:cNvSpPr/>
-          <p:nvPr/>
-        </p:nvSpPr>
-        <p:spPr>
-          <a:xfrm>
-            <a:off x="4389120" y="4617720"/>
-            <a:ext cx="3383280" cy="320040"/>
-          </a:xfrm>
-          <a:prstGeom prst="rect">
-            <a:avLst/>
-          </a:prstGeom>
-          <a:noFill/>
-          <a:ln/>
-        </p:spPr>
-        <p:txBody>
-          <a:bodyPr wrap="square" rtlCol="0" anchor="ctr"/>
-          <a:lstStyle/>
-          <a:p>
-            <a:pPr algn="ctr" indent="0" marL="0">
-              <a:buNone/>
-            </a:pPr>
-            <a:r>
-              <a:rPr lang="en-US" sz="1400" b="1" dirty="0">
-                <a:solidFill>
-                  <a:srgbClr val="FFFFFF"/>
-                </a:solidFill>
-                <a:latin typeface="Segoe UI" pitchFamily="34" charset="0"/>
-                <a:ea typeface="Segoe UI" pitchFamily="34" charset="-122"/>
-                <a:cs typeface="Segoe UI" pitchFamily="34" charset="-120"/>
-              </a:rPr>
-              <a:t>fMRI Scans</a:t>
-            </a:r>
-            <a:endParaRPr lang="en-US" sz="1400" dirty="0"/>
-          </a:p>
-        </p:txBody>
-      </p:sp>
-      <p:sp>
-        <p:nvSpPr>
-          <p:cNvPr id="24" name="Text 22"/>
-          <p:cNvSpPr/>
-          <p:nvPr/>
-        </p:nvSpPr>
-        <p:spPr>
-          <a:xfrm>
-            <a:off x="4389120" y="4983480"/>
-            <a:ext cx="3383280" cy="457200"/>
-          </a:xfrm>
-          <a:prstGeom prst="rect">
-            <a:avLst/>
-          </a:prstGeom>
-          <a:noFill/>
-          <a:ln/>
-        </p:spPr>
-        <p:txBody>
-          <a:bodyPr wrap="square" rtlCol="0" anchor="ctr"/>
-          <a:lstStyle/>
-          <a:p>
-            <a:pPr algn="ctr" indent="0" marL="0">
-              <a:buNone/>
-            </a:pPr>
-            <a:r>
-              <a:rPr lang="en-US" sz="1100" dirty="0">
-                <a:solidFill>
-                  <a:srgbClr val="94A3B8"/>
-                </a:solidFill>
-                <a:latin typeface="Segoe UI" pitchFamily="34" charset="0"/>
-                <a:ea typeface="Segoe UI" pitchFamily="34" charset="-122"/>
-                <a:cs typeface="Segoe UI" pitchFamily="34" charset="-120"/>
-              </a:rPr>
-              <a:t>Resting-state BOLD timeseries via Nilearn</a:t>
-            </a:r>
-            <a:endParaRPr lang="en-US" sz="1100" dirty="0"/>
-          </a:p>
-        </p:txBody>
-      </p:sp>
-      <p:sp>
-        <p:nvSpPr>
-          <p:cNvPr id="25" name="Shape 23"/>
-          <p:cNvSpPr/>
-          <p:nvPr/>
-        </p:nvSpPr>
-        <p:spPr>
-          <a:xfrm>
-            <a:off x="8046720" y="3749040"/>
-            <a:ext cx="3383280" cy="2011680"/>
-          </a:xfrm>
-          <a:prstGeom prst="roundRect">
-            <a:avLst/>
-          </a:prstGeom>
-          <a:solidFill>
-            <a:srgbClr val="10151F"/>
-          </a:solidFill>
-          <a:ln w="12700">
-            <a:solidFill>
-              <a:srgbClr val="1E293B"/>
-            </a:solidFill>
-            <a:prstDash val="solid"/>
-          </a:ln>
-        </p:spPr>
-      </p:sp>
-      <p:sp>
-        <p:nvSpPr>
-          <p:cNvPr id="26" name="Text 24"/>
+          <p:cNvPr id="28" name="Text 26"/>
           <p:cNvSpPr/>
           <p:nvPr/>
         </p:nvSpPr>
@@ -6491,7 +7355,7 @@
               <a:buNone/>
             </a:pPr>
             <a:r>
-              <a:rPr lang="en-US" sz="3600" b="1" dirty="0">
+              <a:rPr lang="en-US" sz="3800" b="1" dirty="0">
                 <a:solidFill>
                   <a:srgbClr val="94A3B8"/>
                 </a:solidFill>
@@ -6501,13 +7365,13 @@
               </a:rPr>
               <a:t>p=0.11</a:t>
             </a:r>
-            <a:endParaRPr lang="en-US" sz="3600" dirty="0"/>
-          </a:p>
-        </p:txBody>
-      </p:sp>
-      <p:sp>
-        <p:nvSpPr>
-          <p:cNvPr id="27" name="Text 25"/>
+            <a:endParaRPr lang="en-US" sz="3800" dirty="0"/>
+          </a:p>
+        </p:txBody>
+      </p:sp>
+      <p:sp>
+        <p:nvSpPr>
+          <p:cNvPr id="29" name="Text 27"/>
           <p:cNvSpPr/>
           <p:nvPr/>
         </p:nvSpPr>
@@ -6546,7 +7410,7 @@
       </p:sp>
       <p:sp>
         <p:nvSpPr>
-          <p:cNvPr id="28" name="Text 26"/>
+          <p:cNvPr id="30" name="Text 28"/>
           <p:cNvSpPr/>
           <p:nvPr/>
         </p:nvSpPr>
@@ -6597,7 +7461,7 @@
     <p:bg>
       <p:bgPr>
         <a:solidFill>
-          <a:srgbClr val="07090E"/>
+          <a:srgbClr val="090A0F"/>
         </a:solidFill>
       </p:bgPr>
     </p:bg>
@@ -6617,102 +7481,26 @@
       </p:grpSpPr>
       <p:sp>
         <p:nvSpPr>
-          <p:cNvPr id="2" name="Text 0"/>
-          <p:cNvSpPr/>
-          <p:nvPr/>
-        </p:nvSpPr>
-        <p:spPr>
-          <a:xfrm>
-            <a:off x="731520" y="411480"/>
-            <a:ext cx="9144000" cy="228600"/>
-          </a:xfrm>
-          <a:prstGeom prst="rect">
-            <a:avLst/>
-          </a:prstGeom>
-          <a:noFill/>
-          <a:ln/>
-        </p:spPr>
-        <p:txBody>
-          <a:bodyPr wrap="square" rtlCol="0" anchor="ctr"/>
-          <a:lstStyle/>
-          <a:p>
-            <a:pPr indent="0" marL="0">
-              <a:buNone/>
-            </a:pPr>
-            <a:r>
-              <a:rPr lang="en-US" sz="1000" b="1" dirty="0">
-                <a:solidFill>
-                  <a:srgbClr val="2DD4BF"/>
-                </a:solidFill>
-                <a:latin typeface="Segoe UI" pitchFamily="34" charset="0"/>
-                <a:ea typeface="Segoe UI" pitchFamily="34" charset="-122"/>
-                <a:cs typeface="Segoe UI" pitchFamily="34" charset="-120"/>
-              </a:rPr>
-              <a:t>PROBLEM STATEMENT</a:t>
-            </a:r>
-            <a:endParaRPr lang="en-US" sz="1000" dirty="0"/>
-          </a:p>
-        </p:txBody>
-      </p:sp>
-      <p:sp>
-        <p:nvSpPr>
-          <p:cNvPr id="3" name="Text 1"/>
-          <p:cNvSpPr/>
-          <p:nvPr/>
-        </p:nvSpPr>
-        <p:spPr>
-          <a:xfrm>
-            <a:off x="731520" y="685800"/>
-            <a:ext cx="10515600" cy="502920"/>
-          </a:xfrm>
-          <a:prstGeom prst="rect">
-            <a:avLst/>
-          </a:prstGeom>
-          <a:noFill/>
-          <a:ln/>
-        </p:spPr>
-        <p:txBody>
-          <a:bodyPr wrap="square" rtlCol="0" anchor="ctr"/>
-          <a:lstStyle/>
-          <a:p>
-            <a:pPr indent="0" marL="0">
-              <a:buNone/>
-            </a:pPr>
-            <a:r>
-              <a:rPr lang="en-US" sz="2100" b="1" dirty="0">
-                <a:solidFill>
-                  <a:srgbClr val="FFFFFF"/>
-                </a:solidFill>
-                <a:latin typeface="Segoe UI" pitchFamily="34" charset="0"/>
-                <a:ea typeface="Segoe UI" pitchFamily="34" charset="-122"/>
-                <a:cs typeface="Segoe UI" pitchFamily="34" charset="-120"/>
-              </a:rPr>
-              <a:t>Why ADHD Diagnosis Needs Machine Learning</a:t>
-            </a:r>
-            <a:endParaRPr lang="en-US" sz="2100" dirty="0"/>
-          </a:p>
-        </p:txBody>
-      </p:sp>
-      <p:sp>
-        <p:nvSpPr>
-          <p:cNvPr id="4" name="Shape 2"/>
-          <p:cNvSpPr/>
-          <p:nvPr/>
-        </p:nvSpPr>
-        <p:spPr>
-          <a:xfrm>
-            <a:off x="731520" y="1234440"/>
-            <a:ext cx="1828800" cy="36576"/>
-          </a:xfrm>
-          <a:prstGeom prst="rect">
-            <a:avLst/>
+          <p:cNvPr id="2" name="Shape 0"/>
+          <p:cNvSpPr/>
+          <p:nvPr/>
+        </p:nvSpPr>
+        <p:spPr>
+          <a:xfrm>
+            <a:off x="731520" y="365760"/>
+            <a:ext cx="2926080" cy="256032"/>
+          </a:xfrm>
+          <a:prstGeom prst="roundRect">
+            <a:avLst>
+              <a:gd name="adj" fmla="val 50000"/>
+            </a:avLst>
           </a:prstGeom>
           <a:solidFill>
-            <a:srgbClr val="2DD4BF"/>
+            <a:srgbClr val="162235"/>
           </a:solidFill>
           <a:ln w="12700">
             <a:solidFill>
-              <a:srgbClr val="2DD4BF"/>
+              <a:srgbClr val="06B6D4"/>
             </a:solidFill>
             <a:prstDash val="solid"/>
           </a:ln>
@@ -6720,7 +7508,135 @@
       </p:sp>
       <p:sp>
         <p:nvSpPr>
+          <p:cNvPr id="3" name="Text 1"/>
+          <p:cNvSpPr/>
+          <p:nvPr/>
+        </p:nvSpPr>
+        <p:spPr>
+          <a:xfrm>
+            <a:off x="731520" y="384048"/>
+            <a:ext cx="2926080" cy="219456"/>
+          </a:xfrm>
+          <a:prstGeom prst="rect">
+            <a:avLst/>
+          </a:prstGeom>
+          <a:noFill/>
+          <a:ln/>
+        </p:spPr>
+        <p:txBody>
+          <a:bodyPr wrap="square" rtlCol="0" anchor="ctr"/>
+          <a:lstStyle/>
+          <a:p>
+            <a:pPr algn="ctr" indent="0" marL="0">
+              <a:buNone/>
+            </a:pPr>
+            <a:r>
+              <a:rPr lang="en-US" sz="950" b="1" dirty="0">
+                <a:solidFill>
+                  <a:srgbClr val="22D3EE"/>
+                </a:solidFill>
+                <a:latin typeface="Segoe UI" pitchFamily="34" charset="0"/>
+                <a:ea typeface="Segoe UI" pitchFamily="34" charset="-122"/>
+                <a:cs typeface="Segoe UI" pitchFamily="34" charset="-120"/>
+              </a:rPr>
+              <a:t>PROBLEM STATEMENT</a:t>
+            </a:r>
+            <a:endParaRPr lang="en-US" sz="950" dirty="0"/>
+          </a:p>
+        </p:txBody>
+      </p:sp>
+      <p:sp>
+        <p:nvSpPr>
+          <p:cNvPr id="4" name="Text 2"/>
+          <p:cNvSpPr/>
+          <p:nvPr/>
+        </p:nvSpPr>
+        <p:spPr>
+          <a:xfrm>
+            <a:off x="731520" y="713232"/>
+            <a:ext cx="10515600" cy="502920"/>
+          </a:xfrm>
+          <a:prstGeom prst="rect">
+            <a:avLst/>
+          </a:prstGeom>
+          <a:noFill/>
+          <a:ln/>
+        </p:spPr>
+        <p:txBody>
+          <a:bodyPr wrap="square" rtlCol="0" anchor="ctr"/>
+          <a:lstStyle/>
+          <a:p>
+            <a:pPr indent="0" marL="0">
+              <a:buNone/>
+            </a:pPr>
+            <a:r>
+              <a:rPr lang="en-US" sz="2200" b="1" dirty="0">
+                <a:solidFill>
+                  <a:srgbClr val="FFFFFF"/>
+                </a:solidFill>
+                <a:latin typeface="Segoe UI" pitchFamily="34" charset="0"/>
+                <a:ea typeface="Segoe UI" pitchFamily="34" charset="-122"/>
+                <a:cs typeface="Segoe UI" pitchFamily="34" charset="-120"/>
+              </a:rPr>
+              <a:t>Why ADHD Diagnosis Needs Computational Rigor</a:t>
+            </a:r>
+            <a:endParaRPr lang="en-US" sz="2200" dirty="0"/>
+          </a:p>
+        </p:txBody>
+      </p:sp>
+      <p:sp>
+        <p:nvSpPr>
           <p:cNvPr id="5" name="Shape 3"/>
+          <p:cNvSpPr/>
+          <p:nvPr/>
+        </p:nvSpPr>
+        <p:spPr>
+          <a:xfrm>
+            <a:off x="731520" y="1261872"/>
+            <a:ext cx="1645920" cy="36576"/>
+          </a:xfrm>
+          <a:prstGeom prst="rect">
+            <a:avLst/>
+          </a:prstGeom>
+          <a:solidFill>
+            <a:srgbClr val="06B6D4"/>
+          </a:solidFill>
+          <a:ln w="12700">
+            <a:solidFill>
+              <a:srgbClr val="06B6D4"/>
+            </a:solidFill>
+            <a:prstDash val="solid"/>
+          </a:ln>
+        </p:spPr>
+      </p:sp>
+      <p:sp>
+        <p:nvSpPr>
+          <p:cNvPr id="6" name="Shape 4"/>
+          <p:cNvSpPr/>
+          <p:nvPr/>
+        </p:nvSpPr>
+        <p:spPr>
+          <a:xfrm>
+            <a:off x="2377440" y="1261872"/>
+            <a:ext cx="1097280" cy="36576"/>
+          </a:xfrm>
+          <a:prstGeom prst="rect">
+            <a:avLst/>
+          </a:prstGeom>
+          <a:solidFill>
+            <a:srgbClr val="2563EB"/>
+          </a:solidFill>
+          <a:ln w="12700">
+            <a:solidFill>
+              <a:srgbClr val="2563EB"/>
+            </a:solidFill>
+            <a:prstDash val="solid"/>
+          </a:ln>
+        </p:spPr>
+      </p:sp>
+      <p:sp>
+        <p:nvSpPr>
+          <p:cNvPr id="7" name="Shape 5"/>
           <p:cNvSpPr/>
           <p:nvPr/>
         </p:nvSpPr>
@@ -6730,10 +7646,12 @@
             <a:ext cx="10698480" cy="1005840"/>
           </a:xfrm>
           <a:prstGeom prst="roundRect">
-            <a:avLst/>
+            <a:avLst>
+              <a:gd name="adj" fmla="val 10909"/>
+            </a:avLst>
           </a:prstGeom>
           <a:solidFill>
-            <a:srgbClr val="10151F"/>
+            <a:srgbClr val="121726"/>
           </a:solidFill>
           <a:ln w="12700">
             <a:solidFill>
@@ -6745,7 +7663,7 @@
       </p:sp>
       <p:sp>
         <p:nvSpPr>
-          <p:cNvPr id="6" name="Text 4"/>
+          <p:cNvPr id="8" name="Text 6"/>
           <p:cNvSpPr/>
           <p:nvPr/>
         </p:nvSpPr>
@@ -6770,7 +7688,7 @@
             <a:r>
               <a:rPr lang="en-US" sz="1400" b="1" dirty="0">
                 <a:solidFill>
-                  <a:srgbClr val="2DD4BF"/>
+                  <a:srgbClr val="22D3EE"/>
                 </a:solidFill>
                 <a:latin typeface="Segoe UI" pitchFamily="34" charset="0"/>
                 <a:ea typeface="Segoe UI" pitchFamily="34" charset="-122"/>
@@ -6784,7 +7702,7 @@
       </p:sp>
       <p:sp>
         <p:nvSpPr>
-          <p:cNvPr id="7" name="Text 5"/>
+          <p:cNvPr id="9" name="Text 7"/>
           <p:cNvSpPr/>
           <p:nvPr/>
         </p:nvSpPr>
@@ -6809,7 +7727,7 @@
             <a:r>
               <a:rPr lang="en-US" sz="1150" dirty="0">
                 <a:solidFill>
-                  <a:srgbClr val="CBD5E1"/>
+                  <a:srgbClr val="E2E8F0"/>
                 </a:solidFill>
                 <a:latin typeface="Segoe UI" pitchFamily="34" charset="0"/>
                 <a:ea typeface="Segoe UI" pitchFamily="34" charset="-122"/>
@@ -6823,7 +7741,7 @@
       </p:sp>
       <p:sp>
         <p:nvSpPr>
-          <p:cNvPr id="8" name="Shape 6"/>
+          <p:cNvPr id="10" name="Shape 8"/>
           <p:cNvSpPr/>
           <p:nvPr/>
         </p:nvSpPr>
@@ -6833,10 +7751,12 @@
             <a:ext cx="10698480" cy="1005840"/>
           </a:xfrm>
           <a:prstGeom prst="roundRect">
-            <a:avLst/>
+            <a:avLst>
+              <a:gd name="adj" fmla="val 10909"/>
+            </a:avLst>
           </a:prstGeom>
           <a:solidFill>
-            <a:srgbClr val="10151F"/>
+            <a:srgbClr val="121726"/>
           </a:solidFill>
           <a:ln w="12700">
             <a:solidFill>
@@ -6848,7 +7768,7 @@
       </p:sp>
       <p:sp>
         <p:nvSpPr>
-          <p:cNvPr id="9" name="Text 7"/>
+          <p:cNvPr id="11" name="Text 9"/>
           <p:cNvSpPr/>
           <p:nvPr/>
         </p:nvSpPr>
@@ -6873,13 +7793,13 @@
             <a:r>
               <a:rPr lang="en-US" sz="1400" b="1" dirty="0">
                 <a:solidFill>
-                  <a:srgbClr val="2DD4BF"/>
-                </a:solidFill>
-                <a:latin typeface="Segoe UI" pitchFamily="34" charset="0"/>
-                <a:ea typeface="Segoe UI" pitchFamily="34" charset="-122"/>
-                <a:cs typeface="Segoe UI" pitchFamily="34" charset="-120"/>
-              </a:rPr>
-              <a:t>02 · Subjective &amp; Delayed</a:t>
+                  <a:srgbClr val="22D3EE"/>
+                </a:solidFill>
+                <a:latin typeface="Segoe UI" pitchFamily="34" charset="0"/>
+                <a:ea typeface="Segoe UI" pitchFamily="34" charset="-122"/>
+                <a:cs typeface="Segoe UI" pitchFamily="34" charset="-120"/>
+              </a:rPr>
+              <a:t>02 · Subjective &amp; Delayed Diagnosis</a:t>
             </a:r>
             <a:endParaRPr lang="en-US" sz="1400" dirty="0"/>
           </a:p>
@@ -6887,7 +7807,7 @@
       </p:sp>
       <p:sp>
         <p:nvSpPr>
-          <p:cNvPr id="10" name="Text 8"/>
+          <p:cNvPr id="12" name="Text 10"/>
           <p:cNvSpPr/>
           <p:nvPr/>
         </p:nvSpPr>
@@ -6912,7 +7832,7 @@
             <a:r>
               <a:rPr lang="en-US" sz="1150" dirty="0">
                 <a:solidFill>
-                  <a:srgbClr val="CBD5E1"/>
+                  <a:srgbClr val="E2E8F0"/>
                 </a:solidFill>
                 <a:latin typeface="Segoe UI" pitchFamily="34" charset="0"/>
                 <a:ea typeface="Segoe UI" pitchFamily="34" charset="-122"/>
@@ -6926,7 +7846,7 @@
       </p:sp>
       <p:sp>
         <p:nvSpPr>
-          <p:cNvPr id="11" name="Shape 9"/>
+          <p:cNvPr id="13" name="Shape 11"/>
           <p:cNvSpPr/>
           <p:nvPr/>
         </p:nvSpPr>
@@ -6936,10 +7856,12 @@
             <a:ext cx="10698480" cy="1005840"/>
           </a:xfrm>
           <a:prstGeom prst="roundRect">
-            <a:avLst/>
+            <a:avLst>
+              <a:gd name="adj" fmla="val 10909"/>
+            </a:avLst>
           </a:prstGeom>
           <a:solidFill>
-            <a:srgbClr val="10151F"/>
+            <a:srgbClr val="121726"/>
           </a:solidFill>
           <a:ln w="12700">
             <a:solidFill>
@@ -6951,7 +7873,7 @@
       </p:sp>
       <p:sp>
         <p:nvSpPr>
-          <p:cNvPr id="12" name="Text 10"/>
+          <p:cNvPr id="14" name="Text 12"/>
           <p:cNvSpPr/>
           <p:nvPr/>
         </p:nvSpPr>
@@ -6976,13 +7898,13 @@
             <a:r>
               <a:rPr lang="en-US" sz="1400" b="1" dirty="0">
                 <a:solidFill>
-                  <a:srgbClr val="2DD4BF"/>
-                </a:solidFill>
-                <a:latin typeface="Segoe UI" pitchFamily="34" charset="0"/>
-                <a:ea typeface="Segoe UI" pitchFamily="34" charset="-122"/>
-                <a:cs typeface="Segoe UI" pitchFamily="34" charset="-120"/>
-              </a:rPr>
-              <a:t>03 · Masking &amp; Gender Gap</a:t>
+                  <a:srgbClr val="22D3EE"/>
+                </a:solidFill>
+                <a:latin typeface="Segoe UI" pitchFamily="34" charset="0"/>
+                <a:ea typeface="Segoe UI" pitchFamily="34" charset="-122"/>
+                <a:cs typeface="Segoe UI" pitchFamily="34" charset="-120"/>
+              </a:rPr>
+              <a:t>03 · Masking &amp; The Under-Diagnosed Gender Gap</a:t>
             </a:r>
             <a:endParaRPr lang="en-US" sz="1400" dirty="0"/>
           </a:p>
@@ -6990,7 +7912,7 @@
       </p:sp>
       <p:sp>
         <p:nvSpPr>
-          <p:cNvPr id="13" name="Text 11"/>
+          <p:cNvPr id="15" name="Text 13"/>
           <p:cNvSpPr/>
           <p:nvPr/>
         </p:nvSpPr>
@@ -7015,13 +7937,13 @@
             <a:r>
               <a:rPr lang="en-US" sz="1150" dirty="0">
                 <a:solidFill>
-                  <a:srgbClr val="CBD5E1"/>
-                </a:solidFill>
-                <a:latin typeface="Segoe UI" pitchFamily="34" charset="0"/>
-                <a:ea typeface="Segoe UI" pitchFamily="34" charset="-122"/>
-                <a:cs typeface="Segoe UI" pitchFamily="34" charset="-120"/>
-              </a:rPr>
-              <a:t>High-IQ children and females frequently mask overt hyperactivity, exhibiting subtle inattention and suffering from delayed diagnosis.</a:t>
+                  <a:srgbClr val="E2E8F0"/>
+                </a:solidFill>
+                <a:latin typeface="Segoe UI" pitchFamily="34" charset="0"/>
+                <a:ea typeface="Segoe UI" pitchFamily="34" charset="-122"/>
+                <a:cs typeface="Segoe UI" pitchFamily="34" charset="-120"/>
+              </a:rPr>
+              <a:t>High-IQ children and females frequently mask overt hyperactivity, exhibiting subtle inattention and suffering from systemic delayed diagnosis.</a:t>
             </a:r>
             <a:endParaRPr lang="en-US" sz="1150" dirty="0"/>
           </a:p>
@@ -7029,7 +7951,7 @@
       </p:sp>
       <p:sp>
         <p:nvSpPr>
-          <p:cNvPr id="14" name="Shape 12"/>
+          <p:cNvPr id="16" name="Shape 14"/>
           <p:cNvSpPr/>
           <p:nvPr/>
         </p:nvSpPr>
@@ -7039,10 +7961,12 @@
             <a:ext cx="10698480" cy="1005840"/>
           </a:xfrm>
           <a:prstGeom prst="roundRect">
-            <a:avLst/>
+            <a:avLst>
+              <a:gd name="adj" fmla="val 10909"/>
+            </a:avLst>
           </a:prstGeom>
           <a:solidFill>
-            <a:srgbClr val="10151F"/>
+            <a:srgbClr val="121726"/>
           </a:solidFill>
           <a:ln w="12700">
             <a:solidFill>
@@ -7054,7 +7978,7 @@
       </p:sp>
       <p:sp>
         <p:nvSpPr>
-          <p:cNvPr id="15" name="Text 13"/>
+          <p:cNvPr id="17" name="Text 15"/>
           <p:cNvSpPr/>
           <p:nvPr/>
         </p:nvSpPr>
@@ -7079,13 +8003,13 @@
             <a:r>
               <a:rPr lang="en-US" sz="1400" b="1" dirty="0">
                 <a:solidFill>
-                  <a:srgbClr val="2DD4BF"/>
-                </a:solidFill>
-                <a:latin typeface="Segoe UI" pitchFamily="34" charset="0"/>
-                <a:ea typeface="Segoe UI" pitchFamily="34" charset="-122"/>
-                <a:cs typeface="Segoe UI" pitchFamily="34" charset="-120"/>
-              </a:rPr>
-              <a:t>04 · Consortium Site Bias</a:t>
+                  <a:srgbClr val="22D3EE"/>
+                </a:solidFill>
+                <a:latin typeface="Segoe UI" pitchFamily="34" charset="0"/>
+                <a:ea typeface="Segoe UI" pitchFamily="34" charset="-122"/>
+                <a:cs typeface="Segoe UI" pitchFamily="34" charset="-120"/>
+              </a:rPr>
+              <a:t>04 · Multi-Center Site Selection Bias</a:t>
             </a:r>
             <a:endParaRPr lang="en-US" sz="1400" dirty="0"/>
           </a:p>
@@ -7093,7 +8017,7 @@
       </p:sp>
       <p:sp>
         <p:nvSpPr>
-          <p:cNvPr id="16" name="Text 14"/>
+          <p:cNvPr id="18" name="Text 16"/>
           <p:cNvSpPr/>
           <p:nvPr/>
         </p:nvSpPr>
@@ -7118,13 +8042,13 @@
             <a:r>
               <a:rPr lang="en-US" sz="1150" dirty="0">
                 <a:solidFill>
-                  <a:srgbClr val="CBD5E1"/>
-                </a:solidFill>
-                <a:latin typeface="Segoe UI" pitchFamily="34" charset="0"/>
-                <a:ea typeface="Segoe UI" pitchFamily="34" charset="-122"/>
-                <a:cs typeface="Segoe UI" pitchFamily="34" charset="-120"/>
-              </a:rPr>
-              <a:t>Multicenter cohorts exhibit massive clinic prevalence shifts (0% to 58%), causing naive AI models to memorize hospital names instead of pathology.</a:t>
+                  <a:srgbClr val="E2E8F0"/>
+                </a:solidFill>
+                <a:latin typeface="Segoe UI" pitchFamily="34" charset="0"/>
+                <a:ea typeface="Segoe UI" pitchFamily="34" charset="-122"/>
+                <a:cs typeface="Segoe UI" pitchFamily="34" charset="-120"/>
+              </a:rPr>
+              <a:t>Consortium datasets exhibit massive clinic prevalence shifts (0% to 58%), causing naive AI models to memorize hospital names instead of disease biology.</a:t>
             </a:r>
             <a:endParaRPr lang="en-US" sz="1150" dirty="0"/>
           </a:p>
@@ -7144,7 +8068,7 @@
     <p:bg>
       <p:bgPr>
         <a:solidFill>
-          <a:srgbClr val="07090E"/>
+          <a:srgbClr val="090A0F"/>
         </a:solidFill>
       </p:bgPr>
     </p:bg>
@@ -7164,102 +8088,26 @@
       </p:grpSpPr>
       <p:sp>
         <p:nvSpPr>
-          <p:cNvPr id="2" name="Text 0"/>
-          <p:cNvSpPr/>
-          <p:nvPr/>
-        </p:nvSpPr>
-        <p:spPr>
-          <a:xfrm>
-            <a:off x="731520" y="411480"/>
-            <a:ext cx="9144000" cy="228600"/>
-          </a:xfrm>
-          <a:prstGeom prst="rect">
-            <a:avLst/>
-          </a:prstGeom>
-          <a:noFill/>
-          <a:ln/>
-        </p:spPr>
-        <p:txBody>
-          <a:bodyPr wrap="square" rtlCol="0" anchor="ctr"/>
-          <a:lstStyle/>
-          <a:p>
-            <a:pPr indent="0" marL="0">
-              <a:buNone/>
-            </a:pPr>
-            <a:r>
-              <a:rPr lang="en-US" sz="1000" b="1" dirty="0">
-                <a:solidFill>
-                  <a:srgbClr val="2DD4BF"/>
-                </a:solidFill>
-                <a:latin typeface="Segoe UI" pitchFamily="34" charset="0"/>
-                <a:ea typeface="Segoe UI" pitchFamily="34" charset="-122"/>
-                <a:cs typeface="Segoe UI" pitchFamily="34" charset="-120"/>
-              </a:rPr>
-              <a:t>PROJECT SCOPE</a:t>
-            </a:r>
-            <a:endParaRPr lang="en-US" sz="1000" dirty="0"/>
-          </a:p>
-        </p:txBody>
-      </p:sp>
-      <p:sp>
-        <p:nvSpPr>
-          <p:cNvPr id="3" name="Text 1"/>
-          <p:cNvSpPr/>
-          <p:nvPr/>
-        </p:nvSpPr>
-        <p:spPr>
-          <a:xfrm>
-            <a:off x="731520" y="685800"/>
-            <a:ext cx="10515600" cy="502920"/>
-          </a:xfrm>
-          <a:prstGeom prst="rect">
-            <a:avLst/>
-          </a:prstGeom>
-          <a:noFill/>
-          <a:ln/>
-        </p:spPr>
-        <p:txBody>
-          <a:bodyPr wrap="square" rtlCol="0" anchor="ctr"/>
-          <a:lstStyle/>
-          <a:p>
-            <a:pPr indent="0" marL="0">
-              <a:buNone/>
-            </a:pPr>
-            <a:r>
-              <a:rPr lang="en-US" sz="2100" b="1" dirty="0">
-                <a:solidFill>
-                  <a:srgbClr val="FFFFFF"/>
-                </a:solidFill>
-                <a:latin typeface="Segoe UI" pitchFamily="34" charset="0"/>
-                <a:ea typeface="Segoe UI" pitchFamily="34" charset="-122"/>
-                <a:cs typeface="Segoe UI" pitchFamily="34" charset="-120"/>
-              </a:rPr>
-              <a:t>What Exactly Was Built &amp; Delivered</a:t>
-            </a:r>
-            <a:endParaRPr lang="en-US" sz="2100" dirty="0"/>
-          </a:p>
-        </p:txBody>
-      </p:sp>
-      <p:sp>
-        <p:nvSpPr>
-          <p:cNvPr id="4" name="Shape 2"/>
-          <p:cNvSpPr/>
-          <p:nvPr/>
-        </p:nvSpPr>
-        <p:spPr>
-          <a:xfrm>
-            <a:off x="731520" y="1234440"/>
-            <a:ext cx="1828800" cy="36576"/>
-          </a:xfrm>
-          <a:prstGeom prst="rect">
-            <a:avLst/>
+          <p:cNvPr id="2" name="Shape 0"/>
+          <p:cNvSpPr/>
+          <p:nvPr/>
+        </p:nvSpPr>
+        <p:spPr>
+          <a:xfrm>
+            <a:off x="731520" y="365760"/>
+            <a:ext cx="2926080" cy="256032"/>
+          </a:xfrm>
+          <a:prstGeom prst="roundRect">
+            <a:avLst>
+              <a:gd name="adj" fmla="val 50000"/>
+            </a:avLst>
           </a:prstGeom>
           <a:solidFill>
-            <a:srgbClr val="2DD4BF"/>
+            <a:srgbClr val="162235"/>
           </a:solidFill>
           <a:ln w="12700">
             <a:solidFill>
-              <a:srgbClr val="2DD4BF"/>
+              <a:srgbClr val="06B6D4"/>
             </a:solidFill>
             <a:prstDash val="solid"/>
           </a:ln>
@@ -7267,7 +8115,135 @@
       </p:sp>
       <p:sp>
         <p:nvSpPr>
+          <p:cNvPr id="3" name="Text 1"/>
+          <p:cNvSpPr/>
+          <p:nvPr/>
+        </p:nvSpPr>
+        <p:spPr>
+          <a:xfrm>
+            <a:off x="731520" y="384048"/>
+            <a:ext cx="2926080" cy="219456"/>
+          </a:xfrm>
+          <a:prstGeom prst="rect">
+            <a:avLst/>
+          </a:prstGeom>
+          <a:noFill/>
+          <a:ln/>
+        </p:spPr>
+        <p:txBody>
+          <a:bodyPr wrap="square" rtlCol="0" anchor="ctr"/>
+          <a:lstStyle/>
+          <a:p>
+            <a:pPr algn="ctr" indent="0" marL="0">
+              <a:buNone/>
+            </a:pPr>
+            <a:r>
+              <a:rPr lang="en-US" sz="950" b="1" dirty="0">
+                <a:solidFill>
+                  <a:srgbClr val="22D3EE"/>
+                </a:solidFill>
+                <a:latin typeface="Segoe UI" pitchFamily="34" charset="0"/>
+                <a:ea typeface="Segoe UI" pitchFamily="34" charset="-122"/>
+                <a:cs typeface="Segoe UI" pitchFamily="34" charset="-120"/>
+              </a:rPr>
+              <a:t>PROJECT SCOPE</a:t>
+            </a:r>
+            <a:endParaRPr lang="en-US" sz="950" dirty="0"/>
+          </a:p>
+        </p:txBody>
+      </p:sp>
+      <p:sp>
+        <p:nvSpPr>
+          <p:cNvPr id="4" name="Text 2"/>
+          <p:cNvSpPr/>
+          <p:nvPr/>
+        </p:nvSpPr>
+        <p:spPr>
+          <a:xfrm>
+            <a:off x="731520" y="713232"/>
+            <a:ext cx="10515600" cy="502920"/>
+          </a:xfrm>
+          <a:prstGeom prst="rect">
+            <a:avLst/>
+          </a:prstGeom>
+          <a:noFill/>
+          <a:ln/>
+        </p:spPr>
+        <p:txBody>
+          <a:bodyPr wrap="square" rtlCol="0" anchor="ctr"/>
+          <a:lstStyle/>
+          <a:p>
+            <a:pPr indent="0" marL="0">
+              <a:buNone/>
+            </a:pPr>
+            <a:r>
+              <a:rPr lang="en-US" sz="2200" b="1" dirty="0">
+                <a:solidFill>
+                  <a:srgbClr val="FFFFFF"/>
+                </a:solidFill>
+                <a:latin typeface="Segoe UI" pitchFamily="34" charset="0"/>
+                <a:ea typeface="Segoe UI" pitchFamily="34" charset="-122"/>
+                <a:cs typeface="Segoe UI" pitchFamily="34" charset="-120"/>
+              </a:rPr>
+              <a:t>What Exactly Was Built &amp; Delivered in this Benchmark</a:t>
+            </a:r>
+            <a:endParaRPr lang="en-US" sz="2200" dirty="0"/>
+          </a:p>
+        </p:txBody>
+      </p:sp>
+      <p:sp>
+        <p:nvSpPr>
           <p:cNvPr id="5" name="Shape 3"/>
+          <p:cNvSpPr/>
+          <p:nvPr/>
+        </p:nvSpPr>
+        <p:spPr>
+          <a:xfrm>
+            <a:off x="731520" y="1261872"/>
+            <a:ext cx="1645920" cy="36576"/>
+          </a:xfrm>
+          <a:prstGeom prst="rect">
+            <a:avLst/>
+          </a:prstGeom>
+          <a:solidFill>
+            <a:srgbClr val="06B6D4"/>
+          </a:solidFill>
+          <a:ln w="12700">
+            <a:solidFill>
+              <a:srgbClr val="06B6D4"/>
+            </a:solidFill>
+            <a:prstDash val="solid"/>
+          </a:ln>
+        </p:spPr>
+      </p:sp>
+      <p:sp>
+        <p:nvSpPr>
+          <p:cNvPr id="6" name="Shape 4"/>
+          <p:cNvSpPr/>
+          <p:nvPr/>
+        </p:nvSpPr>
+        <p:spPr>
+          <a:xfrm>
+            <a:off x="2377440" y="1261872"/>
+            <a:ext cx="1097280" cy="36576"/>
+          </a:xfrm>
+          <a:prstGeom prst="rect">
+            <a:avLst/>
+          </a:prstGeom>
+          <a:solidFill>
+            <a:srgbClr val="2563EB"/>
+          </a:solidFill>
+          <a:ln w="12700">
+            <a:solidFill>
+              <a:srgbClr val="2563EB"/>
+            </a:solidFill>
+            <a:prstDash val="solid"/>
+          </a:ln>
+        </p:spPr>
+      </p:sp>
+      <p:sp>
+        <p:nvSpPr>
+          <p:cNvPr id="7" name="Shape 5"/>
           <p:cNvSpPr/>
           <p:nvPr/>
         </p:nvSpPr>
@@ -7277,10 +8253,12 @@
             <a:ext cx="5212080" cy="1325880"/>
           </a:xfrm>
           <a:prstGeom prst="roundRect">
-            <a:avLst/>
+            <a:avLst>
+              <a:gd name="adj" fmla="val 8276"/>
+            </a:avLst>
           </a:prstGeom>
           <a:solidFill>
-            <a:srgbClr val="10151F"/>
+            <a:srgbClr val="121726"/>
           </a:solidFill>
           <a:ln w="12700">
             <a:solidFill>
@@ -7292,7 +8270,7 @@
       </p:sp>
       <p:sp>
         <p:nvSpPr>
-          <p:cNvPr id="6" name="Text 4"/>
+          <p:cNvPr id="8" name="Text 6"/>
           <p:cNvSpPr/>
           <p:nvPr/>
         </p:nvSpPr>
@@ -7317,13 +8295,13 @@
             <a:r>
               <a:rPr lang="en-US" sz="1400" b="1" dirty="0">
                 <a:solidFill>
-                  <a:srgbClr val="2DD4BF"/>
-                </a:solidFill>
-                <a:latin typeface="Segoe UI" pitchFamily="34" charset="0"/>
-                <a:ea typeface="Segoe UI" pitchFamily="34" charset="-122"/>
-                <a:cs typeface="Segoe UI" pitchFamily="34" charset="-120"/>
-              </a:rPr>
-              <a:t>Data Ingestion &amp; Cleaning</a:t>
+                  <a:srgbClr val="22D3EE"/>
+                </a:solidFill>
+                <a:latin typeface="Segoe UI" pitchFamily="34" charset="0"/>
+                <a:ea typeface="Segoe UI" pitchFamily="34" charset="-122"/>
+                <a:cs typeface="Segoe UI" pitchFamily="34" charset="-120"/>
+              </a:rPr>
+              <a:t>Data Ingestion &amp; Harmonization</a:t>
             </a:r>
             <a:endParaRPr lang="en-US" sz="1400" dirty="0"/>
           </a:p>
@@ -7331,7 +8309,7 @@
       </p:sp>
       <p:sp>
         <p:nvSpPr>
-          <p:cNvPr id="7" name="Text 5"/>
+          <p:cNvPr id="9" name="Text 7"/>
           <p:cNvSpPr/>
           <p:nvPr/>
         </p:nvSpPr>
@@ -7356,7 +8334,7 @@
             <a:r>
               <a:rPr lang="en-US" sz="1150" dirty="0">
                 <a:solidFill>
-                  <a:srgbClr val="CBD5E1"/>
+                  <a:srgbClr val="E2E8F0"/>
                 </a:solidFill>
                 <a:latin typeface="Segoe UI" pitchFamily="34" charset="0"/>
                 <a:ea typeface="Segoe UI" pitchFamily="34" charset="-122"/>
@@ -7370,7 +8348,7 @@
       </p:sp>
       <p:sp>
         <p:nvSpPr>
-          <p:cNvPr id="8" name="Shape 6"/>
+          <p:cNvPr id="10" name="Shape 8"/>
           <p:cNvSpPr/>
           <p:nvPr/>
         </p:nvSpPr>
@@ -7380,10 +8358,12 @@
             <a:ext cx="5212080" cy="1325880"/>
           </a:xfrm>
           <a:prstGeom prst="roundRect">
-            <a:avLst/>
+            <a:avLst>
+              <a:gd name="adj" fmla="val 8276"/>
+            </a:avLst>
           </a:prstGeom>
           <a:solidFill>
-            <a:srgbClr val="10151F"/>
+            <a:srgbClr val="121726"/>
           </a:solidFill>
           <a:ln w="12700">
             <a:solidFill>
@@ -7395,7 +8375,7 @@
       </p:sp>
       <p:sp>
         <p:nvSpPr>
-          <p:cNvPr id="9" name="Text 7"/>
+          <p:cNvPr id="11" name="Text 9"/>
           <p:cNvSpPr/>
           <p:nvPr/>
         </p:nvSpPr>
@@ -7420,7 +8400,7 @@
             <a:r>
               <a:rPr lang="en-US" sz="1400" b="1" dirty="0">
                 <a:solidFill>
-                  <a:srgbClr val="2DD4BF"/>
+                  <a:srgbClr val="22D3EE"/>
                 </a:solidFill>
                 <a:latin typeface="Segoe UI" pitchFamily="34" charset="0"/>
                 <a:ea typeface="Segoe UI" pitchFamily="34" charset="-122"/>
@@ -7434,7 +8414,7 @@
       </p:sp>
       <p:sp>
         <p:nvSpPr>
-          <p:cNvPr id="10" name="Text 8"/>
+          <p:cNvPr id="12" name="Text 10"/>
           <p:cNvSpPr/>
           <p:nvPr/>
         </p:nvSpPr>
@@ -7459,7 +8439,7 @@
             <a:r>
               <a:rPr lang="en-US" sz="1150" dirty="0">
                 <a:solidFill>
-                  <a:srgbClr val="CBD5E1"/>
+                  <a:srgbClr val="E2E8F0"/>
                 </a:solidFill>
                 <a:latin typeface="Segoe UI" pitchFamily="34" charset="0"/>
                 <a:ea typeface="Segoe UI" pitchFamily="34" charset="-122"/>
@@ -7473,7 +8453,7 @@
       </p:sp>
       <p:sp>
         <p:nvSpPr>
-          <p:cNvPr id="11" name="Shape 9"/>
+          <p:cNvPr id="13" name="Shape 11"/>
           <p:cNvSpPr/>
           <p:nvPr/>
         </p:nvSpPr>
@@ -7483,10 +8463,12 @@
             <a:ext cx="5212080" cy="1325880"/>
           </a:xfrm>
           <a:prstGeom prst="roundRect">
-            <a:avLst/>
+            <a:avLst>
+              <a:gd name="adj" fmla="val 8276"/>
+            </a:avLst>
           </a:prstGeom>
           <a:solidFill>
-            <a:srgbClr val="10151F"/>
+            <a:srgbClr val="121726"/>
           </a:solidFill>
           <a:ln w="12700">
             <a:solidFill>
@@ -7498,7 +8480,7 @@
       </p:sp>
       <p:sp>
         <p:nvSpPr>
-          <p:cNvPr id="12" name="Text 10"/>
+          <p:cNvPr id="14" name="Text 12"/>
           <p:cNvSpPr/>
           <p:nvPr/>
         </p:nvSpPr>
@@ -7523,7 +8505,7 @@
             <a:r>
               <a:rPr lang="en-US" sz="1400" b="1" dirty="0">
                 <a:solidFill>
-                  <a:srgbClr val="2DD4BF"/>
+                  <a:srgbClr val="22D3EE"/>
                 </a:solidFill>
                 <a:latin typeface="Segoe UI" pitchFamily="34" charset="0"/>
                 <a:ea typeface="Segoe UI" pitchFamily="34" charset="-122"/>
@@ -7537,7 +8519,7 @@
       </p:sp>
       <p:sp>
         <p:nvSpPr>
-          <p:cNvPr id="13" name="Text 11"/>
+          <p:cNvPr id="15" name="Text 13"/>
           <p:cNvSpPr/>
           <p:nvPr/>
         </p:nvSpPr>
@@ -7562,7 +8544,7 @@
             <a:r>
               <a:rPr lang="en-US" sz="1150" dirty="0">
                 <a:solidFill>
-                  <a:srgbClr val="CBD5E1"/>
+                  <a:srgbClr val="E2E8F0"/>
                 </a:solidFill>
                 <a:latin typeface="Segoe UI" pitchFamily="34" charset="0"/>
                 <a:ea typeface="Segoe UI" pitchFamily="34" charset="-122"/>
@@ -7576,7 +8558,7 @@
       </p:sp>
       <p:sp>
         <p:nvSpPr>
-          <p:cNvPr id="14" name="Shape 12"/>
+          <p:cNvPr id="16" name="Shape 14"/>
           <p:cNvSpPr/>
           <p:nvPr/>
         </p:nvSpPr>
@@ -7586,10 +8568,12 @@
             <a:ext cx="5212080" cy="1325880"/>
           </a:xfrm>
           <a:prstGeom prst="roundRect">
-            <a:avLst/>
+            <a:avLst>
+              <a:gd name="adj" fmla="val 8276"/>
+            </a:avLst>
           </a:prstGeom>
           <a:solidFill>
-            <a:srgbClr val="10151F"/>
+            <a:srgbClr val="121726"/>
           </a:solidFill>
           <a:ln w="12700">
             <a:solidFill>
@@ -7601,7 +8585,7 @@
       </p:sp>
       <p:sp>
         <p:nvSpPr>
-          <p:cNvPr id="15" name="Text 13"/>
+          <p:cNvPr id="17" name="Text 15"/>
           <p:cNvSpPr/>
           <p:nvPr/>
         </p:nvSpPr>
@@ -7626,7 +8610,7 @@
             <a:r>
               <a:rPr lang="en-US" sz="1400" b="1" dirty="0">
                 <a:solidFill>
-                  <a:srgbClr val="2DD4BF"/>
+                  <a:srgbClr val="22D3EE"/>
                 </a:solidFill>
                 <a:latin typeface="Segoe UI" pitchFamily="34" charset="0"/>
                 <a:ea typeface="Segoe UI" pitchFamily="34" charset="-122"/>
@@ -7640,7 +8624,7 @@
       </p:sp>
       <p:sp>
         <p:nvSpPr>
-          <p:cNvPr id="16" name="Text 14"/>
+          <p:cNvPr id="18" name="Text 16"/>
           <p:cNvSpPr/>
           <p:nvPr/>
         </p:nvSpPr>
@@ -7665,7 +8649,7 @@
             <a:r>
               <a:rPr lang="en-US" sz="1150" dirty="0">
                 <a:solidFill>
-                  <a:srgbClr val="CBD5E1"/>
+                  <a:srgbClr val="E2E8F0"/>
                 </a:solidFill>
                 <a:latin typeface="Segoe UI" pitchFamily="34" charset="0"/>
                 <a:ea typeface="Segoe UI" pitchFamily="34" charset="-122"/>
@@ -7679,7 +8663,7 @@
       </p:sp>
       <p:sp>
         <p:nvSpPr>
-          <p:cNvPr id="17" name="Shape 15"/>
+          <p:cNvPr id="19" name="Shape 17"/>
           <p:cNvSpPr/>
           <p:nvPr/>
         </p:nvSpPr>
@@ -7689,10 +8673,12 @@
             <a:ext cx="5212080" cy="1325880"/>
           </a:xfrm>
           <a:prstGeom prst="roundRect">
-            <a:avLst/>
+            <a:avLst>
+              <a:gd name="adj" fmla="val 8276"/>
+            </a:avLst>
           </a:prstGeom>
           <a:solidFill>
-            <a:srgbClr val="10151F"/>
+            <a:srgbClr val="121726"/>
           </a:solidFill>
           <a:ln w="12700">
             <a:solidFill>
@@ -7704,7 +8690,7 @@
       </p:sp>
       <p:sp>
         <p:nvSpPr>
-          <p:cNvPr id="18" name="Text 16"/>
+          <p:cNvPr id="20" name="Text 18"/>
           <p:cNvSpPr/>
           <p:nvPr/>
         </p:nvSpPr>
@@ -7729,7 +8715,7 @@
             <a:r>
               <a:rPr lang="en-US" sz="1400" b="1" dirty="0">
                 <a:solidFill>
-                  <a:srgbClr val="2DD4BF"/>
+                  <a:srgbClr val="22D3EE"/>
                 </a:solidFill>
                 <a:latin typeface="Segoe UI" pitchFamily="34" charset="0"/>
                 <a:ea typeface="Segoe UI" pitchFamily="34" charset="-122"/>
@@ -7743,7 +8729,7 @@
       </p:sp>
       <p:sp>
         <p:nvSpPr>
-          <p:cNvPr id="19" name="Text 17"/>
+          <p:cNvPr id="21" name="Text 19"/>
           <p:cNvSpPr/>
           <p:nvPr/>
         </p:nvSpPr>
@@ -7768,13 +8754,13 @@
             <a:r>
               <a:rPr lang="en-US" sz="1150" dirty="0">
                 <a:solidFill>
-                  <a:srgbClr val="CBD5E1"/>
-                </a:solidFill>
-                <a:latin typeface="Segoe UI" pitchFamily="34" charset="0"/>
-                <a:ea typeface="Segoe UI" pitchFamily="34" charset="-122"/>
-                <a:cs typeface="Segoe UI" pitchFamily="34" charset="-120"/>
-              </a:rPr>
-              <a:t>Decomposed black-box decisions with SHAP beeswarm/force plots, uncovering and fixing the NYU handedness artifact.</a:t>
+                  <a:srgbClr val="E2E8F0"/>
+                </a:solidFill>
+                <a:latin typeface="Segoe UI" pitchFamily="34" charset="0"/>
+                <a:ea typeface="Segoe UI" pitchFamily="34" charset="-122"/>
+                <a:cs typeface="Segoe UI" pitchFamily="34" charset="-120"/>
+              </a:rPr>
+              <a:t>Decomposed black-box decisions with SHAP beeswarm/force plots, uncovering and fixing the NYU handedness recording artifact.</a:t>
             </a:r>
             <a:endParaRPr lang="en-US" sz="1150" dirty="0"/>
           </a:p>
@@ -7782,7 +8768,7 @@
       </p:sp>
       <p:sp>
         <p:nvSpPr>
-          <p:cNvPr id="20" name="Shape 18"/>
+          <p:cNvPr id="22" name="Shape 20"/>
           <p:cNvSpPr/>
           <p:nvPr/>
         </p:nvSpPr>
@@ -7792,10 +8778,12 @@
             <a:ext cx="5212080" cy="1325880"/>
           </a:xfrm>
           <a:prstGeom prst="roundRect">
-            <a:avLst/>
+            <a:avLst>
+              <a:gd name="adj" fmla="val 8276"/>
+            </a:avLst>
           </a:prstGeom>
           <a:solidFill>
-            <a:srgbClr val="10151F"/>
+            <a:srgbClr val="121726"/>
           </a:solidFill>
           <a:ln w="12700">
             <a:solidFill>
@@ -7807,7 +8795,7 @@
       </p:sp>
       <p:sp>
         <p:nvSpPr>
-          <p:cNvPr id="21" name="Text 19"/>
+          <p:cNvPr id="23" name="Text 21"/>
           <p:cNvSpPr/>
           <p:nvPr/>
         </p:nvSpPr>
@@ -7832,7 +8820,7 @@
             <a:r>
               <a:rPr lang="en-US" sz="1400" b="1" dirty="0">
                 <a:solidFill>
-                  <a:srgbClr val="2DD4BF"/>
+                  <a:srgbClr val="22D3EE"/>
                 </a:solidFill>
                 <a:latin typeface="Segoe UI" pitchFamily="34" charset="0"/>
                 <a:ea typeface="Segoe UI" pitchFamily="34" charset="-122"/>
@@ -7846,7 +8834,7 @@
       </p:sp>
       <p:sp>
         <p:nvSpPr>
-          <p:cNvPr id="22" name="Text 20"/>
+          <p:cNvPr id="24" name="Text 22"/>
           <p:cNvSpPr/>
           <p:nvPr/>
         </p:nvSpPr>
@@ -7871,7 +8859,7 @@
             <a:r>
               <a:rPr lang="en-US" sz="1150" dirty="0">
                 <a:solidFill>
-                  <a:srgbClr val="CBD5E1"/>
+                  <a:srgbClr val="E2E8F0"/>
                 </a:solidFill>
                 <a:latin typeface="Segoe UI" pitchFamily="34" charset="0"/>
                 <a:ea typeface="Segoe UI" pitchFamily="34" charset="-122"/>
@@ -7897,7 +8885,7 @@
     <p:bg>
       <p:bgPr>
         <a:solidFill>
-          <a:srgbClr val="07090E"/>
+          <a:srgbClr val="090A0F"/>
         </a:solidFill>
       </p:bgPr>
     </p:bg>
@@ -7917,102 +8905,26 @@
       </p:grpSpPr>
       <p:sp>
         <p:nvSpPr>
-          <p:cNvPr id="2" name="Text 0"/>
-          <p:cNvSpPr/>
-          <p:nvPr/>
-        </p:nvSpPr>
-        <p:spPr>
-          <a:xfrm>
-            <a:off x="731520" y="411480"/>
-            <a:ext cx="9144000" cy="228600"/>
-          </a:xfrm>
-          <a:prstGeom prst="rect">
-            <a:avLst/>
-          </a:prstGeom>
-          <a:noFill/>
-          <a:ln/>
-        </p:spPr>
-        <p:txBody>
-          <a:bodyPr wrap="square" rtlCol="0" anchor="ctr"/>
-          <a:lstStyle/>
-          <a:p>
-            <a:pPr indent="0" marL="0">
-              <a:buNone/>
-            </a:pPr>
-            <a:r>
-              <a:rPr lang="en-US" sz="1000" b="1" dirty="0">
-                <a:solidFill>
-                  <a:srgbClr val="2DD4BF"/>
-                </a:solidFill>
-                <a:latin typeface="Segoe UI" pitchFamily="34" charset="0"/>
-                <a:ea typeface="Segoe UI" pitchFamily="34" charset="-122"/>
-                <a:cs typeface="Segoe UI" pitchFamily="34" charset="-120"/>
-              </a:rPr>
-              <a:t>PHASE 1: ETL PIPELINE</a:t>
-            </a:r>
-            <a:endParaRPr lang="en-US" sz="1000" dirty="0"/>
-          </a:p>
-        </p:txBody>
-      </p:sp>
-      <p:sp>
-        <p:nvSpPr>
-          <p:cNvPr id="3" name="Text 1"/>
-          <p:cNvSpPr/>
-          <p:nvPr/>
-        </p:nvSpPr>
-        <p:spPr>
-          <a:xfrm>
-            <a:off x="731520" y="685800"/>
-            <a:ext cx="10515600" cy="502920"/>
-          </a:xfrm>
-          <a:prstGeom prst="rect">
-            <a:avLst/>
-          </a:prstGeom>
-          <a:noFill/>
-          <a:ln/>
-        </p:spPr>
-        <p:txBody>
-          <a:bodyPr wrap="square" rtlCol="0" anchor="ctr"/>
-          <a:lstStyle/>
-          <a:p>
-            <a:pPr indent="0" marL="0">
-              <a:buNone/>
-            </a:pPr>
-            <a:r>
-              <a:rPr lang="en-US" sz="2100" b="1" dirty="0">
-                <a:solidFill>
-                  <a:srgbClr val="FFFFFF"/>
-                </a:solidFill>
-                <a:latin typeface="Segoe UI" pitchFamily="34" charset="0"/>
-                <a:ea typeface="Segoe UI" pitchFamily="34" charset="-122"/>
-                <a:cs typeface="Segoe UI" pitchFamily="34" charset="-120"/>
-              </a:rPr>
-              <a:t>Multi-Center Clinical Data Harmonization</a:t>
-            </a:r>
-            <a:endParaRPr lang="en-US" sz="2100" dirty="0"/>
-          </a:p>
-        </p:txBody>
-      </p:sp>
-      <p:sp>
-        <p:nvSpPr>
-          <p:cNvPr id="4" name="Shape 2"/>
-          <p:cNvSpPr/>
-          <p:nvPr/>
-        </p:nvSpPr>
-        <p:spPr>
-          <a:xfrm>
-            <a:off x="731520" y="1234440"/>
-            <a:ext cx="1828800" cy="36576"/>
-          </a:xfrm>
-          <a:prstGeom prst="rect">
-            <a:avLst/>
+          <p:cNvPr id="2" name="Shape 0"/>
+          <p:cNvSpPr/>
+          <p:nvPr/>
+        </p:nvSpPr>
+        <p:spPr>
+          <a:xfrm>
+            <a:off x="731520" y="365760"/>
+            <a:ext cx="2926080" cy="256032"/>
+          </a:xfrm>
+          <a:prstGeom prst="roundRect">
+            <a:avLst>
+              <a:gd name="adj" fmla="val 50000"/>
+            </a:avLst>
           </a:prstGeom>
           <a:solidFill>
-            <a:srgbClr val="2DD4BF"/>
+            <a:srgbClr val="162235"/>
           </a:solidFill>
           <a:ln w="12700">
             <a:solidFill>
-              <a:srgbClr val="2DD4BF"/>
+              <a:srgbClr val="06B6D4"/>
             </a:solidFill>
             <a:prstDash val="solid"/>
           </a:ln>
@@ -8020,7 +8932,135 @@
       </p:sp>
       <p:sp>
         <p:nvSpPr>
+          <p:cNvPr id="3" name="Text 1"/>
+          <p:cNvSpPr/>
+          <p:nvPr/>
+        </p:nvSpPr>
+        <p:spPr>
+          <a:xfrm>
+            <a:off x="731520" y="384048"/>
+            <a:ext cx="2926080" cy="219456"/>
+          </a:xfrm>
+          <a:prstGeom prst="rect">
+            <a:avLst/>
+          </a:prstGeom>
+          <a:noFill/>
+          <a:ln/>
+        </p:spPr>
+        <p:txBody>
+          <a:bodyPr wrap="square" rtlCol="0" anchor="ctr"/>
+          <a:lstStyle/>
+          <a:p>
+            <a:pPr algn="ctr" indent="0" marL="0">
+              <a:buNone/>
+            </a:pPr>
+            <a:r>
+              <a:rPr lang="en-US" sz="950" b="1" dirty="0">
+                <a:solidFill>
+                  <a:srgbClr val="22D3EE"/>
+                </a:solidFill>
+                <a:latin typeface="Segoe UI" pitchFamily="34" charset="0"/>
+                <a:ea typeface="Segoe UI" pitchFamily="34" charset="-122"/>
+                <a:cs typeface="Segoe UI" pitchFamily="34" charset="-120"/>
+              </a:rPr>
+              <a:t>PHASE 1: ETL PIPELINE</a:t>
+            </a:r>
+            <a:endParaRPr lang="en-US" sz="950" dirty="0"/>
+          </a:p>
+        </p:txBody>
+      </p:sp>
+      <p:sp>
+        <p:nvSpPr>
+          <p:cNvPr id="4" name="Text 2"/>
+          <p:cNvSpPr/>
+          <p:nvPr/>
+        </p:nvSpPr>
+        <p:spPr>
+          <a:xfrm>
+            <a:off x="731520" y="713232"/>
+            <a:ext cx="10515600" cy="502920"/>
+          </a:xfrm>
+          <a:prstGeom prst="rect">
+            <a:avLst/>
+          </a:prstGeom>
+          <a:noFill/>
+          <a:ln/>
+        </p:spPr>
+        <p:txBody>
+          <a:bodyPr wrap="square" rtlCol="0" anchor="ctr"/>
+          <a:lstStyle/>
+          <a:p>
+            <a:pPr indent="0" marL="0">
+              <a:buNone/>
+            </a:pPr>
+            <a:r>
+              <a:rPr lang="en-US" sz="2200" b="1" dirty="0">
+                <a:solidFill>
+                  <a:srgbClr val="FFFFFF"/>
+                </a:solidFill>
+                <a:latin typeface="Segoe UI" pitchFamily="34" charset="0"/>
+                <a:ea typeface="Segoe UI" pitchFamily="34" charset="-122"/>
+                <a:cs typeface="Segoe UI" pitchFamily="34" charset="-120"/>
+              </a:rPr>
+              <a:t>Multi-Center Clinical Data Harmonization</a:t>
+            </a:r>
+            <a:endParaRPr lang="en-US" sz="2200" dirty="0"/>
+          </a:p>
+        </p:txBody>
+      </p:sp>
+      <p:sp>
+        <p:nvSpPr>
           <p:cNvPr id="5" name="Shape 3"/>
+          <p:cNvSpPr/>
+          <p:nvPr/>
+        </p:nvSpPr>
+        <p:spPr>
+          <a:xfrm>
+            <a:off x="731520" y="1261872"/>
+            <a:ext cx="1645920" cy="36576"/>
+          </a:xfrm>
+          <a:prstGeom prst="rect">
+            <a:avLst/>
+          </a:prstGeom>
+          <a:solidFill>
+            <a:srgbClr val="06B6D4"/>
+          </a:solidFill>
+          <a:ln w="12700">
+            <a:solidFill>
+              <a:srgbClr val="06B6D4"/>
+            </a:solidFill>
+            <a:prstDash val="solid"/>
+          </a:ln>
+        </p:spPr>
+      </p:sp>
+      <p:sp>
+        <p:nvSpPr>
+          <p:cNvPr id="6" name="Shape 4"/>
+          <p:cNvSpPr/>
+          <p:nvPr/>
+        </p:nvSpPr>
+        <p:spPr>
+          <a:xfrm>
+            <a:off x="2377440" y="1261872"/>
+            <a:ext cx="1097280" cy="36576"/>
+          </a:xfrm>
+          <a:prstGeom prst="rect">
+            <a:avLst/>
+          </a:prstGeom>
+          <a:solidFill>
+            <a:srgbClr val="2563EB"/>
+          </a:solidFill>
+          <a:ln w="12700">
+            <a:solidFill>
+              <a:srgbClr val="2563EB"/>
+            </a:solidFill>
+            <a:prstDash val="solid"/>
+          </a:ln>
+        </p:spPr>
+      </p:sp>
+      <p:sp>
+        <p:nvSpPr>
+          <p:cNvPr id="7" name="Shape 5"/>
           <p:cNvSpPr/>
           <p:nvPr/>
         </p:nvSpPr>
@@ -8030,10 +9070,12 @@
             <a:ext cx="5029200" cy="4572000"/>
           </a:xfrm>
           <a:prstGeom prst="roundRect">
-            <a:avLst/>
+            <a:avLst>
+              <a:gd name="adj" fmla="val 3000"/>
+            </a:avLst>
           </a:prstGeom>
           <a:solidFill>
-            <a:srgbClr val="10151F"/>
+            <a:srgbClr val="121726"/>
           </a:solidFill>
           <a:ln w="12700">
             <a:solidFill>
@@ -8045,7 +9087,7 @@
       </p:sp>
       <p:sp>
         <p:nvSpPr>
-          <p:cNvPr id="6" name="Text 4"/>
+          <p:cNvPr id="8" name="Text 6"/>
           <p:cNvSpPr/>
           <p:nvPr/>
         </p:nvSpPr>
@@ -8070,7 +9112,7 @@
             <a:r>
               <a:rPr lang="en-US" sz="1500" b="1" dirty="0">
                 <a:solidFill>
-                  <a:srgbClr val="2DD4BF"/>
+                  <a:srgbClr val="22D3EE"/>
                 </a:solidFill>
                 <a:latin typeface="Segoe UI" pitchFamily="34" charset="0"/>
                 <a:ea typeface="Segoe UI" pitchFamily="34" charset="-122"/>
@@ -8084,7 +9126,7 @@
       </p:sp>
       <p:sp>
         <p:nvSpPr>
-          <p:cNvPr id="7" name="Text 5"/>
+          <p:cNvPr id="9" name="Text 7"/>
           <p:cNvSpPr/>
           <p:nvPr/>
         </p:nvSpPr>
@@ -8109,7 +9151,7 @@
             <a:r>
               <a:rPr lang="en-US" sz="1200" dirty="0">
                 <a:solidFill>
-                  <a:srgbClr val="CBD5E1"/>
+                  <a:srgbClr val="E2E8F0"/>
                 </a:solidFill>
                 <a:latin typeface="Segoe UI" pitchFamily="34" charset="0"/>
                 <a:ea typeface="Segoe UI" pitchFamily="34" charset="-122"/>
@@ -8132,7 +9174,7 @@
             <a:r>
               <a:rPr lang="en-US" sz="1200" dirty="0">
                 <a:solidFill>
-                  <a:srgbClr val="CBD5E1"/>
+                  <a:srgbClr val="E2E8F0"/>
                 </a:solidFill>
                 <a:latin typeface="Segoe UI" pitchFamily="34" charset="0"/>
                 <a:ea typeface="Segoe UI" pitchFamily="34" charset="-122"/>
@@ -8155,7 +9197,7 @@
             <a:r>
               <a:rPr lang="en-US" sz="1200" dirty="0">
                 <a:solidFill>
-                  <a:srgbClr val="CBD5E1"/>
+                  <a:srgbClr val="E2E8F0"/>
                 </a:solidFill>
                 <a:latin typeface="Segoe UI" pitchFamily="34" charset="0"/>
                 <a:ea typeface="Segoe UI" pitchFamily="34" charset="-122"/>
@@ -8178,7 +9220,7 @@
             <a:r>
               <a:rPr lang="en-US" sz="1200" dirty="0">
                 <a:solidFill>
-                  <a:srgbClr val="CBD5E1"/>
+                  <a:srgbClr val="E2E8F0"/>
                 </a:solidFill>
                 <a:latin typeface="Segoe UI" pitchFamily="34" charset="0"/>
                 <a:ea typeface="Segoe UI" pitchFamily="34" charset="-122"/>
@@ -8201,7 +9243,7 @@
             <a:r>
               <a:rPr lang="en-US" sz="1200" dirty="0">
                 <a:solidFill>
-                  <a:srgbClr val="CBD5E1"/>
+                  <a:srgbClr val="E2E8F0"/>
                 </a:solidFill>
                 <a:latin typeface="Segoe UI" pitchFamily="34" charset="0"/>
                 <a:ea typeface="Segoe UI" pitchFamily="34" charset="-122"/>
@@ -8224,7 +9266,7 @@
             <a:r>
               <a:rPr lang="en-US" sz="1200" dirty="0">
                 <a:solidFill>
-                  <a:srgbClr val="CBD5E1"/>
+                  <a:srgbClr val="E2E8F0"/>
                 </a:solidFill>
                 <a:latin typeface="Segoe UI" pitchFamily="34" charset="0"/>
                 <a:ea typeface="Segoe UI" pitchFamily="34" charset="-122"/>
@@ -8238,7 +9280,7 @@
       </p:sp>
       <p:pic>
         <p:nvPicPr>
-          <p:cNvPr id="8" name="Image 0" descr="C:\Users\hariv\OneDrive\Desktop\NeuroADHD\website\assets\img\01_raw_column_coverage.png">    </p:cNvPr>
+          <p:cNvPr id="10" name="Image 0" descr="C:\Users\hariv\OneDrive\Desktop\NeuroADHD\website\assets\img\01_raw_column_coverage.png">    </p:cNvPr>
           <p:cNvPicPr>
             <a:picLocks noChangeAspect="1"/>
           </p:cNvPicPr>
@@ -8274,7 +9316,7 @@
     <p:bg>
       <p:bgPr>
         <a:solidFill>
-          <a:srgbClr val="07090E"/>
+          <a:srgbClr val="090A0F"/>
         </a:solidFill>
       </p:bgPr>
     </p:bg>
@@ -8294,102 +9336,26 @@
       </p:grpSpPr>
       <p:sp>
         <p:nvSpPr>
-          <p:cNvPr id="2" name="Text 0"/>
-          <p:cNvSpPr/>
-          <p:nvPr/>
-        </p:nvSpPr>
-        <p:spPr>
-          <a:xfrm>
-            <a:off x="731520" y="411480"/>
-            <a:ext cx="9144000" cy="228600"/>
-          </a:xfrm>
-          <a:prstGeom prst="rect">
-            <a:avLst/>
-          </a:prstGeom>
-          <a:noFill/>
-          <a:ln/>
-        </p:spPr>
-        <p:txBody>
-          <a:bodyPr wrap="square" rtlCol="0" anchor="ctr"/>
-          <a:lstStyle/>
-          <a:p>
-            <a:pPr indent="0" marL="0">
-              <a:buNone/>
-            </a:pPr>
-            <a:r>
-              <a:rPr lang="en-US" sz="1000" b="1" dirty="0">
-                <a:solidFill>
-                  <a:srgbClr val="2DD4BF"/>
-                </a:solidFill>
-                <a:latin typeface="Segoe UI" pitchFamily="34" charset="0"/>
-                <a:ea typeface="Segoe UI" pitchFamily="34" charset="-122"/>
-                <a:cs typeface="Segoe UI" pitchFamily="34" charset="-120"/>
-              </a:rPr>
-              <a:t>PHASE 2: EXPLORATORY ANALYSIS</a:t>
-            </a:r>
-            <a:endParaRPr lang="en-US" sz="1000" dirty="0"/>
-          </a:p>
-        </p:txBody>
-      </p:sp>
-      <p:sp>
-        <p:nvSpPr>
-          <p:cNvPr id="3" name="Text 1"/>
-          <p:cNvSpPr/>
-          <p:nvPr/>
-        </p:nvSpPr>
-        <p:spPr>
-          <a:xfrm>
-            <a:off x="731520" y="685800"/>
-            <a:ext cx="10515600" cy="502920"/>
-          </a:xfrm>
-          <a:prstGeom prst="rect">
-            <a:avLst/>
-          </a:prstGeom>
-          <a:noFill/>
-          <a:ln/>
-        </p:spPr>
-        <p:txBody>
-          <a:bodyPr wrap="square" rtlCol="0" anchor="ctr"/>
-          <a:lstStyle/>
-          <a:p>
-            <a:pPr indent="0" marL="0">
-              <a:buNone/>
-            </a:pPr>
-            <a:r>
-              <a:rPr lang="en-US" sz="2100" b="1" dirty="0">
-                <a:solidFill>
-                  <a:srgbClr val="FFFFFF"/>
-                </a:solidFill>
-                <a:latin typeface="Segoe UI" pitchFamily="34" charset="0"/>
-                <a:ea typeface="Segoe UI" pitchFamily="34" charset="-122"/>
-                <a:cs typeface="Segoe UI" pitchFamily="34" charset="-120"/>
-              </a:rPr>
-              <a:t>Statistical Findings &amp; Cohen's d Effect Sizes</a:t>
-            </a:r>
-            <a:endParaRPr lang="en-US" sz="2100" dirty="0"/>
-          </a:p>
-        </p:txBody>
-      </p:sp>
-      <p:sp>
-        <p:nvSpPr>
-          <p:cNvPr id="4" name="Shape 2"/>
-          <p:cNvSpPr/>
-          <p:nvPr/>
-        </p:nvSpPr>
-        <p:spPr>
-          <a:xfrm>
-            <a:off x="731520" y="1234440"/>
-            <a:ext cx="1828800" cy="36576"/>
-          </a:xfrm>
-          <a:prstGeom prst="rect">
-            <a:avLst/>
+          <p:cNvPr id="2" name="Shape 0"/>
+          <p:cNvSpPr/>
+          <p:nvPr/>
+        </p:nvSpPr>
+        <p:spPr>
+          <a:xfrm>
+            <a:off x="731520" y="365760"/>
+            <a:ext cx="2926080" cy="256032"/>
+          </a:xfrm>
+          <a:prstGeom prst="roundRect">
+            <a:avLst>
+              <a:gd name="adj" fmla="val 50000"/>
+            </a:avLst>
           </a:prstGeom>
           <a:solidFill>
-            <a:srgbClr val="2DD4BF"/>
+            <a:srgbClr val="162235"/>
           </a:solidFill>
           <a:ln w="12700">
             <a:solidFill>
-              <a:srgbClr val="2DD4BF"/>
+              <a:srgbClr val="06B6D4"/>
             </a:solidFill>
             <a:prstDash val="solid"/>
           </a:ln>
@@ -8397,7 +9363,135 @@
       </p:sp>
       <p:sp>
         <p:nvSpPr>
+          <p:cNvPr id="3" name="Text 1"/>
+          <p:cNvSpPr/>
+          <p:nvPr/>
+        </p:nvSpPr>
+        <p:spPr>
+          <a:xfrm>
+            <a:off x="731520" y="384048"/>
+            <a:ext cx="2926080" cy="219456"/>
+          </a:xfrm>
+          <a:prstGeom prst="rect">
+            <a:avLst/>
+          </a:prstGeom>
+          <a:noFill/>
+          <a:ln/>
+        </p:spPr>
+        <p:txBody>
+          <a:bodyPr wrap="square" rtlCol="0" anchor="ctr"/>
+          <a:lstStyle/>
+          <a:p>
+            <a:pPr algn="ctr" indent="0" marL="0">
+              <a:buNone/>
+            </a:pPr>
+            <a:r>
+              <a:rPr lang="en-US" sz="950" b="1" dirty="0">
+                <a:solidFill>
+                  <a:srgbClr val="22D3EE"/>
+                </a:solidFill>
+                <a:latin typeface="Segoe UI" pitchFamily="34" charset="0"/>
+                <a:ea typeface="Segoe UI" pitchFamily="34" charset="-122"/>
+                <a:cs typeface="Segoe UI" pitchFamily="34" charset="-120"/>
+              </a:rPr>
+              <a:t>PHASE 2: EXPLORATORY ANALYSIS</a:t>
+            </a:r>
+            <a:endParaRPr lang="en-US" sz="950" dirty="0"/>
+          </a:p>
+        </p:txBody>
+      </p:sp>
+      <p:sp>
+        <p:nvSpPr>
+          <p:cNvPr id="4" name="Text 2"/>
+          <p:cNvSpPr/>
+          <p:nvPr/>
+        </p:nvSpPr>
+        <p:spPr>
+          <a:xfrm>
+            <a:off x="731520" y="713232"/>
+            <a:ext cx="10515600" cy="502920"/>
+          </a:xfrm>
+          <a:prstGeom prst="rect">
+            <a:avLst/>
+          </a:prstGeom>
+          <a:noFill/>
+          <a:ln/>
+        </p:spPr>
+        <p:txBody>
+          <a:bodyPr wrap="square" rtlCol="0" anchor="ctr"/>
+          <a:lstStyle/>
+          <a:p>
+            <a:pPr indent="0" marL="0">
+              <a:buNone/>
+            </a:pPr>
+            <a:r>
+              <a:rPr lang="en-US" sz="2200" b="1" dirty="0">
+                <a:solidFill>
+                  <a:srgbClr val="FFFFFF"/>
+                </a:solidFill>
+                <a:latin typeface="Segoe UI" pitchFamily="34" charset="0"/>
+                <a:ea typeface="Segoe UI" pitchFamily="34" charset="-122"/>
+                <a:cs typeface="Segoe UI" pitchFamily="34" charset="-120"/>
+              </a:rPr>
+              <a:t>Statistical Findings &amp; Cohen's d Effect Sizes</a:t>
+            </a:r>
+            <a:endParaRPr lang="en-US" sz="2200" dirty="0"/>
+          </a:p>
+        </p:txBody>
+      </p:sp>
+      <p:sp>
+        <p:nvSpPr>
           <p:cNvPr id="5" name="Shape 3"/>
+          <p:cNvSpPr/>
+          <p:nvPr/>
+        </p:nvSpPr>
+        <p:spPr>
+          <a:xfrm>
+            <a:off x="731520" y="1261872"/>
+            <a:ext cx="1645920" cy="36576"/>
+          </a:xfrm>
+          <a:prstGeom prst="rect">
+            <a:avLst/>
+          </a:prstGeom>
+          <a:solidFill>
+            <a:srgbClr val="06B6D4"/>
+          </a:solidFill>
+          <a:ln w="12700">
+            <a:solidFill>
+              <a:srgbClr val="06B6D4"/>
+            </a:solidFill>
+            <a:prstDash val="solid"/>
+          </a:ln>
+        </p:spPr>
+      </p:sp>
+      <p:sp>
+        <p:nvSpPr>
+          <p:cNvPr id="6" name="Shape 4"/>
+          <p:cNvSpPr/>
+          <p:nvPr/>
+        </p:nvSpPr>
+        <p:spPr>
+          <a:xfrm>
+            <a:off x="2377440" y="1261872"/>
+            <a:ext cx="1097280" cy="36576"/>
+          </a:xfrm>
+          <a:prstGeom prst="rect">
+            <a:avLst/>
+          </a:prstGeom>
+          <a:solidFill>
+            <a:srgbClr val="2563EB"/>
+          </a:solidFill>
+          <a:ln w="12700">
+            <a:solidFill>
+              <a:srgbClr val="2563EB"/>
+            </a:solidFill>
+            <a:prstDash val="solid"/>
+          </a:ln>
+        </p:spPr>
+      </p:sp>
+      <p:sp>
+        <p:nvSpPr>
+          <p:cNvPr id="7" name="Shape 5"/>
           <p:cNvSpPr/>
           <p:nvPr/>
         </p:nvSpPr>
@@ -8407,10 +9501,12 @@
             <a:ext cx="5029200" cy="4572000"/>
           </a:xfrm>
           <a:prstGeom prst="roundRect">
-            <a:avLst/>
+            <a:avLst>
+              <a:gd name="adj" fmla="val 3000"/>
+            </a:avLst>
           </a:prstGeom>
           <a:solidFill>
-            <a:srgbClr val="10151F"/>
+            <a:srgbClr val="121726"/>
           </a:solidFill>
           <a:ln w="12700">
             <a:solidFill>
@@ -8422,7 +9518,7 @@
       </p:sp>
       <p:sp>
         <p:nvSpPr>
-          <p:cNvPr id="6" name="Text 4"/>
+          <p:cNvPr id="8" name="Text 6"/>
           <p:cNvSpPr/>
           <p:nvPr/>
         </p:nvSpPr>
@@ -8447,7 +9543,7 @@
             <a:r>
               <a:rPr lang="en-US" sz="1500" b="1" dirty="0">
                 <a:solidFill>
-                  <a:srgbClr val="2DD4BF"/>
+                  <a:srgbClr val="22D3EE"/>
                 </a:solidFill>
                 <a:latin typeface="Segoe UI" pitchFamily="34" charset="0"/>
                 <a:ea typeface="Segoe UI" pitchFamily="34" charset="-122"/>
@@ -8461,7 +9557,7 @@
       </p:sp>
       <p:sp>
         <p:nvSpPr>
-          <p:cNvPr id="7" name="Text 5"/>
+          <p:cNvPr id="9" name="Text 7"/>
           <p:cNvSpPr/>
           <p:nvPr/>
         </p:nvSpPr>
@@ -8486,7 +9582,7 @@
             <a:r>
               <a:rPr lang="en-US" sz="1200" dirty="0">
                 <a:solidFill>
-                  <a:srgbClr val="CBD5E1"/>
+                  <a:srgbClr val="E2E8F0"/>
                 </a:solidFill>
                 <a:latin typeface="Segoe UI" pitchFamily="34" charset="0"/>
                 <a:ea typeface="Segoe UI" pitchFamily="34" charset="-122"/>
@@ -8509,7 +9605,7 @@
             <a:r>
               <a:rPr lang="en-US" sz="1200" dirty="0">
                 <a:solidFill>
-                  <a:srgbClr val="CBD5E1"/>
+                  <a:srgbClr val="E2E8F0"/>
                 </a:solidFill>
                 <a:latin typeface="Segoe UI" pitchFamily="34" charset="0"/>
                 <a:ea typeface="Segoe UI" pitchFamily="34" charset="-122"/>
@@ -8532,7 +9628,7 @@
             <a:r>
               <a:rPr lang="en-US" sz="1200" dirty="0">
                 <a:solidFill>
-                  <a:srgbClr val="CBD5E1"/>
+                  <a:srgbClr val="E2E8F0"/>
                 </a:solidFill>
                 <a:latin typeface="Segoe UI" pitchFamily="34" charset="0"/>
                 <a:ea typeface="Segoe UI" pitchFamily="34" charset="-122"/>
@@ -8555,7 +9651,7 @@
             <a:r>
               <a:rPr lang="en-US" sz="1200" dirty="0">
                 <a:solidFill>
-                  <a:srgbClr val="CBD5E1"/>
+                  <a:srgbClr val="E2E8F0"/>
                 </a:solidFill>
                 <a:latin typeface="Segoe UI" pitchFamily="34" charset="0"/>
                 <a:ea typeface="Segoe UI" pitchFamily="34" charset="-122"/>
@@ -8578,7 +9674,7 @@
             <a:r>
               <a:rPr lang="en-US" sz="1200" dirty="0">
                 <a:solidFill>
-                  <a:srgbClr val="CBD5E1"/>
+                  <a:srgbClr val="E2E8F0"/>
                 </a:solidFill>
                 <a:latin typeface="Segoe UI" pitchFamily="34" charset="0"/>
                 <a:ea typeface="Segoe UI" pitchFamily="34" charset="-122"/>
@@ -8592,7 +9688,7 @@
       </p:sp>
       <p:pic>
         <p:nvPicPr>
-          <p:cNvPr id="8" name="Image 0" descr="C:\Users\hariv\OneDrive\Desktop\NeuroADHD\website\assets\img\02_effect_sizes.png">    </p:cNvPr>
+          <p:cNvPr id="10" name="Image 0" descr="C:\Users\hariv\OneDrive\Desktop\NeuroADHD\website\assets\img\02_effect_sizes.png">    </p:cNvPr>
           <p:cNvPicPr>
             <a:picLocks noChangeAspect="1"/>
           </p:cNvPicPr>
@@ -8628,7 +9724,7 @@
     <p:bg>
       <p:bgPr>
         <a:solidFill>
-          <a:srgbClr val="07090E"/>
+          <a:srgbClr val="090A0F"/>
         </a:solidFill>
       </p:bgPr>
     </p:bg>
@@ -8648,102 +9744,26 @@
       </p:grpSpPr>
       <p:sp>
         <p:nvSpPr>
-          <p:cNvPr id="2" name="Text 0"/>
-          <p:cNvSpPr/>
-          <p:nvPr/>
-        </p:nvSpPr>
-        <p:spPr>
-          <a:xfrm>
-            <a:off x="731520" y="411480"/>
-            <a:ext cx="9144000" cy="228600"/>
-          </a:xfrm>
-          <a:prstGeom prst="rect">
-            <a:avLst/>
-          </a:prstGeom>
-          <a:noFill/>
-          <a:ln/>
-        </p:spPr>
-        <p:txBody>
-          <a:bodyPr wrap="square" rtlCol="0" anchor="ctr"/>
-          <a:lstStyle/>
-          <a:p>
-            <a:pPr indent="0" marL="0">
-              <a:buNone/>
-            </a:pPr>
-            <a:r>
-              <a:rPr lang="en-US" sz="1000" b="1" dirty="0">
-                <a:solidFill>
-                  <a:srgbClr val="2DD4BF"/>
-                </a:solidFill>
-                <a:latin typeface="Segoe UI" pitchFamily="34" charset="0"/>
-                <a:ea typeface="Segoe UI" pitchFamily="34" charset="-122"/>
-                <a:cs typeface="Segoe UI" pitchFamily="34" charset="-120"/>
-              </a:rPr>
-              <a:t>PHASE 3: PREPROCESSING PIPELINE</a:t>
-            </a:r>
-            <a:endParaRPr lang="en-US" sz="1000" dirty="0"/>
-          </a:p>
-        </p:txBody>
-      </p:sp>
-      <p:sp>
-        <p:nvSpPr>
-          <p:cNvPr id="3" name="Text 1"/>
-          <p:cNvSpPr/>
-          <p:nvPr/>
-        </p:nvSpPr>
-        <p:spPr>
-          <a:xfrm>
-            <a:off x="731520" y="685800"/>
-            <a:ext cx="10515600" cy="502920"/>
-          </a:xfrm>
-          <a:prstGeom prst="rect">
-            <a:avLst/>
-          </a:prstGeom>
-          <a:noFill/>
-          <a:ln/>
-        </p:spPr>
-        <p:txBody>
-          <a:bodyPr wrap="square" rtlCol="0" anchor="ctr"/>
-          <a:lstStyle/>
-          <a:p>
-            <a:pPr indent="0" marL="0">
-              <a:buNone/>
-            </a:pPr>
-            <a:r>
-              <a:rPr lang="en-US" sz="2100" b="1" dirty="0">
-                <a:solidFill>
-                  <a:srgbClr val="FFFFFF"/>
-                </a:solidFill>
-                <a:latin typeface="Segoe UI" pitchFamily="34" charset="0"/>
-                <a:ea typeface="Segoe UI" pitchFamily="34" charset="-122"/>
-                <a:cs typeface="Segoe UI" pitchFamily="34" charset="-120"/>
-              </a:rPr>
-              <a:t>Evidence-Based Engineering &amp; Feature Selection</a:t>
-            </a:r>
-            <a:endParaRPr lang="en-US" sz="2100" dirty="0"/>
-          </a:p>
-        </p:txBody>
-      </p:sp>
-      <p:sp>
-        <p:nvSpPr>
-          <p:cNvPr id="4" name="Shape 2"/>
-          <p:cNvSpPr/>
-          <p:nvPr/>
-        </p:nvSpPr>
-        <p:spPr>
-          <a:xfrm>
-            <a:off x="731520" y="1234440"/>
-            <a:ext cx="1828800" cy="36576"/>
-          </a:xfrm>
-          <a:prstGeom prst="rect">
-            <a:avLst/>
+          <p:cNvPr id="2" name="Shape 0"/>
+          <p:cNvSpPr/>
+          <p:nvPr/>
+        </p:nvSpPr>
+        <p:spPr>
+          <a:xfrm>
+            <a:off x="731520" y="365760"/>
+            <a:ext cx="2926080" cy="256032"/>
+          </a:xfrm>
+          <a:prstGeom prst="roundRect">
+            <a:avLst>
+              <a:gd name="adj" fmla="val 50000"/>
+            </a:avLst>
           </a:prstGeom>
           <a:solidFill>
-            <a:srgbClr val="2DD4BF"/>
+            <a:srgbClr val="162235"/>
           </a:solidFill>
           <a:ln w="12700">
             <a:solidFill>
-              <a:srgbClr val="2DD4BF"/>
+              <a:srgbClr val="06B6D4"/>
             </a:solidFill>
             <a:prstDash val="solid"/>
           </a:ln>
@@ -8751,7 +9771,135 @@
       </p:sp>
       <p:sp>
         <p:nvSpPr>
+          <p:cNvPr id="3" name="Text 1"/>
+          <p:cNvSpPr/>
+          <p:nvPr/>
+        </p:nvSpPr>
+        <p:spPr>
+          <a:xfrm>
+            <a:off x="731520" y="384048"/>
+            <a:ext cx="2926080" cy="219456"/>
+          </a:xfrm>
+          <a:prstGeom prst="rect">
+            <a:avLst/>
+          </a:prstGeom>
+          <a:noFill/>
+          <a:ln/>
+        </p:spPr>
+        <p:txBody>
+          <a:bodyPr wrap="square" rtlCol="0" anchor="ctr"/>
+          <a:lstStyle/>
+          <a:p>
+            <a:pPr algn="ctr" indent="0" marL="0">
+              <a:buNone/>
+            </a:pPr>
+            <a:r>
+              <a:rPr lang="en-US" sz="950" b="1" dirty="0">
+                <a:solidFill>
+                  <a:srgbClr val="22D3EE"/>
+                </a:solidFill>
+                <a:latin typeface="Segoe UI" pitchFamily="34" charset="0"/>
+                <a:ea typeface="Segoe UI" pitchFamily="34" charset="-122"/>
+                <a:cs typeface="Segoe UI" pitchFamily="34" charset="-120"/>
+              </a:rPr>
+              <a:t>PHASE 3: PREPROCESSING PIPELINE</a:t>
+            </a:r>
+            <a:endParaRPr lang="en-US" sz="950" dirty="0"/>
+          </a:p>
+        </p:txBody>
+      </p:sp>
+      <p:sp>
+        <p:nvSpPr>
+          <p:cNvPr id="4" name="Text 2"/>
+          <p:cNvSpPr/>
+          <p:nvPr/>
+        </p:nvSpPr>
+        <p:spPr>
+          <a:xfrm>
+            <a:off x="731520" y="713232"/>
+            <a:ext cx="10515600" cy="502920"/>
+          </a:xfrm>
+          <a:prstGeom prst="rect">
+            <a:avLst/>
+          </a:prstGeom>
+          <a:noFill/>
+          <a:ln/>
+        </p:spPr>
+        <p:txBody>
+          <a:bodyPr wrap="square" rtlCol="0" anchor="ctr"/>
+          <a:lstStyle/>
+          <a:p>
+            <a:pPr indent="0" marL="0">
+              <a:buNone/>
+            </a:pPr>
+            <a:r>
+              <a:rPr lang="en-US" sz="2200" b="1" dirty="0">
+                <a:solidFill>
+                  <a:srgbClr val="FFFFFF"/>
+                </a:solidFill>
+                <a:latin typeface="Segoe UI" pitchFamily="34" charset="0"/>
+                <a:ea typeface="Segoe UI" pitchFamily="34" charset="-122"/>
+                <a:cs typeface="Segoe UI" pitchFamily="34" charset="-120"/>
+              </a:rPr>
+              <a:t>Evidence-Based Engineering &amp; Feature Selection</a:t>
+            </a:r>
+            <a:endParaRPr lang="en-US" sz="2200" dirty="0"/>
+          </a:p>
+        </p:txBody>
+      </p:sp>
+      <p:sp>
+        <p:nvSpPr>
           <p:cNvPr id="5" name="Shape 3"/>
+          <p:cNvSpPr/>
+          <p:nvPr/>
+        </p:nvSpPr>
+        <p:spPr>
+          <a:xfrm>
+            <a:off x="731520" y="1261872"/>
+            <a:ext cx="1645920" cy="36576"/>
+          </a:xfrm>
+          <a:prstGeom prst="rect">
+            <a:avLst/>
+          </a:prstGeom>
+          <a:solidFill>
+            <a:srgbClr val="06B6D4"/>
+          </a:solidFill>
+          <a:ln w="12700">
+            <a:solidFill>
+              <a:srgbClr val="06B6D4"/>
+            </a:solidFill>
+            <a:prstDash val="solid"/>
+          </a:ln>
+        </p:spPr>
+      </p:sp>
+      <p:sp>
+        <p:nvSpPr>
+          <p:cNvPr id="6" name="Shape 4"/>
+          <p:cNvSpPr/>
+          <p:nvPr/>
+        </p:nvSpPr>
+        <p:spPr>
+          <a:xfrm>
+            <a:off x="2377440" y="1261872"/>
+            <a:ext cx="1097280" cy="36576"/>
+          </a:xfrm>
+          <a:prstGeom prst="rect">
+            <a:avLst/>
+          </a:prstGeom>
+          <a:solidFill>
+            <a:srgbClr val="2563EB"/>
+          </a:solidFill>
+          <a:ln w="12700">
+            <a:solidFill>
+              <a:srgbClr val="2563EB"/>
+            </a:solidFill>
+            <a:prstDash val="solid"/>
+          </a:ln>
+        </p:spPr>
+      </p:sp>
+      <p:sp>
+        <p:nvSpPr>
+          <p:cNvPr id="7" name="Shape 5"/>
           <p:cNvSpPr/>
           <p:nvPr/>
         </p:nvSpPr>
@@ -8761,10 +9909,12 @@
             <a:ext cx="5029200" cy="4572000"/>
           </a:xfrm>
           <a:prstGeom prst="roundRect">
-            <a:avLst/>
+            <a:avLst>
+              <a:gd name="adj" fmla="val 3000"/>
+            </a:avLst>
           </a:prstGeom>
           <a:solidFill>
-            <a:srgbClr val="10151F"/>
+            <a:srgbClr val="121726"/>
           </a:solidFill>
           <a:ln w="12700">
             <a:solidFill>
@@ -8776,7 +9926,7 @@
       </p:sp>
       <p:sp>
         <p:nvSpPr>
-          <p:cNvPr id="6" name="Text 4"/>
+          <p:cNvPr id="8" name="Text 6"/>
           <p:cNvSpPr/>
           <p:nvPr/>
         </p:nvSpPr>
@@ -8801,7 +9951,7 @@
             <a:r>
               <a:rPr lang="en-US" sz="1500" b="1" dirty="0">
                 <a:solidFill>
-                  <a:srgbClr val="2DD4BF"/>
+                  <a:srgbClr val="22D3EE"/>
                 </a:solidFill>
                 <a:latin typeface="Segoe UI" pitchFamily="34" charset="0"/>
                 <a:ea typeface="Segoe UI" pitchFamily="34" charset="-122"/>
@@ -8815,7 +9965,7 @@
       </p:sp>
       <p:sp>
         <p:nvSpPr>
-          <p:cNvPr id="7" name="Text 5"/>
+          <p:cNvPr id="9" name="Text 7"/>
           <p:cNvSpPr/>
           <p:nvPr/>
         </p:nvSpPr>
@@ -8840,7 +9990,7 @@
             <a:r>
               <a:rPr lang="en-US" sz="1200" dirty="0">
                 <a:solidFill>
-                  <a:srgbClr val="CBD5E1"/>
+                  <a:srgbClr val="E2E8F0"/>
                 </a:solidFill>
                 <a:latin typeface="Segoe UI" pitchFamily="34" charset="0"/>
                 <a:ea typeface="Segoe UI" pitchFamily="34" charset="-122"/>
@@ -8863,7 +10013,7 @@
             <a:r>
               <a:rPr lang="en-US" sz="1200" dirty="0">
                 <a:solidFill>
-                  <a:srgbClr val="CBD5E1"/>
+                  <a:srgbClr val="E2E8F0"/>
                 </a:solidFill>
                 <a:latin typeface="Segoe UI" pitchFamily="34" charset="0"/>
                 <a:ea typeface="Segoe UI" pitchFamily="34" charset="-122"/>
@@ -8886,7 +10036,7 @@
             <a:r>
               <a:rPr lang="en-US" sz="1200" dirty="0">
                 <a:solidFill>
-                  <a:srgbClr val="CBD5E1"/>
+                  <a:srgbClr val="E2E8F0"/>
                 </a:solidFill>
                 <a:latin typeface="Segoe UI" pitchFamily="34" charset="0"/>
                 <a:ea typeface="Segoe UI" pitchFamily="34" charset="-122"/>
@@ -8909,7 +10059,7 @@
             <a:r>
               <a:rPr lang="en-US" sz="1200" dirty="0">
                 <a:solidFill>
-                  <a:srgbClr val="CBD5E1"/>
+                  <a:srgbClr val="E2E8F0"/>
                 </a:solidFill>
                 <a:latin typeface="Segoe UI" pitchFamily="34" charset="0"/>
                 <a:ea typeface="Segoe UI" pitchFamily="34" charset="-122"/>
@@ -8932,7 +10082,7 @@
             <a:r>
               <a:rPr lang="en-US" sz="1200" dirty="0">
                 <a:solidFill>
-                  <a:srgbClr val="CBD5E1"/>
+                  <a:srgbClr val="E2E8F0"/>
                 </a:solidFill>
                 <a:latin typeface="Segoe UI" pitchFamily="34" charset="0"/>
                 <a:ea typeface="Segoe UI" pitchFamily="34" charset="-122"/>
@@ -8946,7 +10096,7 @@
       </p:sp>
       <p:pic>
         <p:nvPicPr>
-          <p:cNvPr id="8" name="Image 0" descr="C:\Users\hariv\OneDrive\Desktop\NeuroADHD\website\assets\img\03_imbalance_comparison.png">    </p:cNvPr>
+          <p:cNvPr id="10" name="Image 0" descr="C:\Users\hariv\OneDrive\Desktop\NeuroADHD\website\assets\img\03_imbalance_comparison.png">    </p:cNvPr>
           <p:cNvPicPr>
             <a:picLocks noChangeAspect="1"/>
           </p:cNvPicPr>
@@ -8982,7 +10132,7 @@
     <p:bg>
       <p:bgPr>
         <a:solidFill>
-          <a:srgbClr val="07090E"/>
+          <a:srgbClr val="090A0F"/>
         </a:solidFill>
       </p:bgPr>
     </p:bg>
@@ -9002,102 +10152,26 @@
       </p:grpSpPr>
       <p:sp>
         <p:nvSpPr>
-          <p:cNvPr id="2" name="Text 0"/>
-          <p:cNvSpPr/>
-          <p:nvPr/>
-        </p:nvSpPr>
-        <p:spPr>
-          <a:xfrm>
-            <a:off x="731520" y="411480"/>
-            <a:ext cx="9144000" cy="228600"/>
-          </a:xfrm>
-          <a:prstGeom prst="rect">
-            <a:avLst/>
-          </a:prstGeom>
-          <a:noFill/>
-          <a:ln/>
-        </p:spPr>
-        <p:txBody>
-          <a:bodyPr wrap="square" rtlCol="0" anchor="ctr"/>
-          <a:lstStyle/>
-          <a:p>
-            <a:pPr indent="0" marL="0">
-              <a:buNone/>
-            </a:pPr>
-            <a:r>
-              <a:rPr lang="en-US" sz="1000" b="1" dirty="0">
-                <a:solidFill>
-                  <a:srgbClr val="2DD4BF"/>
-                </a:solidFill>
-                <a:latin typeface="Segoe UI" pitchFamily="34" charset="0"/>
-                <a:ea typeface="Segoe UI" pitchFamily="34" charset="-122"/>
-                <a:cs typeface="Segoe UI" pitchFamily="34" charset="-120"/>
-              </a:rPr>
-              <a:t>PHASE 4: MODEL ZOO EVALUATION</a:t>
-            </a:r>
-            <a:endParaRPr lang="en-US" sz="1000" dirty="0"/>
-          </a:p>
-        </p:txBody>
-      </p:sp>
-      <p:sp>
-        <p:nvSpPr>
-          <p:cNvPr id="3" name="Text 1"/>
-          <p:cNvSpPr/>
-          <p:nvPr/>
-        </p:nvSpPr>
-        <p:spPr>
-          <a:xfrm>
-            <a:off x="731520" y="685800"/>
-            <a:ext cx="10515600" cy="502920"/>
-          </a:xfrm>
-          <a:prstGeom prst="rect">
-            <a:avLst/>
-          </a:prstGeom>
-          <a:noFill/>
-          <a:ln/>
-        </p:spPr>
-        <p:txBody>
-          <a:bodyPr wrap="square" rtlCol="0" anchor="ctr"/>
-          <a:lstStyle/>
-          <a:p>
-            <a:pPr indent="0" marL="0">
-              <a:buNone/>
-            </a:pPr>
-            <a:r>
-              <a:rPr lang="en-US" sz="2100" b="1" dirty="0">
-                <a:solidFill>
-                  <a:srgbClr val="FFFFFF"/>
-                </a:solidFill>
-                <a:latin typeface="Segoe UI" pitchFamily="34" charset="0"/>
-                <a:ea typeface="Segoe UI" pitchFamily="34" charset="-122"/>
-                <a:cs typeface="Segoe UI" pitchFamily="34" charset="-120"/>
-              </a:rPr>
-              <a:t>Benchmarking 13 Machine Learning Architectures</a:t>
-            </a:r>
-            <a:endParaRPr lang="en-US" sz="2100" dirty="0"/>
-          </a:p>
-        </p:txBody>
-      </p:sp>
-      <p:sp>
-        <p:nvSpPr>
-          <p:cNvPr id="4" name="Shape 2"/>
-          <p:cNvSpPr/>
-          <p:nvPr/>
-        </p:nvSpPr>
-        <p:spPr>
-          <a:xfrm>
-            <a:off x="731520" y="1234440"/>
-            <a:ext cx="1828800" cy="36576"/>
-          </a:xfrm>
-          <a:prstGeom prst="rect">
-            <a:avLst/>
+          <p:cNvPr id="2" name="Shape 0"/>
+          <p:cNvSpPr/>
+          <p:nvPr/>
+        </p:nvSpPr>
+        <p:spPr>
+          <a:xfrm>
+            <a:off x="731520" y="365760"/>
+            <a:ext cx="2926080" cy="256032"/>
+          </a:xfrm>
+          <a:prstGeom prst="roundRect">
+            <a:avLst>
+              <a:gd name="adj" fmla="val 50000"/>
+            </a:avLst>
           </a:prstGeom>
           <a:solidFill>
-            <a:srgbClr val="2DD4BF"/>
+            <a:srgbClr val="162235"/>
           </a:solidFill>
           <a:ln w="12700">
             <a:solidFill>
-              <a:srgbClr val="2DD4BF"/>
+              <a:srgbClr val="06B6D4"/>
             </a:solidFill>
             <a:prstDash val="solid"/>
           </a:ln>
@@ -9105,7 +10179,135 @@
       </p:sp>
       <p:sp>
         <p:nvSpPr>
+          <p:cNvPr id="3" name="Text 1"/>
+          <p:cNvSpPr/>
+          <p:nvPr/>
+        </p:nvSpPr>
+        <p:spPr>
+          <a:xfrm>
+            <a:off x="731520" y="384048"/>
+            <a:ext cx="2926080" cy="219456"/>
+          </a:xfrm>
+          <a:prstGeom prst="rect">
+            <a:avLst/>
+          </a:prstGeom>
+          <a:noFill/>
+          <a:ln/>
+        </p:spPr>
+        <p:txBody>
+          <a:bodyPr wrap="square" rtlCol="0" anchor="ctr"/>
+          <a:lstStyle/>
+          <a:p>
+            <a:pPr algn="ctr" indent="0" marL="0">
+              <a:buNone/>
+            </a:pPr>
+            <a:r>
+              <a:rPr lang="en-US" sz="950" b="1" dirty="0">
+                <a:solidFill>
+                  <a:srgbClr val="22D3EE"/>
+                </a:solidFill>
+                <a:latin typeface="Segoe UI" pitchFamily="34" charset="0"/>
+                <a:ea typeface="Segoe UI" pitchFamily="34" charset="-122"/>
+                <a:cs typeface="Segoe UI" pitchFamily="34" charset="-120"/>
+              </a:rPr>
+              <a:t>PHASE 4: MODEL ZOO EVALUATION</a:t>
+            </a:r>
+            <a:endParaRPr lang="en-US" sz="950" dirty="0"/>
+          </a:p>
+        </p:txBody>
+      </p:sp>
+      <p:sp>
+        <p:nvSpPr>
+          <p:cNvPr id="4" name="Text 2"/>
+          <p:cNvSpPr/>
+          <p:nvPr/>
+        </p:nvSpPr>
+        <p:spPr>
+          <a:xfrm>
+            <a:off x="731520" y="713232"/>
+            <a:ext cx="10515600" cy="502920"/>
+          </a:xfrm>
+          <a:prstGeom prst="rect">
+            <a:avLst/>
+          </a:prstGeom>
+          <a:noFill/>
+          <a:ln/>
+        </p:spPr>
+        <p:txBody>
+          <a:bodyPr wrap="square" rtlCol="0" anchor="ctr"/>
+          <a:lstStyle/>
+          <a:p>
+            <a:pPr indent="0" marL="0">
+              <a:buNone/>
+            </a:pPr>
+            <a:r>
+              <a:rPr lang="en-US" sz="2200" b="1" dirty="0">
+                <a:solidFill>
+                  <a:srgbClr val="FFFFFF"/>
+                </a:solidFill>
+                <a:latin typeface="Segoe UI" pitchFamily="34" charset="0"/>
+                <a:ea typeface="Segoe UI" pitchFamily="34" charset="-122"/>
+                <a:cs typeface="Segoe UI" pitchFamily="34" charset="-120"/>
+              </a:rPr>
+              <a:t>Benchmarking 13 Machine Learning Architectures</a:t>
+            </a:r>
+            <a:endParaRPr lang="en-US" sz="2200" dirty="0"/>
+          </a:p>
+        </p:txBody>
+      </p:sp>
+      <p:sp>
+        <p:nvSpPr>
           <p:cNvPr id="5" name="Shape 3"/>
+          <p:cNvSpPr/>
+          <p:nvPr/>
+        </p:nvSpPr>
+        <p:spPr>
+          <a:xfrm>
+            <a:off x="731520" y="1261872"/>
+            <a:ext cx="1645920" cy="36576"/>
+          </a:xfrm>
+          <a:prstGeom prst="rect">
+            <a:avLst/>
+          </a:prstGeom>
+          <a:solidFill>
+            <a:srgbClr val="06B6D4"/>
+          </a:solidFill>
+          <a:ln w="12700">
+            <a:solidFill>
+              <a:srgbClr val="06B6D4"/>
+            </a:solidFill>
+            <a:prstDash val="solid"/>
+          </a:ln>
+        </p:spPr>
+      </p:sp>
+      <p:sp>
+        <p:nvSpPr>
+          <p:cNvPr id="6" name="Shape 4"/>
+          <p:cNvSpPr/>
+          <p:nvPr/>
+        </p:nvSpPr>
+        <p:spPr>
+          <a:xfrm>
+            <a:off x="2377440" y="1261872"/>
+            <a:ext cx="1097280" cy="36576"/>
+          </a:xfrm>
+          <a:prstGeom prst="rect">
+            <a:avLst/>
+          </a:prstGeom>
+          <a:solidFill>
+            <a:srgbClr val="2563EB"/>
+          </a:solidFill>
+          <a:ln w="12700">
+            <a:solidFill>
+              <a:srgbClr val="2563EB"/>
+            </a:solidFill>
+            <a:prstDash val="solid"/>
+          </a:ln>
+        </p:spPr>
+      </p:sp>
+      <p:sp>
+        <p:nvSpPr>
+          <p:cNvPr id="7" name="Shape 5"/>
           <p:cNvSpPr/>
           <p:nvPr/>
         </p:nvSpPr>
@@ -9115,10 +10317,12 @@
             <a:ext cx="5029200" cy="4572000"/>
           </a:xfrm>
           <a:prstGeom prst="roundRect">
-            <a:avLst/>
+            <a:avLst>
+              <a:gd name="adj" fmla="val 3000"/>
+            </a:avLst>
           </a:prstGeom>
           <a:solidFill>
-            <a:srgbClr val="10151F"/>
+            <a:srgbClr val="121726"/>
           </a:solidFill>
           <a:ln w="12700">
             <a:solidFill>
@@ -9130,7 +10334,7 @@
       </p:sp>
       <p:sp>
         <p:nvSpPr>
-          <p:cNvPr id="6" name="Text 4"/>
+          <p:cNvPr id="8" name="Text 6"/>
           <p:cNvSpPr/>
           <p:nvPr/>
         </p:nvSpPr>
@@ -9155,7 +10359,7 @@
             <a:r>
               <a:rPr lang="en-US" sz="1500" b="1" dirty="0">
                 <a:solidFill>
-                  <a:srgbClr val="2DD4BF"/>
+                  <a:srgbClr val="22D3EE"/>
                 </a:solidFill>
                 <a:latin typeface="Segoe UI" pitchFamily="34" charset="0"/>
                 <a:ea typeface="Segoe UI" pitchFamily="34" charset="-122"/>
@@ -9169,7 +10373,7 @@
       </p:sp>
       <p:sp>
         <p:nvSpPr>
-          <p:cNvPr id="7" name="Text 5"/>
+          <p:cNvPr id="9" name="Text 7"/>
           <p:cNvSpPr/>
           <p:nvPr/>
         </p:nvSpPr>
@@ -9194,7 +10398,7 @@
             <a:r>
               <a:rPr lang="en-US" sz="1200" dirty="0">
                 <a:solidFill>
-                  <a:srgbClr val="CBD5E1"/>
+                  <a:srgbClr val="E2E8F0"/>
                 </a:solidFill>
                 <a:latin typeface="Segoe UI" pitchFamily="34" charset="0"/>
                 <a:ea typeface="Segoe UI" pitchFamily="34" charset="-122"/>
@@ -9217,7 +10421,7 @@
             <a:r>
               <a:rPr lang="en-US" sz="1200" dirty="0">
                 <a:solidFill>
-                  <a:srgbClr val="CBD5E1"/>
+                  <a:srgbClr val="E2E8F0"/>
                 </a:solidFill>
                 <a:latin typeface="Segoe UI" pitchFamily="34" charset="0"/>
                 <a:ea typeface="Segoe UI" pitchFamily="34" charset="-122"/>
@@ -9240,7 +10444,7 @@
             <a:r>
               <a:rPr lang="en-US" sz="1200" dirty="0">
                 <a:solidFill>
-                  <a:srgbClr val="CBD5E1"/>
+                  <a:srgbClr val="E2E8F0"/>
                 </a:solidFill>
                 <a:latin typeface="Segoe UI" pitchFamily="34" charset="0"/>
                 <a:ea typeface="Segoe UI" pitchFamily="34" charset="-122"/>
@@ -9263,7 +10467,7 @@
             <a:r>
               <a:rPr lang="en-US" sz="1200" dirty="0">
                 <a:solidFill>
-                  <a:srgbClr val="CBD5E1"/>
+                  <a:srgbClr val="E2E8F0"/>
                 </a:solidFill>
                 <a:latin typeface="Segoe UI" pitchFamily="34" charset="0"/>
                 <a:ea typeface="Segoe UI" pitchFamily="34" charset="-122"/>
@@ -9286,7 +10490,7 @@
             <a:r>
               <a:rPr lang="en-US" sz="1200" dirty="0">
                 <a:solidFill>
-                  <a:srgbClr val="CBD5E1"/>
+                  <a:srgbClr val="E2E8F0"/>
                 </a:solidFill>
                 <a:latin typeface="Segoe UI" pitchFamily="34" charset="0"/>
                 <a:ea typeface="Segoe UI" pitchFamily="34" charset="-122"/>
@@ -9309,7 +10513,7 @@
             <a:r>
               <a:rPr lang="en-US" sz="1200" dirty="0">
                 <a:solidFill>
-                  <a:srgbClr val="CBD5E1"/>
+                  <a:srgbClr val="E2E8F0"/>
                 </a:solidFill>
                 <a:latin typeface="Segoe UI" pitchFamily="34" charset="0"/>
                 <a:ea typeface="Segoe UI" pitchFamily="34" charset="-122"/>
@@ -9323,7 +10527,7 @@
       </p:sp>
       <p:pic>
         <p:nvPicPr>
-          <p:cNvPr id="8" name="Image 0" descr="C:\Users\hariv\OneDrive\Desktop\NeuroADHD\website\assets\img\04_model_comparison_cv.png">    </p:cNvPr>
+          <p:cNvPr id="10" name="Image 0" descr="C:\Users\hariv\OneDrive\Desktop\NeuroADHD\website\assets\img\04_model_comparison_cv.png">    </p:cNvPr>
           <p:cNvPicPr>
             <a:picLocks noChangeAspect="1"/>
           </p:cNvPicPr>
@@ -9359,7 +10563,7 @@
     <p:bg>
       <p:bgPr>
         <a:solidFill>
-          <a:srgbClr val="07090E"/>
+          <a:srgbClr val="090A0F"/>
         </a:solidFill>
       </p:bgPr>
     </p:bg>
@@ -9379,102 +10583,26 @@
       </p:grpSpPr>
       <p:sp>
         <p:nvSpPr>
-          <p:cNvPr id="2" name="Text 0"/>
-          <p:cNvSpPr/>
-          <p:nvPr/>
-        </p:nvSpPr>
-        <p:spPr>
-          <a:xfrm>
-            <a:off x="731520" y="411480"/>
-            <a:ext cx="9144000" cy="228600"/>
-          </a:xfrm>
-          <a:prstGeom prst="rect">
-            <a:avLst/>
-          </a:prstGeom>
-          <a:noFill/>
-          <a:ln/>
-        </p:spPr>
-        <p:txBody>
-          <a:bodyPr wrap="square" rtlCol="0" anchor="ctr"/>
-          <a:lstStyle/>
-          <a:p>
-            <a:pPr indent="0" marL="0">
-              <a:buNone/>
-            </a:pPr>
-            <a:r>
-              <a:rPr lang="en-US" sz="1000" b="1" dirty="0">
-                <a:solidFill>
-                  <a:srgbClr val="2DD4BF"/>
-                </a:solidFill>
-                <a:latin typeface="Segoe UI" pitchFamily="34" charset="0"/>
-                <a:ea typeface="Segoe UI" pitchFamily="34" charset="-122"/>
-                <a:cs typeface="Segoe UI" pitchFamily="34" charset="-120"/>
-              </a:rPr>
-              <a:t>PHASE 5: TEST SET GENERALIZATION</a:t>
-            </a:r>
-            <a:endParaRPr lang="en-US" sz="1000" dirty="0"/>
-          </a:p>
-        </p:txBody>
-      </p:sp>
-      <p:sp>
-        <p:nvSpPr>
-          <p:cNvPr id="3" name="Text 1"/>
-          <p:cNvSpPr/>
-          <p:nvPr/>
-        </p:nvSpPr>
-        <p:spPr>
-          <a:xfrm>
-            <a:off x="731520" y="685800"/>
-            <a:ext cx="10515600" cy="502920"/>
-          </a:xfrm>
-          <a:prstGeom prst="rect">
-            <a:avLst/>
-          </a:prstGeom>
-          <a:noFill/>
-          <a:ln/>
-        </p:spPr>
-        <p:txBody>
-          <a:bodyPr wrap="square" rtlCol="0" anchor="ctr"/>
-          <a:lstStyle/>
-          <a:p>
-            <a:pPr indent="0" marL="0">
-              <a:buNone/>
-            </a:pPr>
-            <a:r>
-              <a:rPr lang="en-US" sz="2100" b="1" dirty="0">
-                <a:solidFill>
-                  <a:srgbClr val="FFFFFF"/>
-                </a:solidFill>
-                <a:latin typeface="Segoe UI" pitchFamily="34" charset="0"/>
-                <a:ea typeface="Segoe UI" pitchFamily="34" charset="-122"/>
-                <a:cs typeface="Segoe UI" pitchFamily="34" charset="-120"/>
-              </a:rPr>
-              <a:t>Final Evaluation on Locked Holdout (1,000 Bootstraps)</a:t>
-            </a:r>
-            <a:endParaRPr lang="en-US" sz="2100" dirty="0"/>
-          </a:p>
-        </p:txBody>
-      </p:sp>
-      <p:sp>
-        <p:nvSpPr>
-          <p:cNvPr id="4" name="Shape 2"/>
-          <p:cNvSpPr/>
-          <p:nvPr/>
-        </p:nvSpPr>
-        <p:spPr>
-          <a:xfrm>
-            <a:off x="731520" y="1234440"/>
-            <a:ext cx="1828800" cy="36576"/>
-          </a:xfrm>
-          <a:prstGeom prst="rect">
-            <a:avLst/>
+          <p:cNvPr id="2" name="Shape 0"/>
+          <p:cNvSpPr/>
+          <p:nvPr/>
+        </p:nvSpPr>
+        <p:spPr>
+          <a:xfrm>
+            <a:off x="731520" y="365760"/>
+            <a:ext cx="2926080" cy="256032"/>
+          </a:xfrm>
+          <a:prstGeom prst="roundRect">
+            <a:avLst>
+              <a:gd name="adj" fmla="val 50000"/>
+            </a:avLst>
           </a:prstGeom>
           <a:solidFill>
-            <a:srgbClr val="2DD4BF"/>
+            <a:srgbClr val="162235"/>
           </a:solidFill>
           <a:ln w="12700">
             <a:solidFill>
-              <a:srgbClr val="2DD4BF"/>
+              <a:srgbClr val="06B6D4"/>
             </a:solidFill>
             <a:prstDash val="solid"/>
           </a:ln>
@@ -9482,7 +10610,135 @@
       </p:sp>
       <p:sp>
         <p:nvSpPr>
+          <p:cNvPr id="3" name="Text 1"/>
+          <p:cNvSpPr/>
+          <p:nvPr/>
+        </p:nvSpPr>
+        <p:spPr>
+          <a:xfrm>
+            <a:off x="731520" y="384048"/>
+            <a:ext cx="2926080" cy="219456"/>
+          </a:xfrm>
+          <a:prstGeom prst="rect">
+            <a:avLst/>
+          </a:prstGeom>
+          <a:noFill/>
+          <a:ln/>
+        </p:spPr>
+        <p:txBody>
+          <a:bodyPr wrap="square" rtlCol="0" anchor="ctr"/>
+          <a:lstStyle/>
+          <a:p>
+            <a:pPr algn="ctr" indent="0" marL="0">
+              <a:buNone/>
+            </a:pPr>
+            <a:r>
+              <a:rPr lang="en-US" sz="950" b="1" dirty="0">
+                <a:solidFill>
+                  <a:srgbClr val="22D3EE"/>
+                </a:solidFill>
+                <a:latin typeface="Segoe UI" pitchFamily="34" charset="0"/>
+                <a:ea typeface="Segoe UI" pitchFamily="34" charset="-122"/>
+                <a:cs typeface="Segoe UI" pitchFamily="34" charset="-120"/>
+              </a:rPr>
+              <a:t>PHASE 5: TEST SET GENERALIZATION</a:t>
+            </a:r>
+            <a:endParaRPr lang="en-US" sz="950" dirty="0"/>
+          </a:p>
+        </p:txBody>
+      </p:sp>
+      <p:sp>
+        <p:nvSpPr>
+          <p:cNvPr id="4" name="Text 2"/>
+          <p:cNvSpPr/>
+          <p:nvPr/>
+        </p:nvSpPr>
+        <p:spPr>
+          <a:xfrm>
+            <a:off x="731520" y="713232"/>
+            <a:ext cx="10515600" cy="502920"/>
+          </a:xfrm>
+          <a:prstGeom prst="rect">
+            <a:avLst/>
+          </a:prstGeom>
+          <a:noFill/>
+          <a:ln/>
+        </p:spPr>
+        <p:txBody>
+          <a:bodyPr wrap="square" rtlCol="0" anchor="ctr"/>
+          <a:lstStyle/>
+          <a:p>
+            <a:pPr indent="0" marL="0">
+              <a:buNone/>
+            </a:pPr>
+            <a:r>
+              <a:rPr lang="en-US" sz="2200" b="1" dirty="0">
+                <a:solidFill>
+                  <a:srgbClr val="FFFFFF"/>
+                </a:solidFill>
+                <a:latin typeface="Segoe UI" pitchFamily="34" charset="0"/>
+                <a:ea typeface="Segoe UI" pitchFamily="34" charset="-122"/>
+                <a:cs typeface="Segoe UI" pitchFamily="34" charset="-120"/>
+              </a:rPr>
+              <a:t>Final Evaluation on Locked Holdout (1,000 Bootstraps)</a:t>
+            </a:r>
+            <a:endParaRPr lang="en-US" sz="2200" dirty="0"/>
+          </a:p>
+        </p:txBody>
+      </p:sp>
+      <p:sp>
+        <p:nvSpPr>
           <p:cNvPr id="5" name="Shape 3"/>
+          <p:cNvSpPr/>
+          <p:nvPr/>
+        </p:nvSpPr>
+        <p:spPr>
+          <a:xfrm>
+            <a:off x="731520" y="1261872"/>
+            <a:ext cx="1645920" cy="36576"/>
+          </a:xfrm>
+          <a:prstGeom prst="rect">
+            <a:avLst/>
+          </a:prstGeom>
+          <a:solidFill>
+            <a:srgbClr val="06B6D4"/>
+          </a:solidFill>
+          <a:ln w="12700">
+            <a:solidFill>
+              <a:srgbClr val="06B6D4"/>
+            </a:solidFill>
+            <a:prstDash val="solid"/>
+          </a:ln>
+        </p:spPr>
+      </p:sp>
+      <p:sp>
+        <p:nvSpPr>
+          <p:cNvPr id="6" name="Shape 4"/>
+          <p:cNvSpPr/>
+          <p:nvPr/>
+        </p:nvSpPr>
+        <p:spPr>
+          <a:xfrm>
+            <a:off x="2377440" y="1261872"/>
+            <a:ext cx="1097280" cy="36576"/>
+          </a:xfrm>
+          <a:prstGeom prst="rect">
+            <a:avLst/>
+          </a:prstGeom>
+          <a:solidFill>
+            <a:srgbClr val="2563EB"/>
+          </a:solidFill>
+          <a:ln w="12700">
+            <a:solidFill>
+              <a:srgbClr val="2563EB"/>
+            </a:solidFill>
+            <a:prstDash val="solid"/>
+          </a:ln>
+        </p:spPr>
+      </p:sp>
+      <p:sp>
+        <p:nvSpPr>
+          <p:cNvPr id="7" name="Shape 5"/>
           <p:cNvSpPr/>
           <p:nvPr/>
         </p:nvSpPr>
@@ -9492,14 +10748,16 @@
             <a:ext cx="5120640" cy="4572000"/>
           </a:xfrm>
           <a:prstGeom prst="roundRect">
-            <a:avLst/>
+            <a:avLst>
+              <a:gd name="adj" fmla="val 3000"/>
+            </a:avLst>
           </a:prstGeom>
           <a:solidFill>
-            <a:srgbClr val="10151F"/>
+            <a:srgbClr val="121726"/>
           </a:solidFill>
           <a:ln w="19050">
             <a:solidFill>
-              <a:srgbClr val="38BDF8"/>
+              <a:srgbClr val="2563EB"/>
             </a:solidFill>
             <a:prstDash val="solid"/>
           </a:ln>
@@ -9507,7 +10765,7 @@
       </p:sp>
       <p:sp>
         <p:nvSpPr>
-          <p:cNvPr id="6" name="Text 4"/>
+          <p:cNvPr id="8" name="Text 6"/>
           <p:cNvSpPr/>
           <p:nvPr/>
         </p:nvSpPr>
@@ -9546,7 +10804,7 @@
       </p:sp>
       <p:sp>
         <p:nvSpPr>
-          <p:cNvPr id="7" name="Text 5"/>
+          <p:cNvPr id="9" name="Text 7"/>
           <p:cNvSpPr/>
           <p:nvPr/>
         </p:nvSpPr>
@@ -9585,7 +10843,7 @@
       </p:sp>
       <p:sp>
         <p:nvSpPr>
-          <p:cNvPr id="8" name="Text 6"/>
+          <p:cNvPr id="10" name="Text 8"/>
           <p:cNvSpPr/>
           <p:nvPr/>
         </p:nvSpPr>
@@ -9608,7 +10866,7 @@
               <a:buNone/>
             </a:pPr>
             <a:r>
-              <a:rPr lang="en-US" sz="3800" b="1" dirty="0">
+              <a:rPr lang="en-US" sz="4000" b="1" dirty="0">
                 <a:solidFill>
                   <a:srgbClr val="FFFFFF"/>
                 </a:solidFill>
@@ -9618,13 +10876,13 @@
               </a:rPr>
               <a:t>0.730</a:t>
             </a:r>
-            <a:endParaRPr lang="en-US" sz="3800" dirty="0"/>
-          </a:p>
-        </p:txBody>
-      </p:sp>
-      <p:sp>
-        <p:nvSpPr>
-          <p:cNvPr id="9" name="Text 7"/>
+            <a:endParaRPr lang="en-US" sz="4000" dirty="0"/>
+          </a:p>
+        </p:txBody>
+      </p:sp>
+      <p:sp>
+        <p:nvSpPr>
+          <p:cNvPr id="11" name="Text 9"/>
           <p:cNvSpPr/>
           <p:nvPr/>
         </p:nvSpPr>
@@ -9649,7 +10907,7 @@
             <a:r>
               <a:rPr lang="en-US" sz="1150" dirty="0">
                 <a:solidFill>
-                  <a:srgbClr val="2DD4BF"/>
+                  <a:srgbClr val="22D3EE"/>
                 </a:solidFill>
                 <a:latin typeface="Segoe UI" pitchFamily="34" charset="0"/>
                 <a:ea typeface="Segoe UI" pitchFamily="34" charset="-122"/>
@@ -9663,7 +10921,7 @@
       </p:sp>
       <p:sp>
         <p:nvSpPr>
-          <p:cNvPr id="10" name="Text 8"/>
+          <p:cNvPr id="12" name="Text 10"/>
           <p:cNvSpPr/>
           <p:nvPr/>
         </p:nvSpPr>
@@ -9688,7 +10946,7 @@
             <a:r>
               <a:rPr lang="en-US" sz="1150" dirty="0">
                 <a:solidFill>
-                  <a:srgbClr val="CBD5E1"/>
+                  <a:srgbClr val="E2E8F0"/>
                 </a:solidFill>
                 <a:latin typeface="Segoe UI" pitchFamily="34" charset="0"/>
                 <a:ea typeface="Segoe UI" pitchFamily="34" charset="-122"/>
@@ -9705,7 +10963,7 @@
             <a:r>
               <a:rPr lang="en-US" sz="1150" dirty="0">
                 <a:solidFill>
-                  <a:srgbClr val="CBD5E1"/>
+                  <a:srgbClr val="E2E8F0"/>
                 </a:solidFill>
                 <a:latin typeface="Segoe UI" pitchFamily="34" charset="0"/>
                 <a:ea typeface="Segoe UI" pitchFamily="34" charset="-122"/>
@@ -9722,7 +10980,7 @@
             <a:r>
               <a:rPr lang="en-US" sz="1150" dirty="0">
                 <a:solidFill>
-                  <a:srgbClr val="CBD5E1"/>
+                  <a:srgbClr val="E2E8F0"/>
                 </a:solidFill>
                 <a:latin typeface="Segoe UI" pitchFamily="34" charset="0"/>
                 <a:ea typeface="Segoe UI" pitchFamily="34" charset="-122"/>
@@ -9739,7 +10997,7 @@
             <a:r>
               <a:rPr lang="en-US" sz="1150" dirty="0">
                 <a:solidFill>
-                  <a:srgbClr val="CBD5E1"/>
+                  <a:srgbClr val="E2E8F0"/>
                 </a:solidFill>
                 <a:latin typeface="Segoe UI" pitchFamily="34" charset="0"/>
                 <a:ea typeface="Segoe UI" pitchFamily="34" charset="-122"/>
@@ -9756,7 +11014,7 @@
             <a:r>
               <a:rPr lang="en-US" sz="1150" dirty="0">
                 <a:solidFill>
-                  <a:srgbClr val="CBD5E1"/>
+                  <a:srgbClr val="E2E8F0"/>
                 </a:solidFill>
                 <a:latin typeface="Segoe UI" pitchFamily="34" charset="0"/>
                 <a:ea typeface="Segoe UI" pitchFamily="34" charset="-122"/>
@@ -9773,7 +11031,7 @@
             <a:r>
               <a:rPr lang="en-US" sz="1150" dirty="0">
                 <a:solidFill>
-                  <a:srgbClr val="CBD5E1"/>
+                  <a:srgbClr val="E2E8F0"/>
                 </a:solidFill>
                 <a:latin typeface="Segoe UI" pitchFamily="34" charset="0"/>
                 <a:ea typeface="Segoe UI" pitchFamily="34" charset="-122"/>
@@ -9787,7 +11045,7 @@
       </p:sp>
       <p:sp>
         <p:nvSpPr>
-          <p:cNvPr id="11" name="Shape 9"/>
+          <p:cNvPr id="13" name="Shape 11"/>
           <p:cNvSpPr/>
           <p:nvPr/>
         </p:nvSpPr>
@@ -9797,10 +11055,12 @@
             <a:ext cx="5120640" cy="4572000"/>
           </a:xfrm>
           <a:prstGeom prst="roundRect">
-            <a:avLst/>
+            <a:avLst>
+              <a:gd name="adj" fmla="val 3000"/>
+            </a:avLst>
           </a:prstGeom>
           <a:solidFill>
-            <a:srgbClr val="10151F"/>
+            <a:srgbClr val="121726"/>
           </a:solidFill>
           <a:ln w="19050">
             <a:solidFill>
@@ -9812,7 +11072,7 @@
       </p:sp>
       <p:sp>
         <p:nvSpPr>
-          <p:cNvPr id="12" name="Text 10"/>
+          <p:cNvPr id="14" name="Text 12"/>
           <p:cNvSpPr/>
           <p:nvPr/>
         </p:nvSpPr>
@@ -9851,7 +11111,7 @@
       </p:sp>
       <p:sp>
         <p:nvSpPr>
-          <p:cNvPr id="13" name="Text 11"/>
+          <p:cNvPr id="15" name="Text 13"/>
           <p:cNvSpPr/>
           <p:nvPr/>
         </p:nvSpPr>
@@ -9890,7 +11150,7 @@
       </p:sp>
       <p:sp>
         <p:nvSpPr>
-          <p:cNvPr id="14" name="Text 12"/>
+          <p:cNvPr id="16" name="Text 14"/>
           <p:cNvSpPr/>
           <p:nvPr/>
         </p:nvSpPr>
@@ -9913,7 +11173,7 @@
               <a:buNone/>
             </a:pPr>
             <a:r>
-              <a:rPr lang="en-US" sz="3800" b="1" dirty="0">
+              <a:rPr lang="en-US" sz="4000" b="1" dirty="0">
                 <a:solidFill>
                   <a:srgbClr val="FFFFFF"/>
                 </a:solidFill>
@@ -9923,13 +11183,13 @@
               </a:rPr>
               <a:t>0.955</a:t>
             </a:r>
-            <a:endParaRPr lang="en-US" sz="3800" dirty="0"/>
-          </a:p>
-        </p:txBody>
-      </p:sp>
-      <p:sp>
-        <p:nvSpPr>
-          <p:cNvPr id="15" name="Text 13"/>
+            <a:endParaRPr lang="en-US" sz="4000" dirty="0"/>
+          </a:p>
+        </p:txBody>
+      </p:sp>
+      <p:sp>
+        <p:nvSpPr>
+          <p:cNvPr id="17" name="Text 15"/>
           <p:cNvSpPr/>
           <p:nvPr/>
         </p:nvSpPr>
@@ -9968,7 +11228,7 @@
       </p:sp>
       <p:sp>
         <p:nvSpPr>
-          <p:cNvPr id="16" name="Text 14"/>
+          <p:cNvPr id="18" name="Text 16"/>
           <p:cNvSpPr/>
           <p:nvPr/>
         </p:nvSpPr>
@@ -9993,7 +11253,7 @@
             <a:r>
               <a:rPr lang="en-US" sz="1150" dirty="0">
                 <a:solidFill>
-                  <a:srgbClr val="CBD5E1"/>
+                  <a:srgbClr val="E2E8F0"/>
                 </a:solidFill>
                 <a:latin typeface="Segoe UI" pitchFamily="34" charset="0"/>
                 <a:ea typeface="Segoe UI" pitchFamily="34" charset="-122"/>
@@ -10010,7 +11270,7 @@
             <a:r>
               <a:rPr lang="en-US" sz="1150" dirty="0">
                 <a:solidFill>
-                  <a:srgbClr val="CBD5E1"/>
+                  <a:srgbClr val="E2E8F0"/>
                 </a:solidFill>
                 <a:latin typeface="Segoe UI" pitchFamily="34" charset="0"/>
                 <a:ea typeface="Segoe UI" pitchFamily="34" charset="-122"/>
@@ -10027,7 +11287,7 @@
             <a:r>
               <a:rPr lang="en-US" sz="1150" dirty="0">
                 <a:solidFill>
-                  <a:srgbClr val="CBD5E1"/>
+                  <a:srgbClr val="E2E8F0"/>
                 </a:solidFill>
                 <a:latin typeface="Segoe UI" pitchFamily="34" charset="0"/>
                 <a:ea typeface="Segoe UI" pitchFamily="34" charset="-122"/>
@@ -10044,7 +11304,7 @@
             <a:r>
               <a:rPr lang="en-US" sz="1150" dirty="0">
                 <a:solidFill>
-                  <a:srgbClr val="CBD5E1"/>
+                  <a:srgbClr val="E2E8F0"/>
                 </a:solidFill>
                 <a:latin typeface="Segoe UI" pitchFamily="34" charset="0"/>
                 <a:ea typeface="Segoe UI" pitchFamily="34" charset="-122"/>
@@ -10061,7 +11321,7 @@
             <a:r>
               <a:rPr lang="en-US" sz="1150" dirty="0">
                 <a:solidFill>
-                  <a:srgbClr val="CBD5E1"/>
+                  <a:srgbClr val="E2E8F0"/>
                 </a:solidFill>
                 <a:latin typeface="Segoe UI" pitchFamily="34" charset="0"/>
                 <a:ea typeface="Segoe UI" pitchFamily="34" charset="-122"/>
@@ -10078,7 +11338,7 @@
             <a:r>
               <a:rPr lang="en-US" sz="1150" dirty="0">
                 <a:solidFill>
-                  <a:srgbClr val="CBD5E1"/>
+                  <a:srgbClr val="E2E8F0"/>
                 </a:solidFill>
                 <a:latin typeface="Segoe UI" pitchFamily="34" charset="0"/>
                 <a:ea typeface="Segoe UI" pitchFamily="34" charset="-122"/>
